--- a/Uni-Rahmen/DHBW Stuttgart_Poster Vorlage_Systemschriften_2016.pptx
+++ b/Uni-Rahmen/DHBW Stuttgart_Poster Vorlage_Systemschriften_2016.pptx
@@ -109,7 +109,7 @@
   </p:defaultTextStyle>
   <p:extLst>
     <p:ext uri="{EFAFB233-063F-42B5-8137-9DF3F51BA10A}">
-      <p15:sldGuideLst xmlns:p15="http://schemas.microsoft.com/office/powerpoint/2012/main" xmlns="">
+      <p15:sldGuideLst xmlns:p15="http://schemas.microsoft.com/office/powerpoint/2012/main">
         <p15:guide id="1" orient="horz" pos="13755">
           <p15:clr>
             <a:srgbClr val="A4A3A4"/>
@@ -186,10 +186,383 @@
 </p:presentation>
 </file>
 
+<file path=ppt/revisionInfo.xml><?xml version="1.0" encoding="utf-8"?>
+<p1510:revInfo xmlns:a="http://schemas.openxmlformats.org/drawingml/2006/main" xmlns:r="http://schemas.openxmlformats.org/officeDocument/2006/relationships" xmlns:p1510="http://schemas.microsoft.com/office/powerpoint/2015/10/main">
+  <p1510:revLst>
+    <p1510:client id="{CD0E33CB-AF77-47D6-BB86-3CCF7415E851}" v="35" dt="2026-06-23T09:56:16.325"/>
+  </p1510:revLst>
+</p1510:revInfo>
+</file>
+
+<file path=ppt/changesInfos/changesInfo1.xml><?xml version="1.0" encoding="utf-8"?>
+<pc:chgInfo xmlns:a="http://schemas.openxmlformats.org/drawingml/2006/main" xmlns:r="http://schemas.openxmlformats.org/officeDocument/2006/relationships" xmlns:ac="http://schemas.microsoft.com/office/drawing/2013/main/command" xmlns:pc="http://schemas.microsoft.com/office/powerpoint/2013/main/command">
+  <pc:docChgLst>
+    <pc:chgData name="Joel Martinez" userId="12cbf0608c71f555" providerId="LiveId" clId="{50DB1A23-1240-424A-AFC1-A5DEF51688E2}"/>
+    <pc:docChg chg="undo custSel modSld">
+      <pc:chgData name="Joel Martinez" userId="12cbf0608c71f555" providerId="LiveId" clId="{50DB1A23-1240-424A-AFC1-A5DEF51688E2}" dt="2026-06-23T09:57:04.710" v="768" actId="1076"/>
+      <pc:docMkLst>
+        <pc:docMk/>
+      </pc:docMkLst>
+      <pc:sldChg chg="addSp delSp modSp mod">
+        <pc:chgData name="Joel Martinez" userId="12cbf0608c71f555" providerId="LiveId" clId="{50DB1A23-1240-424A-AFC1-A5DEF51688E2}" dt="2026-06-23T09:57:04.710" v="768" actId="1076"/>
+        <pc:sldMkLst>
+          <pc:docMk/>
+          <pc:sldMk cId="2259815693" sldId="256"/>
+        </pc:sldMkLst>
+        <pc:spChg chg="del mod">
+          <ac:chgData name="Joel Martinez" userId="12cbf0608c71f555" providerId="LiveId" clId="{50DB1A23-1240-424A-AFC1-A5DEF51688E2}" dt="2026-06-23T09:35:53.688" v="389" actId="478"/>
+          <ac:spMkLst>
+            <pc:docMk/>
+            <pc:sldMk cId="2259815693" sldId="256"/>
+            <ac:spMk id="3" creationId="{00000000-0000-0000-0000-000000000000}"/>
+          </ac:spMkLst>
+        </pc:spChg>
+        <pc:spChg chg="mod">
+          <ac:chgData name="Joel Martinez" userId="12cbf0608c71f555" providerId="LiveId" clId="{50DB1A23-1240-424A-AFC1-A5DEF51688E2}" dt="2026-06-23T09:20:52.013" v="149" actId="14100"/>
+          <ac:spMkLst>
+            <pc:docMk/>
+            <pc:sldMk cId="2259815693" sldId="256"/>
+            <ac:spMk id="4" creationId="{00000000-0000-0000-0000-000000000000}"/>
+          </ac:spMkLst>
+        </pc:spChg>
+        <pc:spChg chg="mod">
+          <ac:chgData name="Joel Martinez" userId="12cbf0608c71f555" providerId="LiveId" clId="{50DB1A23-1240-424A-AFC1-A5DEF51688E2}" dt="2026-06-23T09:46:25.384" v="492" actId="20577"/>
+          <ac:spMkLst>
+            <pc:docMk/>
+            <pc:sldMk cId="2259815693" sldId="256"/>
+            <ac:spMk id="5" creationId="{00000000-0000-0000-0000-000000000000}"/>
+          </ac:spMkLst>
+        </pc:spChg>
+        <pc:spChg chg="mod">
+          <ac:chgData name="Joel Martinez" userId="12cbf0608c71f555" providerId="LiveId" clId="{50DB1A23-1240-424A-AFC1-A5DEF51688E2}" dt="2026-06-23T09:47:13.955" v="501" actId="20577"/>
+          <ac:spMkLst>
+            <pc:docMk/>
+            <pc:sldMk cId="2259815693" sldId="256"/>
+            <ac:spMk id="6" creationId="{00000000-0000-0000-0000-000000000000}"/>
+          </ac:spMkLst>
+        </pc:spChg>
+        <pc:spChg chg="add mod">
+          <ac:chgData name="Joel Martinez" userId="12cbf0608c71f555" providerId="LiveId" clId="{50DB1A23-1240-424A-AFC1-A5DEF51688E2}" dt="2026-06-23T09:16:54.958" v="120" actId="931"/>
+          <ac:spMkLst>
+            <pc:docMk/>
+            <pc:sldMk cId="2259815693" sldId="256"/>
+            <ac:spMk id="8" creationId="{8C607411-2C3E-43CA-F83D-922B877D84C2}"/>
+          </ac:spMkLst>
+        </pc:spChg>
+        <pc:spChg chg="del">
+          <ac:chgData name="Joel Martinez" userId="12cbf0608c71f555" providerId="LiveId" clId="{50DB1A23-1240-424A-AFC1-A5DEF51688E2}" dt="2026-06-23T09:18:56.243" v="121" actId="931"/>
+          <ac:spMkLst>
+            <pc:docMk/>
+            <pc:sldMk cId="2259815693" sldId="256"/>
+            <ac:spMk id="16" creationId="{00000000-0000-0000-0000-000000000000}"/>
+          </ac:spMkLst>
+        </pc:spChg>
+        <pc:spChg chg="mod">
+          <ac:chgData name="Joel Martinez" userId="12cbf0608c71f555" providerId="LiveId" clId="{50DB1A23-1240-424A-AFC1-A5DEF51688E2}" dt="2026-06-23T09:34:30.476" v="345" actId="14100"/>
+          <ac:spMkLst>
+            <pc:docMk/>
+            <pc:sldMk cId="2259815693" sldId="256"/>
+            <ac:spMk id="17" creationId="{00000000-0000-0000-0000-000000000000}"/>
+          </ac:spMkLst>
+        </pc:spChg>
+        <pc:spChg chg="mod">
+          <ac:chgData name="Joel Martinez" userId="12cbf0608c71f555" providerId="LiveId" clId="{50DB1A23-1240-424A-AFC1-A5DEF51688E2}" dt="2026-06-23T09:56:26.319" v="766" actId="20577"/>
+          <ac:spMkLst>
+            <pc:docMk/>
+            <pc:sldMk cId="2259815693" sldId="256"/>
+            <ac:spMk id="18" creationId="{00000000-0000-0000-0000-000000000000}"/>
+          </ac:spMkLst>
+        </pc:spChg>
+        <pc:spChg chg="add del">
+          <ac:chgData name="Joel Martinez" userId="12cbf0608c71f555" providerId="LiveId" clId="{50DB1A23-1240-424A-AFC1-A5DEF51688E2}" dt="2026-06-23T09:19:32.308" v="122" actId="931"/>
+          <ac:spMkLst>
+            <pc:docMk/>
+            <pc:sldMk cId="2259815693" sldId="256"/>
+            <ac:spMk id="19" creationId="{00000000-0000-0000-0000-000000000000}"/>
+          </ac:spMkLst>
+        </pc:spChg>
+        <pc:spChg chg="del">
+          <ac:chgData name="Joel Martinez" userId="12cbf0608c71f555" providerId="LiveId" clId="{50DB1A23-1240-424A-AFC1-A5DEF51688E2}" dt="2026-06-23T09:19:38.633" v="123" actId="931"/>
+          <ac:spMkLst>
+            <pc:docMk/>
+            <pc:sldMk cId="2259815693" sldId="256"/>
+            <ac:spMk id="20" creationId="{00000000-0000-0000-0000-000000000000}"/>
+          </ac:spMkLst>
+        </pc:spChg>
+        <pc:spChg chg="del">
+          <ac:chgData name="Joel Martinez" userId="12cbf0608c71f555" providerId="LiveId" clId="{50DB1A23-1240-424A-AFC1-A5DEF51688E2}" dt="2026-06-23T09:19:46.798" v="124" actId="931"/>
+          <ac:spMkLst>
+            <pc:docMk/>
+            <pc:sldMk cId="2259815693" sldId="256"/>
+            <ac:spMk id="21" creationId="{00000000-0000-0000-0000-000000000000}"/>
+          </ac:spMkLst>
+        </pc:spChg>
+        <pc:spChg chg="del mod">
+          <ac:chgData name="Joel Martinez" userId="12cbf0608c71f555" providerId="LiveId" clId="{50DB1A23-1240-424A-AFC1-A5DEF51688E2}" dt="2026-06-23T09:45:45.964" v="481" actId="478"/>
+          <ac:spMkLst>
+            <pc:docMk/>
+            <pc:sldMk cId="2259815693" sldId="256"/>
+            <ac:spMk id="22" creationId="{00000000-0000-0000-0000-000000000000}"/>
+          </ac:spMkLst>
+        </pc:spChg>
+        <pc:spChg chg="del mod">
+          <ac:chgData name="Joel Martinez" userId="12cbf0608c71f555" providerId="LiveId" clId="{50DB1A23-1240-424A-AFC1-A5DEF51688E2}" dt="2026-06-23T09:45:47.596" v="482" actId="478"/>
+          <ac:spMkLst>
+            <pc:docMk/>
+            <pc:sldMk cId="2259815693" sldId="256"/>
+            <ac:spMk id="23" creationId="{00000000-0000-0000-0000-000000000000}"/>
+          </ac:spMkLst>
+        </pc:spChg>
+        <pc:spChg chg="del mod">
+          <ac:chgData name="Joel Martinez" userId="12cbf0608c71f555" providerId="LiveId" clId="{50DB1A23-1240-424A-AFC1-A5DEF51688E2}" dt="2026-06-23T09:45:43.755" v="480" actId="478"/>
+          <ac:spMkLst>
+            <pc:docMk/>
+            <pc:sldMk cId="2259815693" sldId="256"/>
+            <ac:spMk id="24" creationId="{00000000-0000-0000-0000-000000000000}"/>
+          </ac:spMkLst>
+        </pc:spChg>
+        <pc:spChg chg="mod">
+          <ac:chgData name="Joel Martinez" userId="12cbf0608c71f555" providerId="LiveId" clId="{50DB1A23-1240-424A-AFC1-A5DEF51688E2}" dt="2026-06-23T09:47:54.532" v="508" actId="14100"/>
+          <ac:spMkLst>
+            <pc:docMk/>
+            <pc:sldMk cId="2259815693" sldId="256"/>
+            <ac:spMk id="26" creationId="{00000000-0000-0000-0000-000000000000}"/>
+          </ac:spMkLst>
+        </pc:spChg>
+        <pc:spChg chg="add del mod">
+          <ac:chgData name="Joel Martinez" userId="12cbf0608c71f555" providerId="LiveId" clId="{50DB1A23-1240-424A-AFC1-A5DEF51688E2}" dt="2026-06-23T09:25:44.787" v="289" actId="478"/>
+          <ac:spMkLst>
+            <pc:docMk/>
+            <pc:sldMk cId="2259815693" sldId="256"/>
+            <ac:spMk id="28" creationId="{CA427DF1-34E6-716C-0AC7-5507543B7F8F}"/>
+          </ac:spMkLst>
+        </pc:spChg>
+        <pc:spChg chg="del mod">
+          <ac:chgData name="Joel Martinez" userId="12cbf0608c71f555" providerId="LiveId" clId="{50DB1A23-1240-424A-AFC1-A5DEF51688E2}" dt="2026-06-23T09:35:55.650" v="391" actId="478"/>
+          <ac:spMkLst>
+            <pc:docMk/>
+            <pc:sldMk cId="2259815693" sldId="256"/>
+            <ac:spMk id="32" creationId="{00000000-0000-0000-0000-000000000000}"/>
+          </ac:spMkLst>
+        </pc:spChg>
+        <pc:spChg chg="add mod">
+          <ac:chgData name="Joel Martinez" userId="12cbf0608c71f555" providerId="LiveId" clId="{50DB1A23-1240-424A-AFC1-A5DEF51688E2}" dt="2026-06-23T09:51:28.947" v="700" actId="20577"/>
+          <ac:spMkLst>
+            <pc:docMk/>
+            <pc:sldMk cId="2259815693" sldId="256"/>
+            <ac:spMk id="34" creationId="{2F69AE73-3DCA-7BA6-7691-9BCDBC1383DB}"/>
+          </ac:spMkLst>
+        </pc:spChg>
+        <pc:spChg chg="add del mod">
+          <ac:chgData name="Joel Martinez" userId="12cbf0608c71f555" providerId="LiveId" clId="{50DB1A23-1240-424A-AFC1-A5DEF51688E2}" dt="2026-06-23T09:50:52.434" v="640" actId="478"/>
+          <ac:spMkLst>
+            <pc:docMk/>
+            <pc:sldMk cId="2259815693" sldId="256"/>
+            <ac:spMk id="35" creationId="{C8679D0B-FAA6-272C-32A2-B3B6562B8E54}"/>
+          </ac:spMkLst>
+        </pc:spChg>
+        <pc:spChg chg="mod">
+          <ac:chgData name="Joel Martinez" userId="12cbf0608c71f555" providerId="LiveId" clId="{50DB1A23-1240-424A-AFC1-A5DEF51688E2}" dt="2026-06-23T09:21:25.797" v="176" actId="20577"/>
+          <ac:spMkLst>
+            <pc:docMk/>
+            <pc:sldMk cId="2259815693" sldId="256"/>
+            <ac:spMk id="39" creationId="{00000000-0000-0000-0000-000000000000}"/>
+          </ac:spMkLst>
+        </pc:spChg>
+        <pc:spChg chg="mod">
+          <ac:chgData name="Joel Martinez" userId="12cbf0608c71f555" providerId="LiveId" clId="{50DB1A23-1240-424A-AFC1-A5DEF51688E2}" dt="2026-06-23T09:56:08.342" v="763" actId="20577"/>
+          <ac:spMkLst>
+            <pc:docMk/>
+            <pc:sldMk cId="2259815693" sldId="256"/>
+            <ac:spMk id="40" creationId="{00000000-0000-0000-0000-000000000000}"/>
+          </ac:spMkLst>
+        </pc:spChg>
+        <pc:spChg chg="mod">
+          <ac:chgData name="Joel Martinez" userId="12cbf0608c71f555" providerId="LiveId" clId="{50DB1A23-1240-424A-AFC1-A5DEF51688E2}" dt="2026-06-23T09:51:34.994" v="711" actId="20577"/>
+          <ac:spMkLst>
+            <pc:docMk/>
+            <pc:sldMk cId="2259815693" sldId="256"/>
+            <ac:spMk id="56" creationId="{00000000-0000-0000-0000-000000000000}"/>
+          </ac:spMkLst>
+        </pc:spChg>
+        <pc:spChg chg="mod">
+          <ac:chgData name="Joel Martinez" userId="12cbf0608c71f555" providerId="LiveId" clId="{50DB1A23-1240-424A-AFC1-A5DEF51688E2}" dt="2026-06-23T09:55:04.980" v="736" actId="6549"/>
+          <ac:spMkLst>
+            <pc:docMk/>
+            <pc:sldMk cId="2259815693" sldId="256"/>
+            <ac:spMk id="57" creationId="{00000000-0000-0000-0000-000000000000}"/>
+          </ac:spMkLst>
+        </pc:spChg>
+        <pc:picChg chg="add mod">
+          <ac:chgData name="Joel Martinez" userId="12cbf0608c71f555" providerId="LiveId" clId="{50DB1A23-1240-424A-AFC1-A5DEF51688E2}" dt="2026-06-23T09:16:54.958" v="120" actId="931"/>
+          <ac:picMkLst>
+            <pc:docMk/>
+            <pc:sldMk cId="2259815693" sldId="256"/>
+            <ac:picMk id="7" creationId="{853EDEFB-1413-5FC3-1868-6290CCE2FDCC}"/>
+          </ac:picMkLst>
+        </pc:picChg>
+        <pc:picChg chg="add del mod ord modCrop">
+          <ac:chgData name="Joel Martinez" userId="12cbf0608c71f555" providerId="LiveId" clId="{50DB1A23-1240-424A-AFC1-A5DEF51688E2}" dt="2026-06-23T09:25:44.787" v="289" actId="478"/>
+          <ac:picMkLst>
+            <pc:docMk/>
+            <pc:sldMk cId="2259815693" sldId="256"/>
+            <ac:picMk id="10" creationId="{0A25BBBA-215A-0C38-8502-65EAF169D803}"/>
+          </ac:picMkLst>
+        </pc:picChg>
+        <pc:picChg chg="add mod ord modCrop">
+          <ac:chgData name="Joel Martinez" userId="12cbf0608c71f555" providerId="LiveId" clId="{50DB1A23-1240-424A-AFC1-A5DEF51688E2}" dt="2026-06-23T09:24:27.806" v="275" actId="1076"/>
+          <ac:picMkLst>
+            <pc:docMk/>
+            <pc:sldMk cId="2259815693" sldId="256"/>
+            <ac:picMk id="12" creationId="{F997814E-F9D3-E744-C05E-7F0F04B77008}"/>
+          </ac:picMkLst>
+        </pc:picChg>
+        <pc:picChg chg="add mod ord">
+          <ac:chgData name="Joel Martinez" userId="12cbf0608c71f555" providerId="LiveId" clId="{50DB1A23-1240-424A-AFC1-A5DEF51688E2}" dt="2026-06-23T09:19:38.633" v="123" actId="931"/>
+          <ac:picMkLst>
+            <pc:docMk/>
+            <pc:sldMk cId="2259815693" sldId="256"/>
+            <ac:picMk id="14" creationId="{F5DBD4AC-54D7-7FEB-DA6E-79E89A85D039}"/>
+          </ac:picMkLst>
+        </pc:picChg>
+        <pc:picChg chg="add mod ord modCrop">
+          <ac:chgData name="Joel Martinez" userId="12cbf0608c71f555" providerId="LiveId" clId="{50DB1A23-1240-424A-AFC1-A5DEF51688E2}" dt="2026-06-23T09:24:45.405" v="281" actId="1076"/>
+          <ac:picMkLst>
+            <pc:docMk/>
+            <pc:sldMk cId="2259815693" sldId="256"/>
+            <ac:picMk id="25" creationId="{49808FA1-334A-15B3-B3FF-3A5C21890F24}"/>
+          </ac:picMkLst>
+        </pc:picChg>
+        <pc:picChg chg="add del mod ord">
+          <ac:chgData name="Joel Martinez" userId="12cbf0608c71f555" providerId="LiveId" clId="{50DB1A23-1240-424A-AFC1-A5DEF51688E2}" dt="2026-06-23T09:25:44.562" v="288" actId="931"/>
+          <ac:picMkLst>
+            <pc:docMk/>
+            <pc:sldMk cId="2259815693" sldId="256"/>
+            <ac:picMk id="30" creationId="{962ADDE6-D2BD-8994-7226-B58081A241B4}"/>
+          </ac:picMkLst>
+        </pc:picChg>
+        <pc:picChg chg="add mod ord">
+          <ac:chgData name="Joel Martinez" userId="12cbf0608c71f555" providerId="LiveId" clId="{50DB1A23-1240-424A-AFC1-A5DEF51688E2}" dt="2026-06-23T09:46:41.284" v="497" actId="167"/>
+          <ac:picMkLst>
+            <pc:docMk/>
+            <pc:sldMk cId="2259815693" sldId="256"/>
+            <ac:picMk id="33" creationId="{FCBEABFC-64A0-0766-0322-48F97ECA2D75}"/>
+          </ac:picMkLst>
+        </pc:picChg>
+        <pc:picChg chg="add mod">
+          <ac:chgData name="Joel Martinez" userId="12cbf0608c71f555" providerId="LiveId" clId="{50DB1A23-1240-424A-AFC1-A5DEF51688E2}" dt="2026-06-23T09:57:04.710" v="768" actId="1076"/>
+          <ac:picMkLst>
+            <pc:docMk/>
+            <pc:sldMk cId="2259815693" sldId="256"/>
+            <ac:picMk id="37" creationId="{35EC58EC-0A78-9535-AEBD-3DB0ED014535}"/>
+          </ac:picMkLst>
+        </pc:picChg>
+        <pc:picChg chg="mod">
+          <ac:chgData name="Joel Martinez" userId="12cbf0608c71f555" providerId="LiveId" clId="{50DB1A23-1240-424A-AFC1-A5DEF51688E2}" dt="2026-06-23T09:47:26.449" v="505" actId="1036"/>
+          <ac:picMkLst>
+            <pc:docMk/>
+            <pc:sldMk cId="2259815693" sldId="256"/>
+            <ac:picMk id="48" creationId="{00000000-0000-0000-0000-000000000000}"/>
+          </ac:picMkLst>
+        </pc:picChg>
+        <pc:picChg chg="del">
+          <ac:chgData name="Joel Martinez" userId="12cbf0608c71f555" providerId="LiveId" clId="{50DB1A23-1240-424A-AFC1-A5DEF51688E2}" dt="2026-06-23T09:35:47.237" v="386" actId="478"/>
+          <ac:picMkLst>
+            <pc:docMk/>
+            <pc:sldMk cId="2259815693" sldId="256"/>
+            <ac:picMk id="1026" creationId="{00000000-0000-0000-0000-000000000000}"/>
+          </ac:picMkLst>
+        </pc:picChg>
+        <pc:picChg chg="del mod">
+          <ac:chgData name="Joel Martinez" userId="12cbf0608c71f555" providerId="LiveId" clId="{50DB1A23-1240-424A-AFC1-A5DEF51688E2}" dt="2026-06-23T09:46:47.260" v="499" actId="478"/>
+          <ac:picMkLst>
+            <pc:docMk/>
+            <pc:sldMk cId="2259815693" sldId="256"/>
+            <ac:picMk id="2050" creationId="{00000000-0000-0000-0000-000000000000}"/>
+          </ac:picMkLst>
+        </pc:picChg>
+        <pc:picChg chg="del">
+          <ac:chgData name="Joel Martinez" userId="12cbf0608c71f555" providerId="LiveId" clId="{50DB1A23-1240-424A-AFC1-A5DEF51688E2}" dt="2026-06-23T09:35:47.974" v="387" actId="478"/>
+          <ac:picMkLst>
+            <pc:docMk/>
+            <pc:sldMk cId="2259815693" sldId="256"/>
+            <ac:picMk id="2051" creationId="{00000000-0000-0000-0000-000000000000}"/>
+          </ac:picMkLst>
+        </pc:picChg>
+        <pc:cxnChg chg="add del mod">
+          <ac:chgData name="Joel Martinez" userId="12cbf0608c71f555" providerId="LiveId" clId="{50DB1A23-1240-424A-AFC1-A5DEF51688E2}" dt="2026-06-23T09:55:14.363" v="737" actId="1076"/>
+          <ac:cxnSpMkLst>
+            <pc:docMk/>
+            <pc:sldMk cId="2259815693" sldId="256"/>
+            <ac:cxnSpMk id="58" creationId="{00000000-0000-0000-0000-000000000000}"/>
+          </ac:cxnSpMkLst>
+        </pc:cxnChg>
+        <pc:cxnChg chg="add del mod">
+          <ac:chgData name="Joel Martinez" userId="12cbf0608c71f555" providerId="LiveId" clId="{50DB1A23-1240-424A-AFC1-A5DEF51688E2}" dt="2026-06-23T09:55:22.672" v="742" actId="1036"/>
+          <ac:cxnSpMkLst>
+            <pc:docMk/>
+            <pc:sldMk cId="2259815693" sldId="256"/>
+            <ac:cxnSpMk id="59" creationId="{00000000-0000-0000-0000-000000000000}"/>
+          </ac:cxnSpMkLst>
+        </pc:cxnChg>
+        <pc:cxnChg chg="mod">
+          <ac:chgData name="Joel Martinez" userId="12cbf0608c71f555" providerId="LiveId" clId="{50DB1A23-1240-424A-AFC1-A5DEF51688E2}" dt="2026-06-23T09:44:43.546" v="445" actId="1036"/>
+          <ac:cxnSpMkLst>
+            <pc:docMk/>
+            <pc:sldMk cId="2259815693" sldId="256"/>
+            <ac:cxnSpMk id="71" creationId="{00000000-0000-0000-0000-000000000000}"/>
+          </ac:cxnSpMkLst>
+        </pc:cxnChg>
+        <pc:cxnChg chg="mod">
+          <ac:chgData name="Joel Martinez" userId="12cbf0608c71f555" providerId="LiveId" clId="{50DB1A23-1240-424A-AFC1-A5DEF51688E2}" dt="2026-06-23T09:44:54.636" v="460" actId="1038"/>
+          <ac:cxnSpMkLst>
+            <pc:docMk/>
+            <pc:sldMk cId="2259815693" sldId="256"/>
+            <ac:cxnSpMk id="72" creationId="{00000000-0000-0000-0000-000000000000}"/>
+          </ac:cxnSpMkLst>
+        </pc:cxnChg>
+        <pc:cxnChg chg="mod">
+          <ac:chgData name="Joel Martinez" userId="12cbf0608c71f555" providerId="LiveId" clId="{50DB1A23-1240-424A-AFC1-A5DEF51688E2}" dt="2026-06-23T09:45:06.941" v="465" actId="1035"/>
+          <ac:cxnSpMkLst>
+            <pc:docMk/>
+            <pc:sldMk cId="2259815693" sldId="256"/>
+            <ac:cxnSpMk id="73" creationId="{00000000-0000-0000-0000-000000000000}"/>
+          </ac:cxnSpMkLst>
+        </pc:cxnChg>
+        <pc:cxnChg chg="del mod">
+          <ac:chgData name="Joel Martinez" userId="12cbf0608c71f555" providerId="LiveId" clId="{50DB1A23-1240-424A-AFC1-A5DEF51688E2}" dt="2026-06-23T09:34:54.770" v="350" actId="478"/>
+          <ac:cxnSpMkLst>
+            <pc:docMk/>
+            <pc:sldMk cId="2259815693" sldId="256"/>
+            <ac:cxnSpMk id="78" creationId="{00000000-0000-0000-0000-000000000000}"/>
+          </ac:cxnSpMkLst>
+        </pc:cxnChg>
+        <pc:cxnChg chg="mod">
+          <ac:chgData name="Joel Martinez" userId="12cbf0608c71f555" providerId="LiveId" clId="{50DB1A23-1240-424A-AFC1-A5DEF51688E2}" dt="2026-06-23T09:34:50.731" v="349" actId="1076"/>
+          <ac:cxnSpMkLst>
+            <pc:docMk/>
+            <pc:sldMk cId="2259815693" sldId="256"/>
+            <ac:cxnSpMk id="79" creationId="{00000000-0000-0000-0000-000000000000}"/>
+          </ac:cxnSpMkLst>
+        </pc:cxnChg>
+        <pc:cxnChg chg="mod">
+          <ac:chgData name="Joel Martinez" userId="12cbf0608c71f555" providerId="LiveId" clId="{50DB1A23-1240-424A-AFC1-A5DEF51688E2}" dt="2026-06-23T09:34:44.356" v="348" actId="1076"/>
+          <ac:cxnSpMkLst>
+            <pc:docMk/>
+            <pc:sldMk cId="2259815693" sldId="256"/>
+            <ac:cxnSpMk id="80" creationId="{00000000-0000-0000-0000-000000000000}"/>
+          </ac:cxnSpMkLst>
+        </pc:cxnChg>
+      </pc:sldChg>
+    </pc:docChg>
+  </pc:docChgLst>
+</pc:chgInfo>
+</file>
+
 <file path=ppt/charts/chart1.xml><?xml version="1.0" encoding="utf-8"?>
-<c:chartSpace xmlns:c="http://schemas.openxmlformats.org/drawingml/2006/chart" xmlns:a="http://schemas.openxmlformats.org/drawingml/2006/main" xmlns:r="http://schemas.openxmlformats.org/officeDocument/2006/relationships">
+<c:chartSpace xmlns:c="http://schemas.openxmlformats.org/drawingml/2006/chart" xmlns:a="http://schemas.openxmlformats.org/drawingml/2006/main" xmlns:r="http://schemas.openxmlformats.org/officeDocument/2006/relationships" xmlns:c16r2="http://schemas.microsoft.com/office/drawing/2015/06/chart">
   <c:date1904 val="0"/>
-  <c:lang val="de-DE"/>
+  <c:lang val="en-US"/>
   <c:roundedCorners val="0"/>
   <mc:AlternateContent xmlns:mc="http://schemas.openxmlformats.org/markup-compatibility/2006">
     <mc:Choice xmlns:c14="http://schemas.microsoft.com/office/drawing/2007/8/2/chart" Requires="c14">
@@ -215,7 +588,7 @@
               </a:defRPr>
             </a:pPr>
             <a:r>
-              <a:rPr lang="de-DE" sz="2000" b="0" dirty="0" smtClean="0">
+              <a:rPr lang="de-DE" sz="2000" b="0" dirty="0">
                 <a:solidFill>
                   <a:schemeClr val="accent1"/>
                 </a:solidFill>
@@ -224,13 +597,6 @@
               </a:rPr>
               <a:t>» Titel Diagramm </a:t>
             </a:r>
-            <a:endParaRPr lang="de-DE" sz="2000" b="0" dirty="0">
-              <a:solidFill>
-                <a:schemeClr val="accent1"/>
-              </a:solidFill>
-              <a:latin typeface="Arial" panose="020B0604020202020204" pitchFamily="34" charset="0"/>
-              <a:cs typeface="Arial" panose="020B0604020202020204" pitchFamily="34" charset="0"/>
-            </a:endParaRPr>
           </a:p>
         </c:rich>
       </c:tx>
@@ -305,6 +671,11 @@
               </c:numCache>
             </c:numRef>
           </c:val>
+          <c:extLst>
+            <c:ext xmlns:c16="http://schemas.microsoft.com/office/drawing/2014/chart" uri="{C3380CC4-5D6E-409C-BE32-E72D297353CC}">
+              <c16:uniqueId val="{00000000-FDE9-46B9-A60F-5B36B26DD8D4}"/>
+            </c:ext>
+          </c:extLst>
         </c:ser>
         <c:ser>
           <c:idx val="1"/>
@@ -350,6 +721,11 @@
               </c:numCache>
             </c:numRef>
           </c:val>
+          <c:extLst>
+            <c:ext xmlns:c16="http://schemas.microsoft.com/office/drawing/2014/chart" uri="{C3380CC4-5D6E-409C-BE32-E72D297353CC}">
+              <c16:uniqueId val="{00000001-FDE9-46B9-A60F-5B36B26DD8D4}"/>
+            </c:ext>
+          </c:extLst>
         </c:ser>
         <c:ser>
           <c:idx val="2"/>
@@ -395,6 +771,11 @@
               </c:numCache>
             </c:numRef>
           </c:val>
+          <c:extLst>
+            <c:ext xmlns:c16="http://schemas.microsoft.com/office/drawing/2014/chart" uri="{C3380CC4-5D6E-409C-BE32-E72D297353CC}">
+              <c16:uniqueId val="{00000002-FDE9-46B9-A60F-5B36B26DD8D4}"/>
+            </c:ext>
+          </c:extLst>
         </c:ser>
         <c:ser>
           <c:idx val="3"/>
@@ -440,6 +821,11 @@
               </c:numCache>
             </c:numRef>
           </c:val>
+          <c:extLst>
+            <c:ext xmlns:c16="http://schemas.microsoft.com/office/drawing/2014/chart" uri="{C3380CC4-5D6E-409C-BE32-E72D297353CC}">
+              <c16:uniqueId val="{00000003-FDE9-46B9-A60F-5B36B26DD8D4}"/>
+            </c:ext>
+          </c:extLst>
         </c:ser>
         <c:dLbls>
           <c:showLegendKey val="0"/>
@@ -631,9 +1017,9 @@
 </file>
 
 <file path=ppt/charts/chart2.xml><?xml version="1.0" encoding="utf-8"?>
-<c:chartSpace xmlns:c="http://schemas.openxmlformats.org/drawingml/2006/chart" xmlns:a="http://schemas.openxmlformats.org/drawingml/2006/main" xmlns:r="http://schemas.openxmlformats.org/officeDocument/2006/relationships">
+<c:chartSpace xmlns:c="http://schemas.openxmlformats.org/drawingml/2006/chart" xmlns:a="http://schemas.openxmlformats.org/drawingml/2006/main" xmlns:r="http://schemas.openxmlformats.org/officeDocument/2006/relationships" xmlns:c16r2="http://schemas.microsoft.com/office/drawing/2015/06/chart">
   <c:date1904 val="0"/>
-  <c:lang val="de-DE"/>
+  <c:lang val="en-US"/>
   <c:roundedCorners val="0"/>
   <mc:AlternateContent xmlns:mc="http://schemas.openxmlformats.org/markup-compatibility/2006">
     <mc:Choice xmlns:c14="http://schemas.microsoft.com/office/drawing/2007/8/2/chart" Requires="c14">
@@ -660,7 +1046,7 @@
               </a:defRPr>
             </a:pPr>
             <a:r>
-              <a:rPr lang="de-DE" sz="2000" b="0" dirty="0" smtClean="0">
+              <a:rPr lang="de-DE" sz="2000" b="0" dirty="0">
                 <a:solidFill>
                   <a:schemeClr val="accent1"/>
                 </a:solidFill>
@@ -669,13 +1055,6 @@
               </a:rPr>
               <a:t>» Titel Diagramm </a:t>
             </a:r>
-            <a:endParaRPr lang="de-DE" sz="2000" b="0" dirty="0">
-              <a:solidFill>
-                <a:schemeClr val="accent1"/>
-              </a:solidFill>
-              <a:latin typeface="Arial" panose="020B0604020202020204" pitchFamily="34" charset="0"/>
-              <a:cs typeface="Arial" panose="020B0604020202020204" pitchFamily="34" charset="0"/>
-            </a:endParaRPr>
           </a:p>
         </c:rich>
       </c:tx>
@@ -774,6 +1153,11 @@
             </c:numRef>
           </c:val>
           <c:smooth val="0"/>
+          <c:extLst>
+            <c:ext xmlns:c16="http://schemas.microsoft.com/office/drawing/2014/chart" uri="{C3380CC4-5D6E-409C-BE32-E72D297353CC}">
+              <c16:uniqueId val="{00000000-3797-445A-8C33-2F18E0B2DF5C}"/>
+            </c:ext>
+          </c:extLst>
         </c:ser>
         <c:ser>
           <c:idx val="1"/>
@@ -799,6 +1183,11 @@
               <c:size val="5"/>
             </c:marker>
             <c:bubble3D val="0"/>
+            <c:extLst>
+              <c:ext xmlns:c16="http://schemas.microsoft.com/office/drawing/2014/chart" uri="{C3380CC4-5D6E-409C-BE32-E72D297353CC}">
+                <c16:uniqueId val="{00000001-3797-445A-8C33-2F18E0B2DF5C}"/>
+              </c:ext>
+            </c:extLst>
           </c:dPt>
           <c:cat>
             <c:strRef>
@@ -848,6 +1237,11 @@
             </c:numRef>
           </c:val>
           <c:smooth val="0"/>
+          <c:extLst>
+            <c:ext xmlns:c16="http://schemas.microsoft.com/office/drawing/2014/chart" uri="{C3380CC4-5D6E-409C-BE32-E72D297353CC}">
+              <c16:uniqueId val="{00000002-3797-445A-8C33-2F18E0B2DF5C}"/>
+            </c:ext>
+          </c:extLst>
         </c:ser>
         <c:ser>
           <c:idx val="2"/>
@@ -915,6 +1309,11 @@
             </c:numRef>
           </c:val>
           <c:smooth val="0"/>
+          <c:extLst>
+            <c:ext xmlns:c16="http://schemas.microsoft.com/office/drawing/2014/chart" uri="{C3380CC4-5D6E-409C-BE32-E72D297353CC}">
+              <c16:uniqueId val="{00000003-3797-445A-8C33-2F18E0B2DF5C}"/>
+            </c:ext>
+          </c:extLst>
         </c:ser>
         <c:dLbls>
           <c:showLegendKey val="0"/>
@@ -1036,9 +1435,9 @@
 </file>
 
 <file path=ppt/charts/chart3.xml><?xml version="1.0" encoding="utf-8"?>
-<c:chartSpace xmlns:c="http://schemas.openxmlformats.org/drawingml/2006/chart" xmlns:a="http://schemas.openxmlformats.org/drawingml/2006/main" xmlns:r="http://schemas.openxmlformats.org/officeDocument/2006/relationships">
+<c:chartSpace xmlns:c="http://schemas.openxmlformats.org/drawingml/2006/chart" xmlns:a="http://schemas.openxmlformats.org/drawingml/2006/main" xmlns:r="http://schemas.openxmlformats.org/officeDocument/2006/relationships" xmlns:c16r2="http://schemas.microsoft.com/office/drawing/2015/06/chart">
   <c:date1904 val="0"/>
-  <c:lang val="de-DE"/>
+  <c:lang val="en-US"/>
   <c:roundedCorners val="0"/>
   <mc:AlternateContent xmlns:mc="http://schemas.openxmlformats.org/markup-compatibility/2006">
     <mc:Choice xmlns:c14="http://schemas.microsoft.com/office/drawing/2007/8/2/chart" Requires="c14">
@@ -1065,7 +1464,7 @@
               </a:defRPr>
             </a:pPr>
             <a:r>
-              <a:rPr lang="de-DE" sz="2000" b="0" dirty="0" smtClean="0">
+              <a:rPr lang="de-DE" sz="2000" b="0" dirty="0">
                 <a:solidFill>
                   <a:schemeClr val="accent1"/>
                 </a:solidFill>
@@ -1074,13 +1473,6 @@
               </a:rPr>
               <a:t>» Titel Diagramm </a:t>
             </a:r>
-            <a:endParaRPr lang="de-DE" sz="2000" b="0" dirty="0">
-              <a:solidFill>
-                <a:schemeClr val="accent1"/>
-              </a:solidFill>
-              <a:latin typeface="Arial" panose="020B0604020202020204" pitchFamily="34" charset="0"/>
-              <a:cs typeface="Arial" panose="020B0604020202020204" pitchFamily="34" charset="0"/>
-            </a:endParaRPr>
           </a:p>
         </c:rich>
       </c:tx>
@@ -1155,6 +1547,11 @@
               </c:numCache>
             </c:numRef>
           </c:val>
+          <c:extLst>
+            <c:ext xmlns:c16="http://schemas.microsoft.com/office/drawing/2014/chart" uri="{C3380CC4-5D6E-409C-BE32-E72D297353CC}">
+              <c16:uniqueId val="{00000000-E156-4045-85CC-E498355F8284}"/>
+            </c:ext>
+          </c:extLst>
         </c:ser>
         <c:ser>
           <c:idx val="1"/>
@@ -1200,6 +1597,11 @@
               </c:numCache>
             </c:numRef>
           </c:val>
+          <c:extLst>
+            <c:ext xmlns:c16="http://schemas.microsoft.com/office/drawing/2014/chart" uri="{C3380CC4-5D6E-409C-BE32-E72D297353CC}">
+              <c16:uniqueId val="{00000001-E156-4045-85CC-E498355F8284}"/>
+            </c:ext>
+          </c:extLst>
         </c:ser>
         <c:ser>
           <c:idx val="2"/>
@@ -1245,6 +1647,11 @@
               </c:numCache>
             </c:numRef>
           </c:val>
+          <c:extLst>
+            <c:ext xmlns:c16="http://schemas.microsoft.com/office/drawing/2014/chart" uri="{C3380CC4-5D6E-409C-BE32-E72D297353CC}">
+              <c16:uniqueId val="{00000002-E156-4045-85CC-E498355F8284}"/>
+            </c:ext>
+          </c:extLst>
         </c:ser>
         <c:ser>
           <c:idx val="3"/>
@@ -1290,6 +1697,11 @@
               </c:numCache>
             </c:numRef>
           </c:val>
+          <c:extLst>
+            <c:ext xmlns:c16="http://schemas.microsoft.com/office/drawing/2014/chart" uri="{C3380CC4-5D6E-409C-BE32-E72D297353CC}">
+              <c16:uniqueId val="{00000003-E156-4045-85CC-E498355F8284}"/>
+            </c:ext>
+          </c:extLst>
         </c:ser>
         <c:dLbls>
           <c:showLegendKey val="0"/>
@@ -1430,9 +1842,9 @@
 </file>
 
 <file path=ppt/charts/chart4.xml><?xml version="1.0" encoding="utf-8"?>
-<c:chartSpace xmlns:c="http://schemas.openxmlformats.org/drawingml/2006/chart" xmlns:a="http://schemas.openxmlformats.org/drawingml/2006/main" xmlns:r="http://schemas.openxmlformats.org/officeDocument/2006/relationships">
+<c:chartSpace xmlns:c="http://schemas.openxmlformats.org/drawingml/2006/chart" xmlns:a="http://schemas.openxmlformats.org/drawingml/2006/main" xmlns:r="http://schemas.openxmlformats.org/officeDocument/2006/relationships" xmlns:c16r2="http://schemas.microsoft.com/office/drawing/2015/06/chart">
   <c:date1904 val="0"/>
-  <c:lang val="de-DE"/>
+  <c:lang val="en-US"/>
   <c:roundedCorners val="0"/>
   <mc:AlternateContent xmlns:mc="http://schemas.openxmlformats.org/markup-compatibility/2006">
     <mc:Choice xmlns:c14="http://schemas.microsoft.com/office/drawing/2007/8/2/chart" Requires="c14">
@@ -1459,7 +1871,7 @@
               </a:defRPr>
             </a:pPr>
             <a:r>
-              <a:rPr lang="de-DE" sz="2000" b="0" dirty="0" smtClean="0">
+              <a:rPr lang="de-DE" sz="2000" b="0" dirty="0">
                 <a:solidFill>
                   <a:schemeClr val="accent1"/>
                 </a:solidFill>
@@ -1468,13 +1880,6 @@
               </a:rPr>
               <a:t>» Titel Diagramm </a:t>
             </a:r>
-            <a:endParaRPr lang="de-DE" sz="2000" b="0" dirty="0">
-              <a:solidFill>
-                <a:schemeClr val="accent1"/>
-              </a:solidFill>
-              <a:latin typeface="Arial" panose="020B0604020202020204" pitchFamily="34" charset="0"/>
-              <a:cs typeface="Arial" panose="020B0604020202020204" pitchFamily="34" charset="0"/>
-            </a:endParaRPr>
           </a:p>
         </c:rich>
       </c:tx>
@@ -1561,6 +1966,11 @@
               </c:numCache>
             </c:numRef>
           </c:val>
+          <c:extLst>
+            <c:ext xmlns:c16="http://schemas.microsoft.com/office/drawing/2014/chart" uri="{C3380CC4-5D6E-409C-BE32-E72D297353CC}">
+              <c16:uniqueId val="{00000000-0BAA-463C-872F-321A6FEA71F5}"/>
+            </c:ext>
+          </c:extLst>
         </c:ser>
         <c:dLbls>
           <c:showLegendKey val="0"/>
@@ -1862,14 +2272,14 @@
           </a:lstStyle>
           <a:p>
             <a:r>
-              <a:rPr lang="pt-BR" dirty="0" smtClean="0"/>
+              <a:rPr lang="pt-BR" dirty="0"/>
               <a:t>Titel: Ucient premporiam,</a:t>
             </a:r>
             <a:br>
-              <a:rPr lang="pt-BR" dirty="0" smtClean="0"/>
+              <a:rPr lang="pt-BR" dirty="0"/>
             </a:br>
             <a:r>
-              <a:rPr lang="pt-BR" dirty="0" smtClean="0"/>
+              <a:rPr lang="pt-BR" dirty="0"/>
               <a:t>enita eum esequisquam, nons</a:t>
             </a:r>
             <a:endParaRPr lang="de-DE" dirty="0"/>
@@ -1944,38 +2354,37 @@
           <a:p>
             <a:pPr lvl="0"/>
             <a:r>
-              <a:rPr lang="de-DE" dirty="0" smtClean="0"/>
+              <a:rPr lang="de-DE" dirty="0"/>
               <a:t>Textmasterformat bearbeiten</a:t>
             </a:r>
           </a:p>
           <a:p>
             <a:pPr lvl="1"/>
             <a:r>
-              <a:rPr lang="de-DE" dirty="0" smtClean="0"/>
+              <a:rPr lang="de-DE" dirty="0"/>
               <a:t>Zweite Ebene</a:t>
             </a:r>
           </a:p>
           <a:p>
             <a:pPr lvl="2"/>
             <a:r>
-              <a:rPr lang="de-DE" dirty="0" smtClean="0"/>
+              <a:rPr lang="de-DE" dirty="0"/>
               <a:t>Dritte Ebene</a:t>
             </a:r>
           </a:p>
           <a:p>
             <a:pPr lvl="3"/>
             <a:r>
-              <a:rPr lang="de-DE" dirty="0" smtClean="0"/>
+              <a:rPr lang="de-DE" dirty="0"/>
               <a:t>Vierte Ebene</a:t>
             </a:r>
           </a:p>
           <a:p>
             <a:pPr lvl="4"/>
             <a:r>
-              <a:rPr lang="de-DE" dirty="0" smtClean="0"/>
+              <a:rPr lang="de-DE" dirty="0"/>
               <a:t>Fünfte Ebene</a:t>
             </a:r>
-            <a:endParaRPr lang="de-DE" dirty="0"/>
           </a:p>
         </p:txBody>
       </p:sp>
@@ -2013,7 +2422,7 @@
           <a:p>
             <a:pPr lvl="0"/>
             <a:r>
-              <a:rPr lang="de-DE" dirty="0" smtClean="0"/>
+              <a:rPr lang="de-DE" dirty="0"/>
               <a:t>Name, Studiengang</a:t>
             </a:r>
           </a:p>
@@ -2042,14 +2451,11 @@
           <a:lstStyle/>
           <a:p>
             <a:r>
-              <a:rPr lang="de-DE" sz="5600" dirty="0" smtClean="0">
+              <a:rPr lang="de-DE" sz="5600" dirty="0">
                 <a:latin typeface="Georgia" panose="02040502050405020303" pitchFamily="18" charset="0"/>
               </a:rPr>
               <a:t>Projektbeschreibung</a:t>
             </a:r>
-            <a:endParaRPr lang="de-DE" sz="5600" dirty="0">
-              <a:latin typeface="Georgia" panose="02040502050405020303" pitchFamily="18" charset="0"/>
-            </a:endParaRPr>
           </a:p>
         </p:txBody>
       </p:sp>
@@ -2138,14 +2544,14 @@
           <a:p>
             <a:pPr lvl="0"/>
             <a:r>
-              <a:rPr lang="de-DE" dirty="0" smtClean="0"/>
+              <a:rPr lang="de-DE" dirty="0"/>
               <a:t>Textmasterformat bearbeiten</a:t>
             </a:r>
           </a:p>
           <a:p>
             <a:pPr lvl="1"/>
             <a:r>
-              <a:rPr lang="de-DE" dirty="0" smtClean="0"/>
+              <a:rPr lang="de-DE" dirty="0"/>
               <a:t>Zweite Ebene</a:t>
             </a:r>
           </a:p>
@@ -2233,14 +2639,14 @@
           <a:p>
             <a:pPr lvl="0"/>
             <a:r>
-              <a:rPr lang="de-DE" dirty="0" smtClean="0"/>
+              <a:rPr lang="de-DE" dirty="0"/>
               <a:t>Textmasterformat bearbeiten </a:t>
             </a:r>
           </a:p>
           <a:p>
             <a:pPr lvl="1"/>
             <a:r>
-              <a:rPr lang="de-DE" dirty="0" smtClean="0"/>
+              <a:rPr lang="de-DE" dirty="0"/>
               <a:t>Zweite Ebene</a:t>
             </a:r>
           </a:p>
@@ -2332,14 +2738,14 @@
           <a:p>
             <a:pPr lvl="0"/>
             <a:r>
-              <a:rPr lang="de-DE" dirty="0" smtClean="0"/>
+              <a:rPr lang="de-DE" dirty="0"/>
               <a:t>Textmasterformat bearbeiten</a:t>
             </a:r>
           </a:p>
           <a:p>
             <a:pPr lvl="1"/>
             <a:r>
-              <a:rPr lang="de-DE" dirty="0" smtClean="0"/>
+              <a:rPr lang="de-DE" dirty="0"/>
               <a:t>Zweite Ebene</a:t>
             </a:r>
           </a:p>
@@ -2558,10 +2964,9 @@
           </a:lstStyle>
           <a:p>
             <a:r>
-              <a:rPr lang="de-DE" dirty="0" smtClean="0"/>
+              <a:rPr lang="de-DE" dirty="0"/>
               <a:t>Logo</a:t>
             </a:r>
-            <a:endParaRPr lang="de-DE" dirty="0"/>
           </a:p>
         </p:txBody>
       </p:sp>
@@ -2594,10 +2999,9 @@
           </a:lstStyle>
           <a:p>
             <a:r>
-              <a:rPr lang="de-DE" dirty="0" smtClean="0"/>
+              <a:rPr lang="de-DE" dirty="0"/>
               <a:t>Logo</a:t>
             </a:r>
-            <a:endParaRPr lang="de-DE" dirty="0"/>
           </a:p>
         </p:txBody>
       </p:sp>
@@ -2630,10 +3034,9 @@
           </a:lstStyle>
           <a:p>
             <a:r>
-              <a:rPr lang="de-DE" dirty="0" smtClean="0"/>
+              <a:rPr lang="de-DE" dirty="0"/>
               <a:t>Logo</a:t>
             </a:r>
-            <a:endParaRPr lang="de-DE" dirty="0"/>
           </a:p>
         </p:txBody>
       </p:sp>
@@ -2666,10 +3069,9 @@
           </a:lstStyle>
           <a:p>
             <a:r>
-              <a:rPr lang="de-DE" dirty="0" smtClean="0"/>
+              <a:rPr lang="de-DE" dirty="0"/>
               <a:t>Logo</a:t>
             </a:r>
-            <a:endParaRPr lang="de-DE" dirty="0"/>
           </a:p>
         </p:txBody>
       </p:sp>
@@ -2703,10 +3105,9 @@
           </a:lstStyle>
           <a:p>
             <a:r>
-              <a:rPr lang="de-DE" dirty="0" smtClean="0"/>
+              <a:rPr lang="de-DE" dirty="0"/>
               <a:t>Bild durch Klicken auf Symbol hinzufügen</a:t>
             </a:r>
-            <a:endParaRPr lang="de-DE" dirty="0"/>
           </a:p>
         </p:txBody>
       </p:sp>
@@ -2740,10 +3141,9 @@
           </a:lstStyle>
           <a:p>
             <a:r>
-              <a:rPr lang="de-DE" dirty="0" smtClean="0"/>
+              <a:rPr lang="de-DE" dirty="0"/>
               <a:t>Bild durch Klicken auf Symbol hinzufügen</a:t>
             </a:r>
-            <a:endParaRPr lang="de-DE" dirty="0"/>
           </a:p>
         </p:txBody>
       </p:sp>
@@ -2777,10 +3177,9 @@
           </a:lstStyle>
           <a:p>
             <a:r>
-              <a:rPr lang="de-DE" dirty="0" smtClean="0"/>
+              <a:rPr lang="de-DE" dirty="0"/>
               <a:t>Bild durch Klicken auf Symbol hinzufügen</a:t>
             </a:r>
-            <a:endParaRPr lang="de-DE" dirty="0"/>
           </a:p>
         </p:txBody>
       </p:sp>
@@ -2864,10 +3263,9 @@
           <a:p>
             <a:pPr lvl="0"/>
             <a:r>
-              <a:rPr lang="de-DE" dirty="0" smtClean="0"/>
+              <a:rPr lang="de-DE" dirty="0"/>
               <a:t>Bildunterschrift</a:t>
             </a:r>
-            <a:endParaRPr lang="de-DE" dirty="0"/>
           </a:p>
         </p:txBody>
       </p:sp>
@@ -2881,13 +3279,6 @@
   <p:clrMapOvr>
     <a:masterClrMapping/>
   </p:clrMapOvr>
-  <p:timing>
-    <p:tnLst>
-      <p:par>
-        <p:cTn id="1" dur="indefinite" restart="never" nodeType="tmRoot"/>
-      </p:par>
-    </p:tnLst>
-  </p:timing>
 </p:sldLayout>
 </file>
 
@@ -2999,10 +3390,9 @@
           <a:lstStyle/>
           <a:p>
             <a:r>
-              <a:rPr lang="de-DE" dirty="0" smtClean="0"/>
+              <a:rPr lang="de-DE" dirty="0"/>
               <a:t>Titelmasterformat durch Klicken bearbeiten</a:t>
             </a:r>
-            <a:endParaRPr lang="de-DE" dirty="0"/>
           </a:p>
         </p:txBody>
       </p:sp>
@@ -3033,14 +3423,14 @@
           <a:p>
             <a:pPr lvl="0"/>
             <a:r>
-              <a:rPr lang="de-DE" dirty="0" smtClean="0"/>
+              <a:rPr lang="de-DE" dirty="0"/>
               <a:t>Textmasterformat bearbeiten</a:t>
             </a:r>
           </a:p>
           <a:p>
             <a:pPr lvl="1"/>
             <a:r>
-              <a:rPr lang="de-DE" dirty="0" smtClean="0"/>
+              <a:rPr lang="de-DE" dirty="0"/>
               <a:t>Zweite Ebene</a:t>
             </a:r>
           </a:p>
@@ -3181,7 +3571,7 @@
               <a:defRPr/>
             </a:pPr>
             <a:r>
-              <a:rPr lang="de-DE" sz="2600" dirty="0" smtClean="0">
+              <a:rPr lang="de-DE" sz="2600" dirty="0">
                 <a:solidFill>
                   <a:schemeClr val="bg1"/>
                 </a:solidFill>
@@ -3191,7 +3581,7 @@
               <a:t>Alle Informationen</a:t>
             </a:r>
             <a:r>
-              <a:rPr lang="de-DE" sz="2600" baseline="0" dirty="0" smtClean="0">
+              <a:rPr lang="de-DE" sz="2600" baseline="0" dirty="0">
                 <a:solidFill>
                   <a:schemeClr val="bg1"/>
                 </a:solidFill>
@@ -3201,7 +3591,7 @@
               <a:t> </a:t>
             </a:r>
             <a:r>
-              <a:rPr lang="de-DE" sz="2600" dirty="0" smtClean="0">
+              <a:rPr lang="de-DE" sz="2600" dirty="0">
                 <a:solidFill>
                   <a:schemeClr val="bg1"/>
                 </a:solidFill>
@@ -3211,7 +3601,7 @@
               <a:t>finden</a:t>
             </a:r>
             <a:r>
-              <a:rPr lang="de-DE" sz="2600" baseline="0" dirty="0" smtClean="0">
+              <a:rPr lang="de-DE" sz="2600" baseline="0" dirty="0">
                 <a:solidFill>
                   <a:schemeClr val="bg1"/>
                 </a:solidFill>
@@ -3221,7 +3611,7 @@
               <a:t> </a:t>
             </a:r>
             <a:r>
-              <a:rPr lang="de-DE" sz="2600" dirty="0" smtClean="0">
+              <a:rPr lang="de-DE" sz="2600" dirty="0">
                 <a:solidFill>
                   <a:schemeClr val="bg1"/>
                 </a:solidFill>
@@ -3231,7 +3621,7 @@
               <a:t>Sie unter:</a:t>
             </a:r>
             <a:r>
-              <a:rPr lang="de-DE" sz="2600" baseline="0" dirty="0" smtClean="0">
+              <a:rPr lang="de-DE" sz="2600" baseline="0" dirty="0">
                 <a:solidFill>
                   <a:schemeClr val="bg1"/>
                 </a:solidFill>
@@ -3241,7 +3631,7 @@
               <a:t> </a:t>
             </a:r>
             <a:r>
-              <a:rPr lang="de-DE" sz="3600" b="1" dirty="0" smtClean="0">
+              <a:rPr lang="de-DE" sz="3600" b="1" dirty="0">
                 <a:solidFill>
                   <a:schemeClr val="bg1"/>
                 </a:solidFill>
@@ -3250,7 +3640,7 @@
               </a:rPr>
               <a:t>www.dhbw-stuttgart.de</a:t>
             </a:r>
-            <a:endParaRPr lang="de-DE" sz="3600" dirty="0" smtClean="0">
+            <a:endParaRPr lang="de-DE" sz="3600" dirty="0">
               <a:solidFill>
                 <a:schemeClr val="bg1"/>
               </a:solidFill>
@@ -3379,7 +3769,7 @@
           <a:p>
             <a:pPr algn="l"/>
             <a:r>
-              <a:rPr lang="de-DE" sz="4100" dirty="0" smtClean="0">
+              <a:rPr lang="de-DE" sz="4100" dirty="0">
                 <a:solidFill>
                   <a:srgbClr val="FFFFFF"/>
                 </a:solidFill>
@@ -3444,7 +3834,7 @@
           <a:p>
             <a:pPr algn="l"/>
             <a:r>
-              <a:rPr lang="de-DE" sz="2600" b="1" dirty="0" smtClean="0">
+              <a:rPr lang="de-DE" sz="2600" b="1" dirty="0">
                 <a:solidFill>
                   <a:srgbClr val="FFFFFF"/>
                 </a:solidFill>
@@ -3454,7 +3844,7 @@
               <a:t>Duale</a:t>
             </a:r>
             <a:r>
-              <a:rPr lang="de-DE" sz="2600" b="1" baseline="0" dirty="0" smtClean="0">
+              <a:rPr lang="de-DE" sz="2600" b="1" baseline="0" dirty="0">
                 <a:solidFill>
                   <a:srgbClr val="FFFFFF"/>
                 </a:solidFill>
@@ -3464,7 +3854,7 @@
               <a:t> </a:t>
             </a:r>
             <a:r>
-              <a:rPr lang="de-DE" sz="2600" b="1" dirty="0" smtClean="0">
+              <a:rPr lang="de-DE" sz="2600" b="1" dirty="0">
                 <a:solidFill>
                   <a:srgbClr val="FFFFFF"/>
                 </a:solidFill>
@@ -3474,7 +3864,7 @@
               <a:t>Hochschule</a:t>
             </a:r>
             <a:r>
-              <a:rPr lang="de-DE" sz="2600" b="1" baseline="0" dirty="0" smtClean="0">
+              <a:rPr lang="de-DE" sz="2600" b="1" baseline="0" dirty="0">
                 <a:solidFill>
                   <a:srgbClr val="FFFFFF"/>
                 </a:solidFill>
@@ -3484,7 +3874,7 @@
               <a:t> </a:t>
             </a:r>
             <a:r>
-              <a:rPr lang="de-DE" sz="2600" b="1" dirty="0" smtClean="0">
+              <a:rPr lang="de-DE" sz="2600" b="1" dirty="0">
                 <a:solidFill>
                   <a:srgbClr val="FFFFFF"/>
                 </a:solidFill>
@@ -3792,13 +4182,6 @@
     <p:sldLayoutId id="2147483654" r:id="rId1"/>
     <p:sldLayoutId id="2147483653" r:id="rId2"/>
   </p:sldLayoutIdLst>
-  <p:timing>
-    <p:tnLst>
-      <p:par>
-        <p:cTn id="1" dur="indefinite" restart="never" nodeType="tmRoot"/>
-      </p:par>
-    </p:tnLst>
-  </p:timing>
   <p:txStyles>
     <p:titleStyle>
       <a:lvl1pPr algn="l" defTabSz="4258627" rtl="0" eaLnBrk="1" latinLnBrk="0" hangingPunct="1">
@@ -4093,6 +4476,36 @@
           <a:chExt cx="0" cy="0"/>
         </a:xfrm>
       </p:grpSpPr>
+      <p:pic>
+        <p:nvPicPr>
+          <p:cNvPr id="33" name="Picture 32">
+            <a:extLst>
+              <a:ext uri="{FF2B5EF4-FFF2-40B4-BE49-F238E27FC236}">
+                <a16:creationId xmlns:a16="http://schemas.microsoft.com/office/drawing/2014/main" id="{FCBEABFC-64A0-0766-0322-48F97ECA2D75}"/>
+              </a:ext>
+            </a:extLst>
+          </p:cNvPr>
+          <p:cNvPicPr>
+            <a:picLocks noChangeAspect="1"/>
+          </p:cNvPicPr>
+          <p:nvPr/>
+        </p:nvPicPr>
+        <p:blipFill>
+          <a:blip r:embed="rId2"/>
+          <a:stretch>
+            <a:fillRect/>
+          </a:stretch>
+        </p:blipFill>
+        <p:spPr>
+          <a:xfrm>
+            <a:off x="2519770" y="17275031"/>
+            <a:ext cx="14425466" cy="7055365"/>
+          </a:xfrm>
+          <a:prstGeom prst="rect">
+            <a:avLst/>
+          </a:prstGeom>
+        </p:spPr>
+      </p:pic>
       <p:sp>
         <p:nvSpPr>
           <p:cNvPr id="18" name="Textplatzhalter 17"/>
@@ -4105,7 +4518,7 @@
         </p:nvSpPr>
         <p:spPr>
           <a:xfrm>
-            <a:off x="20736000" y="17918426"/>
+            <a:off x="20736000" y="18174819"/>
             <a:ext cx="10008000" cy="3733822"/>
           </a:xfrm>
           <a:solidFill>
@@ -4117,84 +4530,26 @@
           <a:lstStyle/>
           <a:p>
             <a:r>
-              <a:rPr lang="de-DE" dirty="0" smtClean="0">
-                <a:solidFill>
-                  <a:srgbClr val="5D686E"/>
-                </a:solidFill>
-              </a:rPr>
-              <a:t>……………………………………………………………………………………………………... </a:t>
-            </a:r>
-            <a:r>
-              <a:rPr lang="de-DE" dirty="0" err="1" smtClean="0">
-                <a:solidFill>
-                  <a:srgbClr val="5D686E"/>
-                </a:solidFill>
-              </a:rPr>
-              <a:t>Ehendus</a:t>
-            </a:r>
-            <a:r>
-              <a:rPr lang="de-DE" dirty="0" smtClean="0">
-                <a:solidFill>
-                  <a:srgbClr val="5D686E"/>
-                </a:solidFill>
-              </a:rPr>
-              <a:t> </a:t>
-            </a:r>
-            <a:r>
-              <a:rPr lang="de-DE" dirty="0" err="1" smtClean="0">
-                <a:solidFill>
-                  <a:srgbClr val="5D686E"/>
-                </a:solidFill>
-              </a:rPr>
-              <a:t>entiuntius</a:t>
-            </a:r>
-            <a:r>
-              <a:rPr lang="de-DE" dirty="0" smtClean="0">
-                <a:solidFill>
-                  <a:srgbClr val="5D686E"/>
-                </a:solidFill>
-              </a:rPr>
-              <a:t> </a:t>
-            </a:r>
-            <a:r>
-              <a:rPr lang="de-DE" dirty="0" err="1" smtClean="0">
-                <a:solidFill>
-                  <a:srgbClr val="5D686E"/>
-                </a:solidFill>
-              </a:rPr>
-              <a:t>repremp</a:t>
-            </a:r>
-            <a:r>
-              <a:rPr lang="de-DE" dirty="0" smtClean="0">
-                <a:solidFill>
-                  <a:srgbClr val="5D686E"/>
-                </a:solidFill>
-              </a:rPr>
-              <a:t> </a:t>
-            </a:r>
-            <a:r>
-              <a:rPr lang="de-DE" dirty="0" err="1" smtClean="0">
-                <a:solidFill>
-                  <a:srgbClr val="5D686E"/>
-                </a:solidFill>
-              </a:rPr>
-              <a:t>orerum</a:t>
-            </a:r>
-            <a:r>
-              <a:rPr lang="de-DE" dirty="0" smtClean="0">
-                <a:solidFill>
-                  <a:srgbClr val="5D686E"/>
-                </a:solidFill>
-              </a:rPr>
-              <a:t> </a:t>
-            </a:r>
-            <a:r>
-              <a:rPr lang="de-DE" dirty="0" err="1" smtClean="0">
-                <a:solidFill>
-                  <a:srgbClr val="5D686E"/>
-                </a:solidFill>
-              </a:rPr>
-              <a:t>fugiti</a:t>
+              <a:rPr lang="en-DE" dirty="0"/>
+              <a:t>Position DT-based </a:t>
+            </a:r>
+            <a:r>
+              <a:rPr lang="en-DE" dirty="0" err="1"/>
+              <a:t>PdM</a:t>
+            </a:r>
+            <a:r>
+              <a:rPr lang="en-DE" dirty="0"/>
+              <a:t> as a CRM extension, not an IT project — the value driver is the quality of proactive outreach, not forecast accuracy. </a:t>
+            </a:r>
+            <a:endParaRPr lang="en-GB" dirty="0"/>
+          </a:p>
+          <a:p>
+            <a:endParaRPr lang="en-GB" dirty="0"/>
+          </a:p>
+          <a:p>
+            <a:r>
+              <a:rPr lang="en-DE" dirty="0"/>
+              <a:t>Build consent infrastructure first: CRM-integrated opt-in flows and a clear customer value proposition, as a prerequisite rather than an afterthought. Enter in phases via OEM brands that already expose connected-car telemetry APIs, so conversion rates can be measured before a broader infrastructure commitment.</a:t>
             </a:r>
             <a:endParaRPr lang="de-DE" dirty="0">
               <a:solidFill>
@@ -4216,8 +4571,8 @@
         </p:nvSpPr>
         <p:spPr>
           <a:xfrm>
-            <a:off x="20736000" y="9223693"/>
-            <a:ext cx="10008000" cy="6845340"/>
+            <a:off x="20736000" y="9223692"/>
+            <a:ext cx="10008000" cy="7611149"/>
           </a:xfrm>
           <a:solidFill>
             <a:srgbClr val="EDEDED"/>
@@ -4228,58 +4583,60 @@
           <a:lstStyle/>
           <a:p>
             <a:r>
-              <a:rPr lang="de-DE" dirty="0" smtClean="0">
-                <a:solidFill>
-                  <a:srgbClr val="5D686E"/>
-                </a:solidFill>
-              </a:rPr>
-              <a:t>Erste Textebene: Fließtext ohne Einrückung ab der zweiten Zeile. Projektziel ist die Entwicklung eines elektrischen Antriebs für ein einsitziges</a:t>
-            </a:r>
-          </a:p>
-          <a:p>
-            <a:pPr lvl="1">
-              <a:buClr>
+              <a:rPr lang="en-DE" b="1" dirty="0"/>
+              <a:t>Research question:</a:t>
+            </a:r>
+            <a:r>
+              <a:rPr lang="en-DE" dirty="0"/>
+              <a:t> What effect does the proactive use of digital twins and predictive maintenance have on automotive aftersales in the German market?</a:t>
+            </a:r>
+            <a:endParaRPr lang="en-GB" b="1" dirty="0"/>
+          </a:p>
+          <a:p>
+            <a:endParaRPr lang="en-GB" b="1" dirty="0"/>
+          </a:p>
+          <a:p>
+            <a:r>
+              <a:rPr lang="en-DE" b="1" dirty="0"/>
+              <a:t>Objectives:</a:t>
+            </a:r>
+            <a:endParaRPr lang="en-DE" dirty="0"/>
+          </a:p>
+          <a:p>
+            <a:pPr lvl="1"/>
+            <a:r>
+              <a:rPr lang="en-DE" dirty="0"/>
+              <a:t>Clarify how digital twins and </a:t>
+            </a:r>
+            <a:r>
+              <a:rPr lang="en-DE" dirty="0" err="1"/>
+              <a:t>PdM</a:t>
+            </a:r>
+            <a:r>
+              <a:rPr lang="en-DE" dirty="0"/>
+              <a:t> interact in the aftersales context. </a:t>
+            </a:r>
+            <a:endParaRPr lang="en-GB" dirty="0"/>
+          </a:p>
+          <a:p>
+            <a:pPr lvl="1"/>
+            <a:r>
+              <a:rPr lang="en-DE" dirty="0"/>
+              <a:t>Compare the predictive target state with the interval-based current state to locate where reactive servicing leaks value. </a:t>
+            </a:r>
+            <a:endParaRPr lang="en-GB" dirty="0"/>
+          </a:p>
+          <a:p>
+            <a:pPr lvl="1"/>
+            <a:r>
+              <a:rPr lang="en-DE" dirty="0"/>
+              <a:t>Derive actionable recommendations for dealerships and OEMs.</a:t>
+            </a:r>
+            <a:endParaRPr lang="de-DE" dirty="0">
+              <a:solidFill>
                 <a:srgbClr val="5D686E"/>
-              </a:buClr>
-            </a:pPr>
-            <a:r>
-              <a:rPr lang="de-DE" dirty="0" smtClean="0">
-                <a:solidFill>
-                  <a:srgbClr val="5D686E"/>
-                </a:solidFill>
-              </a:rPr>
-              <a:t>Zweite Textebene: Aufzählungszeichen und Einzug ab der zweiten Zeile: zu der zweiten Textebene gelangt man durch Klick auf „Einzug vergrößern“. </a:t>
-            </a:r>
-          </a:p>
-          <a:p>
-            <a:pPr lvl="1">
-              <a:buClr>
-                <a:srgbClr val="5D686E"/>
-              </a:buClr>
-            </a:pPr>
-            <a:r>
-              <a:rPr lang="de-DE" dirty="0" smtClean="0">
-                <a:solidFill>
-                  <a:srgbClr val="5D686E"/>
-                </a:solidFill>
-              </a:rPr>
-              <a:t>Nur über diese Funktion ist das richtige Aufzählungszeichen + Abstand gewährleistet </a:t>
-            </a:r>
-          </a:p>
-          <a:p>
-            <a:pPr lvl="1">
-              <a:buClr>
-                <a:srgbClr val="5D686E"/>
-              </a:buClr>
-            </a:pPr>
-            <a:r>
-              <a:rPr lang="de-DE" dirty="0" smtClean="0">
-                <a:solidFill>
-                  <a:srgbClr val="5D686E"/>
-                </a:solidFill>
-              </a:rPr>
-              <a:t>Die Linien werden manuell gesetzt, 1 Pt.</a:t>
-            </a:r>
+              </a:solidFill>
+            </a:endParaRPr>
           </a:p>
           <a:p>
             <a:pPr lvl="1"/>
@@ -4488,7 +4845,7 @@
         <p:spPr>
           <a:xfrm>
             <a:off x="1828800" y="1530377"/>
-            <a:ext cx="16695329" cy="3221695"/>
+            <a:ext cx="20368294" cy="3221695"/>
           </a:xfrm>
         </p:spPr>
         <p:txBody>
@@ -4496,15 +4853,8 @@
           <a:lstStyle/>
           <a:p>
             <a:r>
-              <a:rPr lang="pt-BR" dirty="0" smtClean="0"/>
-              <a:t>Titel in Systemschrift Georgia </a:t>
-            </a:r>
-            <a:br>
-              <a:rPr lang="pt-BR" dirty="0" smtClean="0"/>
-            </a:br>
-            <a:r>
-              <a:rPr lang="pt-BR" dirty="0" smtClean="0"/>
-              <a:t>90 Punkt, maximal 2 Zeilen</a:t>
+              <a:rPr lang="en-GB" dirty="0"/>
+              <a:t>Digital Twins for Predictive Maintenance in Automotive Aftersales</a:t>
             </a:r>
             <a:endParaRPr lang="de-DE" dirty="0"/>
           </a:p>
@@ -4523,7 +4873,7 @@
         <p:spPr>
           <a:xfrm>
             <a:off x="1854000" y="9365464"/>
-            <a:ext cx="16308000" cy="17930206"/>
+            <a:ext cx="16308000" cy="27140356"/>
           </a:xfrm>
         </p:spPr>
         <p:txBody>
@@ -4531,144 +4881,183 @@
           <a:lstStyle/>
           <a:p>
             <a:r>
-              <a:rPr lang="de-DE" dirty="0" smtClean="0"/>
-              <a:t>Erste Textebene: Fließtext ohne Einrückung ab der zweiten Zeile. Schrift Arial in 36 Punkt, ZA 43 Punkt. Farbe: RGB 93/104/110. Vor einer </a:t>
-            </a:r>
-            <a:r>
-              <a:rPr lang="de-DE" dirty="0" err="1" smtClean="0"/>
-              <a:t>Zwischenhead</a:t>
-            </a:r>
-            <a:r>
-              <a:rPr lang="de-DE" dirty="0" smtClean="0"/>
-              <a:t> kommt eine manuelle Leerzeile. </a:t>
-            </a:r>
-            <a:endParaRPr lang="de-DE" dirty="0" smtClean="0"/>
+              <a:rPr lang="en-DE" dirty="0"/>
+              <a:t>Today's vehicles are connected by default and continuously transmit operating data, so the information needed to judge their technical condition already exists. Yet aftersales remains reactive: even well-connected cars are serviced on fixed time or mileage intervals rather than on the actual condition of their parts. Wear parts </a:t>
+            </a:r>
+            <a:r>
+              <a:rPr lang="en-GB" dirty="0"/>
+              <a:t>-</a:t>
+            </a:r>
+            <a:r>
+              <a:rPr lang="en-DE" dirty="0"/>
+              <a:t> brake pads and discs, tyres, spark plugs, wipers </a:t>
+            </a:r>
+            <a:r>
+              <a:rPr lang="en-GB" dirty="0"/>
+              <a:t>-</a:t>
+            </a:r>
+            <a:r>
+              <a:rPr lang="en-DE" dirty="0"/>
+              <a:t> are run to failure, and the unplanned repair often goes to a cheaper independent garage. For the franchised dealership, which owns the customer relationship, this means losing both the repair and one of only a few yearly customer contacts.</a:t>
+            </a:r>
+          </a:p>
+          <a:p>
+            <a:r>
+              <a:rPr lang="en-DE" dirty="0"/>
+              <a:t>Digital-twin-based predictive maintenance (</a:t>
+            </a:r>
+            <a:r>
+              <a:rPr lang="en-DE" dirty="0" err="1"/>
+              <a:t>PdM</a:t>
+            </a:r>
+            <a:r>
+              <a:rPr lang="en-DE" dirty="0"/>
+              <a:t>) turns this data into foresight: a digital twin keeps a synchronized virtual model of the vehicle, machine-learning models forecast the remaining useful life of each wear part, and a service recommendation reaches the customer before any fault appears </a:t>
+            </a:r>
+            <a:r>
+              <a:rPr lang="en-GB" dirty="0"/>
+              <a:t>- </a:t>
+            </a:r>
+            <a:r>
+              <a:rPr lang="en-DE" dirty="0"/>
+              <a:t>keeping the work at the </a:t>
+            </a:r>
+            <a:r>
+              <a:rPr lang="en-DE" dirty="0" err="1"/>
+              <a:t>dea</a:t>
+            </a:r>
+            <a:r>
+              <a:rPr lang="en-GB" dirty="0"/>
+              <a:t>l</a:t>
+            </a:r>
+            <a:r>
+              <a:rPr lang="en-DE" dirty="0" err="1"/>
+              <a:t>ership</a:t>
+            </a:r>
+            <a:r>
+              <a:rPr lang="en-DE" dirty="0"/>
+              <a:t> and enabling transparent, targeted u</a:t>
+            </a:r>
+            <a:r>
+              <a:rPr lang="en-GB" dirty="0"/>
+              <a:t>p</a:t>
+            </a:r>
+            <a:r>
+              <a:rPr lang="en-DE" dirty="0"/>
+              <a:t>selling.</a:t>
+            </a:r>
           </a:p>
           <a:p>
             <a:endParaRPr lang="de-DE" dirty="0"/>
           </a:p>
           <a:p>
-            <a:endParaRPr lang="de-DE" dirty="0" smtClean="0"/>
-          </a:p>
-          <a:p>
-            <a:endParaRPr lang="de-DE" dirty="0" smtClean="0"/>
-          </a:p>
-          <a:p>
-            <a:endParaRPr lang="de-DE" dirty="0" smtClean="0"/>
-          </a:p>
-          <a:p>
-            <a:endParaRPr lang="de-DE" dirty="0" smtClean="0"/>
-          </a:p>
-          <a:p>
-            <a:endParaRPr lang="de-DE" dirty="0" smtClean="0"/>
-          </a:p>
-          <a:p>
-            <a:endParaRPr lang="de-DE" dirty="0" smtClean="0"/>
-          </a:p>
-          <a:p>
-            <a:endParaRPr lang="de-DE" dirty="0" smtClean="0"/>
-          </a:p>
-          <a:p>
-            <a:endParaRPr lang="de-DE" dirty="0" smtClean="0"/>
-          </a:p>
-          <a:p>
-            <a:endParaRPr lang="de-DE" dirty="0" smtClean="0"/>
-          </a:p>
-          <a:p>
-            <a:endParaRPr lang="de-DE" dirty="0" smtClean="0"/>
-          </a:p>
-          <a:p>
-            <a:r>
-              <a:rPr lang="de-DE" b="1" dirty="0" err="1" smtClean="0"/>
-              <a:t>Zwischenhead</a:t>
-            </a:r>
-            <a:r>
-              <a:rPr lang="de-DE" b="1" dirty="0" smtClean="0"/>
-              <a:t> (Arial in </a:t>
-            </a:r>
-            <a:r>
-              <a:rPr lang="de-DE" b="1" dirty="0" err="1" smtClean="0"/>
-              <a:t>bold</a:t>
-            </a:r>
-            <a:r>
-              <a:rPr lang="de-DE" b="1" dirty="0" smtClean="0"/>
-              <a:t>)</a:t>
-            </a:r>
-          </a:p>
-          <a:p>
-            <a:r>
-              <a:rPr lang="de-DE" dirty="0" smtClean="0"/>
-              <a:t>Erste Textebene: Fließtext ohne Einrückung ab der zweiten Zeile. Schrift: Arial in 36 Punkt, ZA 43 Punkt. Farbe: RGB 93/104/110. Vor einer </a:t>
-            </a:r>
-            <a:r>
-              <a:rPr lang="de-DE" dirty="0" err="1" smtClean="0"/>
-              <a:t>Zwischenhead</a:t>
-            </a:r>
-            <a:r>
-              <a:rPr lang="de-DE" dirty="0" smtClean="0"/>
-              <a:t> kommt eine manuelle Leerzeile</a:t>
+            <a:endParaRPr lang="de-DE" dirty="0"/>
+          </a:p>
+          <a:p>
+            <a:endParaRPr lang="de-DE" dirty="0"/>
+          </a:p>
+          <a:p>
+            <a:endParaRPr lang="de-DE" dirty="0"/>
+          </a:p>
+          <a:p>
+            <a:endParaRPr lang="de-DE" dirty="0"/>
+          </a:p>
+          <a:p>
+            <a:endParaRPr lang="de-DE" dirty="0"/>
+          </a:p>
+          <a:p>
+            <a:endParaRPr lang="de-DE" dirty="0"/>
+          </a:p>
+          <a:p>
+            <a:endParaRPr lang="de-DE" dirty="0"/>
+          </a:p>
+          <a:p>
+            <a:endParaRPr lang="de-DE" dirty="0"/>
+          </a:p>
+          <a:p>
+            <a:endParaRPr lang="de-DE" dirty="0"/>
+          </a:p>
+          <a:p>
+            <a:endParaRPr lang="de-DE" dirty="0"/>
+          </a:p>
+          <a:p>
+            <a:endParaRPr lang="de-DE" b="1" dirty="0"/>
+          </a:p>
+          <a:p>
+            <a:endParaRPr lang="de-DE" b="1" dirty="0"/>
+          </a:p>
+          <a:p>
+            <a:endParaRPr lang="de-DE" b="1" dirty="0"/>
+          </a:p>
+          <a:p>
+            <a:r>
+              <a:rPr lang="de-DE" b="1" dirty="0"/>
+              <a:t>Method – Gap Analysis</a:t>
+            </a:r>
+          </a:p>
+          <a:p>
+            <a:r>
+              <a:rPr lang="en-DE" dirty="0"/>
+              <a:t>A model-based gap analysis compares the interval-based current state against a DT/</a:t>
+            </a:r>
+            <a:r>
+              <a:rPr lang="en-DE" dirty="0" err="1"/>
+              <a:t>PdM</a:t>
+            </a:r>
+            <a:r>
+              <a:rPr lang="en-DE" dirty="0"/>
+              <a:t>-enabled target state along the full customer journey, then quantifies the business potential with an explicit, transparent assumption framework anchored to published German market data (DAT, TÜV, ADAC, McKinsey). No proprietary dataset is used — every assumption is stated and contestable. </a:t>
+            </a:r>
+            <a:br>
+              <a:rPr lang="de-DE" dirty="0"/>
+            </a:br>
+            <a:endParaRPr lang="de-DE" dirty="0"/>
+          </a:p>
+          <a:p>
+            <a:r>
+              <a:rPr lang="de-DE" b="1" dirty="0"/>
+              <a:t>Hinweis zu den Textebenen in PowerPoint: </a:t>
+            </a:r>
+            <a:br>
+              <a:rPr lang="de-DE" dirty="0"/>
+            </a:br>
+            <a:r>
+              <a:rPr lang="de-DE" dirty="0"/>
+              <a:t>Erste Textebene: Fließtext ohne Einrückung ab der zweiten Zeile. </a:t>
             </a:r>
           </a:p>
           <a:p>
             <a:pPr lvl="1"/>
             <a:r>
-              <a:rPr lang="de-DE" dirty="0" smtClean="0"/>
-              <a:t>Zweite Textebene: Aufzählungszeichen und Einzug ab der zweiten Zeile:</a:t>
+              <a:rPr lang="de-DE" dirty="0"/>
+              <a:t>Zweite Textebene: Aufzählungszeichen und Einzug ab der zweiten </a:t>
             </a:r>
             <a:br>
-              <a:rPr lang="de-DE" dirty="0" smtClean="0"/>
+              <a:rPr lang="de-DE" dirty="0"/>
             </a:br>
-            <a:endParaRPr lang="de-DE" dirty="0" smtClean="0"/>
-          </a:p>
-          <a:p>
-            <a:r>
-              <a:rPr lang="de-DE" b="1" dirty="0" smtClean="0"/>
-              <a:t>Hinweis zu den Textebenen in PowerPoint: </a:t>
-            </a:r>
-            <a:r>
-              <a:rPr lang="de-DE" dirty="0" smtClean="0"/>
-              <a:t/>
+            <a:r>
+              <a:rPr lang="de-DE" dirty="0"/>
+              <a:t>Zeile: zu der zweiten Textebene gelangt man durch Klick auf </a:t>
             </a:r>
             <a:br>
-              <a:rPr lang="de-DE" dirty="0" smtClean="0"/>
+              <a:rPr lang="de-DE" dirty="0"/>
             </a:br>
             <a:r>
-              <a:rPr lang="de-DE" dirty="0" smtClean="0"/>
-              <a:t>Erste Textebene: Fließtext ohne Einrückung ab der zweiten Zeile. </a:t>
+              <a:rPr lang="de-DE" dirty="0"/>
+              <a:t>„Einzug vergrößern“. </a:t>
             </a:r>
           </a:p>
           <a:p>
             <a:pPr lvl="1"/>
             <a:r>
-              <a:rPr lang="de-DE" dirty="0" smtClean="0"/>
-              <a:t>Zweite Textebene: Aufzählungszeichen und Einzug ab der zweiten </a:t>
-            </a:r>
-            <a:br>
-              <a:rPr lang="de-DE" dirty="0" smtClean="0"/>
-            </a:br>
-            <a:r>
-              <a:rPr lang="de-DE" dirty="0" smtClean="0"/>
-              <a:t>Zeile: zu der zweiten Textebene gelangt man durch Klick auf </a:t>
-            </a:r>
-            <a:br>
-              <a:rPr lang="de-DE" dirty="0" smtClean="0"/>
-            </a:br>
-            <a:r>
-              <a:rPr lang="de-DE" dirty="0" smtClean="0"/>
-              <a:t>„Einzug vergrößern“. </a:t>
+              <a:rPr lang="de-DE" dirty="0"/>
+              <a:t>Nur über diese Funktion ist das richtige Aufzählungszeichen + Abstand gewährleistet </a:t>
             </a:r>
           </a:p>
           <a:p>
             <a:pPr lvl="1"/>
             <a:r>
-              <a:rPr lang="de-DE" dirty="0" smtClean="0"/>
-              <a:t>Nur über diese Funktion ist das richtige Aufzählungszeichen + Abstand gewährleistet </a:t>
-            </a:r>
-          </a:p>
-          <a:p>
-            <a:pPr lvl="1"/>
-            <a:r>
-              <a:rPr lang="de-DE" dirty="0" smtClean="0"/>
+              <a:rPr lang="de-DE" dirty="0"/>
               <a:t>Die Linien zwischen den Aufzählungszeichen werden manuell gesetzt, Stärke: 1 Pt.</a:t>
             </a:r>
           </a:p>
@@ -4684,123 +5073,230 @@
             <p:ph type="body" sz="quarter" idx="13"/>
           </p:nvPr>
         </p:nvSpPr>
-        <p:spPr/>
+        <p:spPr>
+          <a:xfrm>
+            <a:off x="1993385" y="4718648"/>
+            <a:ext cx="20779773" cy="1507008"/>
+          </a:xfrm>
+        </p:spPr>
         <p:txBody>
           <a:bodyPr/>
           <a:lstStyle/>
           <a:p>
             <a:r>
-              <a:rPr lang="de-DE" smtClean="0"/>
-              <a:t>Name, Studiengang</a:t>
+              <a:rPr lang="de-DE" dirty="0"/>
+              <a:t>Maksim Bogachenko</a:t>
+            </a:r>
+            <a:r>
+              <a:rPr lang="en-DE" dirty="0"/>
+              <a:t>v ·</a:t>
+            </a:r>
+            <a:r>
+              <a:rPr lang="en-GB" dirty="0"/>
+              <a:t> </a:t>
+            </a:r>
+            <a:r>
+              <a:rPr lang="de-DE" dirty="0"/>
+              <a:t>Oliver Feng </a:t>
+            </a:r>
+            <a:r>
+              <a:rPr lang="en-DE" dirty="0"/>
+              <a:t>·</a:t>
+            </a:r>
+            <a:r>
+              <a:rPr lang="de-DE" dirty="0"/>
+              <a:t> Joel Martinez</a:t>
+            </a:r>
+          </a:p>
+          <a:p>
+            <a:r>
+              <a:rPr lang="en-DE" dirty="0" err="1"/>
+              <a:t>Wirtschaftsinformatik</a:t>
+            </a:r>
+            <a:r>
+              <a:rPr lang="en-DE" dirty="0"/>
+              <a:t> (WWI2023</a:t>
+            </a:r>
+            <a:r>
+              <a:rPr lang="en-GB" dirty="0"/>
+              <a:t>A</a:t>
+            </a:r>
+            <a:r>
+              <a:rPr lang="en-DE" dirty="0"/>
+              <a:t>), DHBW Stuttgart</a:t>
             </a:r>
             <a:endParaRPr lang="de-DE" dirty="0"/>
           </a:p>
         </p:txBody>
       </p:sp>
-      <p:sp>
-        <p:nvSpPr>
-          <p:cNvPr id="16" name="Bildplatzhalter 15"/>
-          <p:cNvSpPr>
-            <a:spLocks noGrp="1"/>
-          </p:cNvSpPr>
+      <p:pic>
+        <p:nvPicPr>
+          <p:cNvPr id="10" name="Picture Placeholder 9">
+            <a:extLst>
+              <a:ext uri="{FF2B5EF4-FFF2-40B4-BE49-F238E27FC236}">
+                <a16:creationId xmlns:a16="http://schemas.microsoft.com/office/drawing/2014/main" id="{0A25BBBA-215A-0C38-8502-65EAF169D803}"/>
+              </a:ext>
+            </a:extLst>
+          </p:cNvPr>
+          <p:cNvPicPr>
+            <a:picLocks noGrp="1" noChangeAspect="1"/>
+          </p:cNvPicPr>
           <p:nvPr>
             <p:ph type="pic" sz="quarter" idx="16"/>
           </p:nvPr>
-        </p:nvSpPr>
+        </p:nvPicPr>
+        <p:blipFill>
+          <a:blip r:embed="rId3">
+            <a:extLst>
+              <a:ext uri="{28A0092B-C50C-407E-A947-70E740481C1C}">
+                <a14:useLocalDpi xmlns:a14="http://schemas.microsoft.com/office/drawing/2010/main" val="0"/>
+              </a:ext>
+            </a:extLst>
+          </a:blip>
+          <a:srcRect t="-2787" b="-4074"/>
+          <a:stretch>
+            <a:fillRect/>
+          </a:stretch>
+        </p:blipFill>
         <p:spPr>
           <a:xfrm>
-            <a:off x="21598827" y="24104968"/>
-            <a:ext cx="3478587" cy="1584000"/>
+            <a:off x="22463782" y="24049222"/>
+            <a:ext cx="1749697" cy="1869722"/>
           </a:xfrm>
+          <a:prstGeom prst="rect">
+            <a:avLst/>
+          </a:prstGeom>
+          <a:solidFill>
+            <a:prstClr val="white"/>
+          </a:solidFill>
         </p:spPr>
-      </p:sp>
-      <p:sp>
-        <p:nvSpPr>
-          <p:cNvPr id="19" name="Bildplatzhalter 18"/>
-          <p:cNvSpPr>
-            <a:spLocks noGrp="1"/>
-          </p:cNvSpPr>
+      </p:pic>
+      <p:pic>
+        <p:nvPicPr>
+          <p:cNvPr id="12" name="Picture Placeholder 11">
+            <a:extLst>
+              <a:ext uri="{FF2B5EF4-FFF2-40B4-BE49-F238E27FC236}">
+                <a16:creationId xmlns:a16="http://schemas.microsoft.com/office/drawing/2014/main" id="{F997814E-F9D3-E744-C05E-7F0F04B77008}"/>
+              </a:ext>
+            </a:extLst>
+          </p:cNvPr>
+          <p:cNvPicPr>
+            <a:picLocks noGrp="1" noChangeAspect="1"/>
+          </p:cNvPicPr>
           <p:nvPr>
             <p:ph type="pic" sz="quarter" idx="17"/>
           </p:nvPr>
-        </p:nvSpPr>
+        </p:nvPicPr>
+        <p:blipFill>
+          <a:blip r:embed="rId4">
+            <a:extLst>
+              <a:ext uri="{28A0092B-C50C-407E-A947-70E740481C1C}">
+                <a14:useLocalDpi xmlns:a14="http://schemas.microsoft.com/office/drawing/2010/main" val="0"/>
+              </a:ext>
+            </a:extLst>
+          </a:blip>
+          <a:srcRect t="4985" b="813"/>
+          <a:stretch>
+            <a:fillRect/>
+          </a:stretch>
+        </p:blipFill>
         <p:spPr>
           <a:xfrm>
-            <a:off x="25631275" y="24104968"/>
-            <a:ext cx="3478587" cy="1584000"/>
+            <a:off x="25920852" y="24139036"/>
+            <a:ext cx="2892377" cy="1816466"/>
           </a:xfrm>
+          <a:prstGeom prst="rect">
+            <a:avLst/>
+          </a:prstGeom>
+          <a:solidFill>
+            <a:prstClr val="white"/>
+          </a:solidFill>
         </p:spPr>
-      </p:sp>
-      <p:sp>
-        <p:nvSpPr>
-          <p:cNvPr id="20" name="Bildplatzhalter 19"/>
-          <p:cNvSpPr>
-            <a:spLocks noGrp="1"/>
-          </p:cNvSpPr>
+      </p:pic>
+      <p:pic>
+        <p:nvPicPr>
+          <p:cNvPr id="14" name="Picture Placeholder 13">
+            <a:extLst>
+              <a:ext uri="{FF2B5EF4-FFF2-40B4-BE49-F238E27FC236}">
+                <a16:creationId xmlns:a16="http://schemas.microsoft.com/office/drawing/2014/main" id="{F5DBD4AC-54D7-7FEB-DA6E-79E89A85D039}"/>
+              </a:ext>
+            </a:extLst>
+          </p:cNvPr>
+          <p:cNvPicPr>
+            <a:picLocks noGrp="1" noChangeAspect="1"/>
+          </p:cNvPicPr>
           <p:nvPr>
             <p:ph type="pic" sz="quarter" idx="18"/>
           </p:nvPr>
-        </p:nvSpPr>
+        </p:nvPicPr>
+        <p:blipFill>
+          <a:blip r:embed="rId5">
+            <a:extLst>
+              <a:ext uri="{28A0092B-C50C-407E-A947-70E740481C1C}">
+                <a14:useLocalDpi xmlns:a14="http://schemas.microsoft.com/office/drawing/2010/main" val="0"/>
+              </a:ext>
+            </a:extLst>
+          </a:blip>
+          <a:srcRect t="13597" b="13597"/>
+          <a:stretch>
+            <a:fillRect/>
+          </a:stretch>
+        </p:blipFill>
         <p:spPr>
           <a:xfrm>
-            <a:off x="21598827" y="26169434"/>
-            <a:ext cx="3478587" cy="1584000"/>
+            <a:off x="21599525" y="26169938"/>
+            <a:ext cx="3478213" cy="1582737"/>
           </a:xfrm>
+          <a:prstGeom prst="rect">
+            <a:avLst/>
+          </a:prstGeom>
+          <a:solidFill>
+            <a:prstClr val="white"/>
+          </a:solidFill>
         </p:spPr>
-      </p:sp>
-      <p:sp>
-        <p:nvSpPr>
-          <p:cNvPr id="21" name="Bildplatzhalter 20"/>
-          <p:cNvSpPr>
-            <a:spLocks noGrp="1"/>
-          </p:cNvSpPr>
+      </p:pic>
+      <p:pic>
+        <p:nvPicPr>
+          <p:cNvPr id="25" name="Picture Placeholder 24">
+            <a:extLst>
+              <a:ext uri="{FF2B5EF4-FFF2-40B4-BE49-F238E27FC236}">
+                <a16:creationId xmlns:a16="http://schemas.microsoft.com/office/drawing/2014/main" id="{49808FA1-334A-15B3-B3FF-3A5C21890F24}"/>
+              </a:ext>
+            </a:extLst>
+          </p:cNvPr>
+          <p:cNvPicPr>
+            <a:picLocks noGrp="1" noChangeAspect="1"/>
+          </p:cNvPicPr>
           <p:nvPr>
             <p:ph type="pic" sz="quarter" idx="19"/>
           </p:nvPr>
-        </p:nvSpPr>
+        </p:nvPicPr>
+        <p:blipFill>
+          <a:blip r:embed="rId6">
+            <a:extLst>
+              <a:ext uri="{28A0092B-C50C-407E-A947-70E740481C1C}">
+                <a14:useLocalDpi xmlns:a14="http://schemas.microsoft.com/office/drawing/2010/main" val="0"/>
+              </a:ext>
+            </a:extLst>
+          </a:blip>
+          <a:srcRect l="1148" r="3729"/>
+          <a:stretch>
+            <a:fillRect/>
+          </a:stretch>
+        </p:blipFill>
         <p:spPr>
           <a:xfrm>
-            <a:off x="25631275" y="26169434"/>
-            <a:ext cx="3478587" cy="1584000"/>
+            <a:off x="25972496" y="26535836"/>
+            <a:ext cx="2840733" cy="1159540"/>
           </a:xfrm>
+          <a:prstGeom prst="rect">
+            <a:avLst/>
+          </a:prstGeom>
+          <a:solidFill>
+            <a:prstClr val="white"/>
+          </a:solidFill>
         </p:spPr>
-      </p:sp>
-      <p:sp>
-        <p:nvSpPr>
-          <p:cNvPr id="22" name="Bildplatzhalter 21"/>
-          <p:cNvSpPr>
-            <a:spLocks noGrp="1"/>
-          </p:cNvSpPr>
-          <p:nvPr>
-            <p:ph type="pic" sz="quarter" idx="21"/>
-          </p:nvPr>
-        </p:nvSpPr>
-        <p:spPr/>
-      </p:sp>
-      <p:sp>
-        <p:nvSpPr>
-          <p:cNvPr id="23" name="Bildplatzhalter 22"/>
-          <p:cNvSpPr>
-            <a:spLocks noGrp="1"/>
-          </p:cNvSpPr>
-          <p:nvPr>
-            <p:ph type="pic" sz="quarter" idx="22"/>
-          </p:nvPr>
-        </p:nvSpPr>
-        <p:spPr/>
-      </p:sp>
-      <p:sp>
-        <p:nvSpPr>
-          <p:cNvPr id="24" name="Bildplatzhalter 23"/>
-          <p:cNvSpPr>
-            <a:spLocks noGrp="1"/>
-          </p:cNvSpPr>
-          <p:nvPr>
-            <p:ph type="pic" sz="quarter" idx="24"/>
-          </p:nvPr>
-        </p:nvSpPr>
-        <p:spPr/>
-      </p:sp>
+      </p:pic>
       <p:sp>
         <p:nvSpPr>
           <p:cNvPr id="26" name="Textplatzhalter 25"/>
@@ -4811,73 +5307,24 @@
             <p:ph type="body" sz="quarter" idx="23"/>
           </p:nvPr>
         </p:nvSpPr>
-        <p:spPr/>
+        <p:spPr>
+          <a:xfrm>
+            <a:off x="1954136" y="24330396"/>
+            <a:ext cx="15534000" cy="1257209"/>
+          </a:xfrm>
+        </p:spPr>
         <p:txBody>
           <a:bodyPr/>
           <a:lstStyle/>
           <a:p>
             <a:r>
-              <a:rPr lang="de-DE" smtClean="0"/>
-              <a:t>Bildunterschrift</a:t>
+              <a:rPr lang="en-DE" dirty="0"/>
+              <a:t>Visual to place here: the current-vs-target cycle (Figure 1 from the paper), ideally next to a car silhouette with the monitored wear parts highlighted.</a:t>
             </a:r>
             <a:endParaRPr lang="de-DE" dirty="0"/>
           </a:p>
         </p:txBody>
       </p:sp>
-      <p:pic>
-        <p:nvPicPr>
-          <p:cNvPr id="2050" name="Picture 2"/>
-          <p:cNvPicPr>
-            <a:picLocks noChangeAspect="1" noChangeArrowheads="1"/>
-          </p:cNvPicPr>
-          <p:nvPr/>
-        </p:nvPicPr>
-        <p:blipFill>
-          <a:blip r:embed="rId2">
-            <a:extLst>
-              <a:ext uri="{28A0092B-C50C-407E-A947-70E740481C1C}">
-                <a14:useLocalDpi xmlns:a14="http://schemas.microsoft.com/office/drawing/2010/main"/>
-              </a:ext>
-            </a:extLst>
-          </a:blip>
-          <a:srcRect/>
-          <a:stretch>
-            <a:fillRect/>
-          </a:stretch>
-        </p:blipFill>
-        <p:spPr bwMode="auto">
-          <a:xfrm>
-            <a:off x="16549834" y="22616533"/>
-            <a:ext cx="1588339" cy="1380340"/>
-          </a:xfrm>
-          <a:prstGeom prst="rect">
-            <a:avLst/>
-          </a:prstGeom>
-          <a:noFill/>
-          <a:ln>
-            <a:noFill/>
-          </a:ln>
-          <a:extLst>
-            <a:ext uri="{909E8E84-426E-40DD-AFC4-6F175D3DCCD1}">
-              <a14:hiddenFill xmlns:a14="http://schemas.microsoft.com/office/drawing/2010/main">
-                <a:solidFill>
-                  <a:schemeClr val="accent1"/>
-                </a:solidFill>
-              </a14:hiddenFill>
-            </a:ext>
-            <a:ext uri="{91240B29-F687-4F45-9708-019B960494DF}">
-              <a14:hiddenLine xmlns:a14="http://schemas.microsoft.com/office/drawing/2010/main" w="9525">
-                <a:solidFill>
-                  <a:schemeClr val="tx1"/>
-                </a:solidFill>
-                <a:miter lim="800000"/>
-                <a:headEnd/>
-                <a:tailEnd/>
-              </a14:hiddenLine>
-            </a:ext>
-          </a:extLst>
-        </p:spPr>
-      </p:pic>
       <p:cxnSp>
         <p:nvCxnSpPr>
           <p:cNvPr id="71" name="Gerade Verbindung 70"/>
@@ -4886,7 +5333,7 @@
         </p:nvCxnSpPr>
         <p:spPr>
           <a:xfrm>
-            <a:off x="2682926" y="24356913"/>
+            <a:off x="1993385" y="30117553"/>
             <a:ext cx="14940000" cy="0"/>
           </a:xfrm>
           <a:prstGeom prst="line">
@@ -4917,7 +5364,7 @@
         </p:nvCxnSpPr>
         <p:spPr>
           <a:xfrm>
-            <a:off x="2682926" y="25797073"/>
+            <a:off x="2000510" y="31557713"/>
             <a:ext cx="14940000" cy="0"/>
           </a:xfrm>
           <a:prstGeom prst="line">
@@ -4948,100 +5395,13 @@
         </p:nvCxnSpPr>
         <p:spPr>
           <a:xfrm>
-            <a:off x="2682926" y="27182929"/>
+            <a:off x="1993385" y="33141889"/>
             <a:ext cx="14940000" cy="0"/>
           </a:xfrm>
           <a:prstGeom prst="line">
             <a:avLst/>
           </a:prstGeom>
           <a:ln w="12700"/>
-        </p:spPr>
-        <p:style>
-          <a:lnRef idx="1">
-            <a:schemeClr val="accent1"/>
-          </a:lnRef>
-          <a:fillRef idx="0">
-            <a:schemeClr val="accent1"/>
-          </a:fillRef>
-          <a:effectRef idx="0">
-            <a:schemeClr val="accent1"/>
-          </a:effectRef>
-          <a:fontRef idx="minor">
-            <a:schemeClr val="tx1"/>
-          </a:fontRef>
-        </p:style>
-      </p:cxnSp>
-      <p:pic>
-        <p:nvPicPr>
-          <p:cNvPr id="2051" name="Picture 3"/>
-          <p:cNvPicPr>
-            <a:picLocks noChangeAspect="1" noChangeArrowheads="1"/>
-          </p:cNvPicPr>
-          <p:nvPr/>
-        </p:nvPicPr>
-        <p:blipFill rotWithShape="1">
-          <a:blip r:embed="rId3" cstate="email">
-            <a:extLst>
-              <a:ext uri="{28A0092B-C50C-407E-A947-70E740481C1C}">
-                <a14:useLocalDpi xmlns:a14="http://schemas.microsoft.com/office/drawing/2010/main"/>
-              </a:ext>
-            </a:extLst>
-          </a:blip>
-          <a:srcRect/>
-          <a:stretch/>
-        </p:blipFill>
-        <p:spPr bwMode="auto">
-          <a:xfrm>
-            <a:off x="11249486" y="31125665"/>
-            <a:ext cx="4275873" cy="4567342"/>
-          </a:xfrm>
-          <a:prstGeom prst="rect">
-            <a:avLst/>
-          </a:prstGeom>
-          <a:noFill/>
-          <a:ln>
-            <a:noFill/>
-          </a:ln>
-          <a:extLst>
-            <a:ext uri="{909E8E84-426E-40DD-AFC4-6F175D3DCCD1}">
-              <a14:hiddenFill xmlns:a14="http://schemas.microsoft.com/office/drawing/2010/main">
-                <a:solidFill>
-                  <a:schemeClr val="accent1"/>
-                </a:solidFill>
-              </a14:hiddenFill>
-            </a:ext>
-            <a:ext uri="{91240B29-F687-4F45-9708-019B960494DF}">
-              <a14:hiddenLine xmlns:a14="http://schemas.microsoft.com/office/drawing/2010/main" w="9525">
-                <a:solidFill>
-                  <a:schemeClr val="tx1"/>
-                </a:solidFill>
-                <a:miter lim="800000"/>
-                <a:headEnd/>
-                <a:tailEnd/>
-              </a14:hiddenLine>
-            </a:ext>
-          </a:extLst>
-        </p:spPr>
-      </p:pic>
-      <p:cxnSp>
-        <p:nvCxnSpPr>
-          <p:cNvPr id="78" name="Gerade Verbindung 77"/>
-          <p:cNvCxnSpPr/>
-          <p:nvPr/>
-        </p:nvCxnSpPr>
-        <p:spPr>
-          <a:xfrm>
-            <a:off x="21827933" y="14608403"/>
-            <a:ext cx="7629373" cy="0"/>
-          </a:xfrm>
-          <a:prstGeom prst="line">
-            <a:avLst/>
-          </a:prstGeom>
-          <a:ln w="12700">
-            <a:solidFill>
-              <a:srgbClr val="5D686E"/>
-            </a:solidFill>
-          </a:ln>
         </p:spPr>
         <p:style>
           <a:lnRef idx="1">
@@ -5066,7 +5426,7 @@
         </p:nvCxnSpPr>
         <p:spPr>
           <a:xfrm>
-            <a:off x="21827933" y="13417507"/>
+            <a:off x="21662354" y="15499929"/>
             <a:ext cx="7629373" cy="0"/>
           </a:xfrm>
           <a:prstGeom prst="line">
@@ -5101,7 +5461,7 @@
         </p:nvCxnSpPr>
         <p:spPr>
           <a:xfrm>
-            <a:off x="21827933" y="15394456"/>
+            <a:off x="21691311" y="13843745"/>
             <a:ext cx="7629373" cy="0"/>
           </a:xfrm>
           <a:prstGeom prst="line">
@@ -5130,180 +5490,6 @@
       </p:cxnSp>
       <p:pic>
         <p:nvPicPr>
-          <p:cNvPr id="1026" name="Picture 2"/>
-          <p:cNvPicPr>
-            <a:picLocks noChangeAspect="1" noChangeArrowheads="1"/>
-          </p:cNvPicPr>
-          <p:nvPr/>
-        </p:nvPicPr>
-        <p:blipFill rotWithShape="1">
-          <a:blip r:embed="rId4" cstate="email">
-            <a:extLst>
-              <a:ext uri="{28A0092B-C50C-407E-A947-70E740481C1C}">
-                <a14:useLocalDpi xmlns:a14="http://schemas.microsoft.com/office/drawing/2010/main"/>
-              </a:ext>
-            </a:extLst>
-          </a:blip>
-          <a:srcRect/>
-          <a:stretch/>
-        </p:blipFill>
-        <p:spPr bwMode="auto">
-          <a:xfrm>
-            <a:off x="2205060" y="31125665"/>
-            <a:ext cx="5341474" cy="6446191"/>
-          </a:xfrm>
-          <a:prstGeom prst="rect">
-            <a:avLst/>
-          </a:prstGeom>
-          <a:noFill/>
-          <a:ln>
-            <a:noFill/>
-          </a:ln>
-          <a:extLst>
-            <a:ext uri="{909E8E84-426E-40DD-AFC4-6F175D3DCCD1}">
-              <a14:hiddenFill xmlns:a14="http://schemas.microsoft.com/office/drawing/2010/main">
-                <a:solidFill>
-                  <a:schemeClr val="accent1"/>
-                </a:solidFill>
-              </a14:hiddenFill>
-            </a:ext>
-            <a:ext uri="{91240B29-F687-4F45-9708-019B960494DF}">
-              <a14:hiddenLine xmlns:a14="http://schemas.microsoft.com/office/drawing/2010/main" w="9525">
-                <a:solidFill>
-                  <a:schemeClr val="tx1"/>
-                </a:solidFill>
-                <a:miter lim="800000"/>
-                <a:headEnd/>
-                <a:tailEnd/>
-              </a14:hiddenLine>
-            </a:ext>
-          </a:extLst>
-        </p:spPr>
-      </p:pic>
-      <p:sp>
-        <p:nvSpPr>
-          <p:cNvPr id="3" name="Textfeld 2"/>
-          <p:cNvSpPr txBox="1"/>
-          <p:nvPr/>
-        </p:nvSpPr>
-        <p:spPr>
-          <a:xfrm>
-            <a:off x="11320388" y="27988352"/>
-            <a:ext cx="7996386" cy="2910512"/>
-          </a:xfrm>
-          <a:prstGeom prst="rect">
-            <a:avLst/>
-          </a:prstGeom>
-          <a:noFill/>
-        </p:spPr>
-        <p:txBody>
-          <a:bodyPr wrap="square" lIns="36708" tIns="36708" rIns="36708" bIns="36708" rtlCol="0">
-            <a:spAutoFit/>
-          </a:bodyPr>
-          <a:lstStyle/>
-          <a:p>
-            <a:r>
-              <a:rPr lang="de-DE" sz="3600" b="1" dirty="0">
-                <a:latin typeface="Arial" panose="020B0604020202020204" pitchFamily="34" charset="0"/>
-                <a:cs typeface="Arial" panose="020B0604020202020204" pitchFamily="34" charset="0"/>
-              </a:rPr>
-              <a:t>Hinweis zu den Bildern/Logos:</a:t>
-            </a:r>
-          </a:p>
-          <a:p>
-            <a:r>
-              <a:rPr lang="de-DE" sz="3600" dirty="0">
-                <a:latin typeface="Arial" panose="020B0604020202020204" pitchFamily="34" charset="0"/>
-                <a:cs typeface="Arial" panose="020B0604020202020204" pitchFamily="34" charset="0"/>
-              </a:rPr>
-              <a:t>Wird ein Bild abgeschnitten angezeigt, </a:t>
-            </a:r>
-            <a:br>
-              <a:rPr lang="de-DE" sz="3600" dirty="0">
-                <a:latin typeface="Arial" panose="020B0604020202020204" pitchFamily="34" charset="0"/>
-                <a:cs typeface="Arial" panose="020B0604020202020204" pitchFamily="34" charset="0"/>
-              </a:rPr>
-            </a:br>
-            <a:r>
-              <a:rPr lang="de-DE" sz="3600" dirty="0">
-                <a:latin typeface="Arial" panose="020B0604020202020204" pitchFamily="34" charset="0"/>
-                <a:cs typeface="Arial" panose="020B0604020202020204" pitchFamily="34" charset="0"/>
-              </a:rPr>
-              <a:t>so kann dies über die Bild-Funktion </a:t>
-            </a:r>
-            <a:br>
-              <a:rPr lang="de-DE" sz="3600" dirty="0">
-                <a:latin typeface="Arial" panose="020B0604020202020204" pitchFamily="34" charset="0"/>
-                <a:cs typeface="Arial" panose="020B0604020202020204" pitchFamily="34" charset="0"/>
-              </a:rPr>
-            </a:br>
-            <a:r>
-              <a:rPr lang="de-DE" sz="3600" dirty="0">
-                <a:latin typeface="Arial" panose="020B0604020202020204" pitchFamily="34" charset="0"/>
-                <a:cs typeface="Arial" panose="020B0604020202020204" pitchFamily="34" charset="0"/>
-              </a:rPr>
-              <a:t>„Zuschneiden“ &gt; „Einpassen“ mit 1 Klick korrigiert werden</a:t>
-            </a:r>
-          </a:p>
-        </p:txBody>
-      </p:sp>
-      <p:sp>
-        <p:nvSpPr>
-          <p:cNvPr id="32" name="Textfeld 31"/>
-          <p:cNvSpPr txBox="1"/>
-          <p:nvPr/>
-        </p:nvSpPr>
-        <p:spPr>
-          <a:xfrm>
-            <a:off x="2106862" y="27988352"/>
-            <a:ext cx="8640960" cy="2864140"/>
-          </a:xfrm>
-          <a:prstGeom prst="rect">
-            <a:avLst/>
-          </a:prstGeom>
-          <a:noFill/>
-        </p:spPr>
-        <p:txBody>
-          <a:bodyPr wrap="square" lIns="93239" tIns="46620" rIns="93239" bIns="46620" rtlCol="0">
-            <a:spAutoFit/>
-          </a:bodyPr>
-          <a:lstStyle/>
-          <a:p>
-            <a:r>
-              <a:rPr lang="de-DE" sz="3600" b="1" dirty="0">
-                <a:latin typeface="Arial" panose="020B0604020202020204" pitchFamily="34" charset="0"/>
-                <a:cs typeface="Arial" panose="020B0604020202020204" pitchFamily="34" charset="0"/>
-              </a:rPr>
-              <a:t>Hinweis zur Bearbeitung der Inhalte:</a:t>
-            </a:r>
-          </a:p>
-          <a:p>
-            <a:r>
-              <a:rPr lang="de-DE" sz="3600" dirty="0">
-                <a:latin typeface="Arial" panose="020B0604020202020204" pitchFamily="34" charset="0"/>
-                <a:cs typeface="Arial" panose="020B0604020202020204" pitchFamily="34" charset="0"/>
-              </a:rPr>
-              <a:t>Bitte arbeiten Sie mit den drei auf den nächsten Seiten folgenden </a:t>
-            </a:r>
-            <a:r>
-              <a:rPr lang="de-DE" sz="3600" dirty="0" smtClean="0">
-                <a:latin typeface="Arial" panose="020B0604020202020204" pitchFamily="34" charset="0"/>
-                <a:cs typeface="Arial" panose="020B0604020202020204" pitchFamily="34" charset="0"/>
-              </a:rPr>
-              <a:t>Musterseiten</a:t>
-            </a:r>
-            <a:r>
-              <a:rPr lang="de-DE" sz="3600" dirty="0">
-                <a:latin typeface="Arial" panose="020B0604020202020204" pitchFamily="34" charset="0"/>
-                <a:cs typeface="Arial" panose="020B0604020202020204" pitchFamily="34" charset="0"/>
-              </a:rPr>
-              <a:t>. Arbeiten Sie direkt in die gewünschte Folie oder duplizieren Sie diese vorher.</a:t>
-            </a:r>
-          </a:p>
-        </p:txBody>
-      </p:sp>
-      <p:pic>
-        <p:nvPicPr>
           <p:cNvPr id="47" name="Picture 2"/>
           <p:cNvPicPr>
             <a:picLocks noChangeArrowheads="1"/>
@@ -5311,7 +5497,7 @@
           <p:nvPr/>
         </p:nvPicPr>
         <p:blipFill>
-          <a:blip r:embed="rId5" cstate="print">
+          <a:blip r:embed="rId7" cstate="print">
             <a:extLst>
               <a:ext uri="{28A0092B-C50C-407E-A947-70E740481C1C}">
                 <a14:useLocalDpi xmlns:a14="http://schemas.microsoft.com/office/drawing/2010/main" val="0"/>
@@ -5371,7 +5557,7 @@
                 </a:solidFill>
                 <a:latin typeface="Georgia" panose="02040502050405020303" pitchFamily="18" charset="0"/>
               </a:rPr>
-              <a:t>Zielsetzung</a:t>
+              <a:t>Research Goal</a:t>
             </a:r>
           </a:p>
         </p:txBody>
@@ -5385,7 +5571,7 @@
           <p:nvPr/>
         </p:nvPicPr>
         <p:blipFill>
-          <a:blip r:embed="rId5" cstate="print">
+          <a:blip r:embed="rId7" cstate="print">
             <a:extLst>
               <a:ext uri="{28A0092B-C50C-407E-A947-70E740481C1C}">
                 <a14:useLocalDpi xmlns:a14="http://schemas.microsoft.com/office/drawing/2010/main" val="0"/>
@@ -5398,7 +5584,7 @@
         </p:blipFill>
         <p:spPr bwMode="auto">
           <a:xfrm>
-            <a:off x="20267998" y="16652057"/>
+            <a:off x="20323488" y="17016772"/>
             <a:ext cx="10476000" cy="1283380"/>
           </a:xfrm>
           <a:prstGeom prst="rect">
@@ -5424,7 +5610,7 @@
         </p:nvSpPr>
         <p:spPr>
           <a:xfrm>
-            <a:off x="20397337" y="17149997"/>
+            <a:off x="20391746" y="17531424"/>
             <a:ext cx="10170590" cy="768728"/>
           </a:xfrm>
           <a:prstGeom prst="rect">
@@ -5445,7 +5631,7 @@
                 </a:solidFill>
                 <a:latin typeface="Georgia" panose="02040502050405020303" pitchFamily="18" charset="0"/>
               </a:rPr>
-              <a:t>Ausblick</a:t>
+              <a:t>Recommendations</a:t>
             </a:r>
           </a:p>
         </p:txBody>
@@ -5459,7 +5645,7 @@
           <p:nvPr/>
         </p:nvPicPr>
         <p:blipFill>
-          <a:blip r:embed="rId5" cstate="print">
+          <a:blip r:embed="rId7" cstate="print">
             <a:extLst>
               <a:ext uri="{28A0092B-C50C-407E-A947-70E740481C1C}">
                 <a14:useLocalDpi xmlns:a14="http://schemas.microsoft.com/office/drawing/2010/main" val="0"/>
@@ -5513,7 +5699,7 @@
           <a:lstStyle/>
           <a:p>
             <a:r>
-              <a:rPr lang="de-DE" sz="4100" dirty="0" smtClean="0">
+              <a:rPr lang="de-DE" sz="4100" dirty="0">
                 <a:solidFill>
                   <a:schemeClr val="bg1"/>
                 </a:solidFill>
@@ -5521,12 +5707,6 @@
               </a:rPr>
               <a:t>Kooperative Partner</a:t>
             </a:r>
-            <a:endParaRPr lang="de-DE" sz="4100" dirty="0">
-              <a:solidFill>
-                <a:schemeClr val="bg1"/>
-              </a:solidFill>
-              <a:latin typeface="Georgia" panose="02040502050405020303" pitchFamily="18" charset="0"/>
-            </a:endParaRPr>
           </a:p>
         </p:txBody>
       </p:sp>
@@ -5557,7 +5737,7 @@
                 <a:latin typeface="Georgia" panose="02040502050405020303" pitchFamily="18" charset="0"/>
                 <a:cs typeface="Arial" panose="020B0604020202020204" pitchFamily="34" charset="0"/>
               </a:rPr>
-              <a:t>Quellen</a:t>
+              <a:t>References</a:t>
             </a:r>
           </a:p>
         </p:txBody>
@@ -5574,7 +5754,7 @@
         </p:nvSpPr>
         <p:spPr>
           <a:xfrm>
-            <a:off x="20733052" y="29264368"/>
+            <a:off x="20756934" y="29262872"/>
             <a:ext cx="9720000" cy="5461697"/>
           </a:xfrm>
         </p:spPr>
@@ -5588,18 +5768,9 @@
               </a:lnSpc>
             </a:pPr>
             <a:r>
-              <a:rPr lang="de-DE" sz="3000" dirty="0" smtClean="0"/>
-              <a:t>Hier erste Textebene: </a:t>
-            </a:r>
-            <a:r>
-              <a:rPr lang="de-DE" sz="3000" smtClean="0"/>
-              <a:t>Aufzählungspunkt </a:t>
-            </a:r>
-            <a:r>
-              <a:rPr lang="de-DE" sz="3000" smtClean="0"/>
-              <a:t>…………………………………………………………………………………………………………………………………… </a:t>
-            </a:r>
-            <a:endParaRPr lang="de-DE" sz="3000" dirty="0" smtClean="0"/>
+              <a:rPr lang="de-DE" sz="3000" dirty="0"/>
+              <a:t>AbouGrad et al. (2026) – „XAI Digital Twin Predictive Maintenance in the Automotive Industry" </a:t>
+            </a:r>
           </a:p>
           <a:p>
             <a:pPr>
@@ -5608,8 +5779,19 @@
               </a:lnSpc>
             </a:pPr>
             <a:r>
-              <a:rPr lang="de-DE" sz="3000" dirty="0" smtClean="0"/>
-              <a:t>Die Linien zwischen den Aufzählungszeichen werden manuell gesetzt, Stärke: 1 Pt.</a:t>
+              <a:rPr lang="de-DE" sz="3000" dirty="0"/>
+              <a:t>DAT Report 2026 (Deutsche Automobil Treuhand) </a:t>
+            </a:r>
+          </a:p>
+          <a:p>
+            <a:pPr>
+              <a:lnSpc>
+                <a:spcPts val="3671"/>
+              </a:lnSpc>
+            </a:pPr>
+            <a:r>
+              <a:rPr lang="en-GB" sz="3000" dirty="0"/>
+              <a:t>Lopes et al. (2025) – „A Vehicle Digital Twin in the Context of a Software Ecosystem</a:t>
             </a:r>
             <a:endParaRPr lang="de-DE" sz="3000" dirty="0"/>
           </a:p>
@@ -5623,7 +5805,7 @@
         </p:nvCxnSpPr>
         <p:spPr>
           <a:xfrm>
-            <a:off x="21827933" y="31701729"/>
+            <a:off x="21837054" y="31269681"/>
             <a:ext cx="7629373" cy="0"/>
           </a:xfrm>
           <a:prstGeom prst="line">
@@ -5658,7 +5840,7 @@
         </p:nvCxnSpPr>
         <p:spPr>
           <a:xfrm>
-            <a:off x="21827933" y="33501929"/>
+            <a:off x="21837053" y="32493817"/>
             <a:ext cx="7629373" cy="0"/>
           </a:xfrm>
           <a:prstGeom prst="line">
@@ -5713,7 +5895,7 @@
               </a:lnSpc>
             </a:pPr>
             <a:r>
-              <a:rPr lang="de-DE" sz="2600" b="0" dirty="0" smtClean="0">
+              <a:rPr lang="de-DE" sz="2600" b="0" dirty="0">
                 <a:solidFill>
                   <a:srgbClr val="FFFFFF"/>
                 </a:solidFill>
@@ -5730,7 +5912,7 @@
               </a:lnSpc>
             </a:pPr>
             <a:r>
-              <a:rPr lang="de-DE" sz="2600" b="0" dirty="0" smtClean="0">
+              <a:rPr lang="de-DE" sz="2600" b="0" dirty="0">
                 <a:solidFill>
                   <a:srgbClr val="FFFFFF"/>
                 </a:solidFill>
@@ -5740,7 +5922,7 @@
               <a:t>+49 711</a:t>
             </a:r>
             <a:r>
-              <a:rPr lang="de-DE" sz="2600" b="0" baseline="0" dirty="0" smtClean="0">
+              <a:rPr lang="de-DE" sz="2600" b="0" baseline="0" dirty="0">
                 <a:solidFill>
                   <a:srgbClr val="FFFFFF"/>
                 </a:solidFill>
@@ -5757,7 +5939,7 @@
               </a:lnSpc>
             </a:pPr>
             <a:r>
-              <a:rPr lang="de-DE" sz="2600" b="0" baseline="0" dirty="0" smtClean="0">
+              <a:rPr lang="de-DE" sz="2600" b="0" baseline="0" dirty="0">
                 <a:solidFill>
                   <a:srgbClr val="FFFFFF"/>
                 </a:solidFill>
@@ -5773,6 +5955,80 @@
           </a:p>
         </p:txBody>
       </p:sp>
+      <p:sp>
+        <p:nvSpPr>
+          <p:cNvPr id="34" name="Textfeld 55">
+            <a:extLst>
+              <a:ext uri="{FF2B5EF4-FFF2-40B4-BE49-F238E27FC236}">
+                <a16:creationId xmlns:a16="http://schemas.microsoft.com/office/drawing/2014/main" id="{2F69AE73-3DCA-7BA6-7691-9BCDBC1383DB}"/>
+              </a:ext>
+            </a:extLst>
+          </p:cNvPr>
+          <p:cNvSpPr txBox="1"/>
+          <p:nvPr/>
+        </p:nvSpPr>
+        <p:spPr>
+          <a:xfrm>
+            <a:off x="20537445" y="33812330"/>
+            <a:ext cx="9937104" cy="965899"/>
+          </a:xfrm>
+          <a:prstGeom prst="rect">
+            <a:avLst/>
+          </a:prstGeom>
+          <a:noFill/>
+        </p:spPr>
+        <p:txBody>
+          <a:bodyPr wrap="none" lIns="1064547" tIns="183543" rIns="734170" bIns="183543" rtlCol="0">
+            <a:noAutofit/>
+          </a:bodyPr>
+          <a:lstStyle/>
+          <a:p>
+            <a:r>
+              <a:rPr lang="de-DE" sz="4100" dirty="0">
+                <a:latin typeface="Georgia" panose="02040502050405020303" pitchFamily="18" charset="0"/>
+                <a:cs typeface="Arial" panose="020B0604020202020204" pitchFamily="34" charset="0"/>
+              </a:rPr>
+              <a:t>Paper and complete references</a:t>
+            </a:r>
+          </a:p>
+        </p:txBody>
+      </p:sp>
+      <p:pic>
+        <p:nvPicPr>
+          <p:cNvPr id="37" name="Picture 36">
+            <a:extLst>
+              <a:ext uri="{FF2B5EF4-FFF2-40B4-BE49-F238E27FC236}">
+                <a16:creationId xmlns:a16="http://schemas.microsoft.com/office/drawing/2014/main" id="{35EC58EC-0A78-9535-AEBD-3DB0ED014535}"/>
+              </a:ext>
+            </a:extLst>
+          </p:cNvPr>
+          <p:cNvPicPr>
+            <a:picLocks noChangeAspect="1"/>
+          </p:cNvPicPr>
+          <p:nvPr/>
+        </p:nvPicPr>
+        <p:blipFill>
+          <a:blip r:embed="rId8">
+            <a:extLst>
+              <a:ext uri="{28A0092B-C50C-407E-A947-70E740481C1C}">
+                <a14:useLocalDpi xmlns:a14="http://schemas.microsoft.com/office/drawing/2010/main" val="0"/>
+              </a:ext>
+            </a:extLst>
+          </a:blip>
+          <a:stretch>
+            <a:fillRect/>
+          </a:stretch>
+        </p:blipFill>
+        <p:spPr>
+          <a:xfrm>
+            <a:off x="24279802" y="35011618"/>
+            <a:ext cx="2434818" cy="2434818"/>
+          </a:xfrm>
+          <a:prstGeom prst="rect">
+            <a:avLst/>
+          </a:prstGeom>
+        </p:spPr>
+      </p:pic>
     </p:spTree>
     <p:extLst>
       <p:ext uri="{BB962C8B-B14F-4D97-AF65-F5344CB8AC3E}">
@@ -5783,13 +6039,6 @@
   <p:clrMapOvr>
     <a:masterClrMapping/>
   </p:clrMapOvr>
-  <p:timing>
-    <p:tnLst>
-      <p:par>
-        <p:cTn id="1" dur="indefinite" restart="never" nodeType="tmRoot"/>
-      </p:par>
-    </p:tnLst>
-  </p:timing>
 </p:sld>
 </file>
 
@@ -5826,14 +6075,14 @@
           <a:lstStyle/>
           <a:p>
             <a:r>
-              <a:rPr lang="pt-BR" dirty="0" smtClean="0"/>
+              <a:rPr lang="pt-BR" dirty="0"/>
               <a:t>Titel: Musterseite mit </a:t>
             </a:r>
             <a:br>
-              <a:rPr lang="pt-BR" dirty="0" smtClean="0"/>
+              <a:rPr lang="pt-BR" dirty="0"/>
             </a:br>
             <a:r>
-              <a:rPr lang="pt-BR" dirty="0" smtClean="0"/>
+              <a:rPr lang="pt-BR" dirty="0"/>
               <a:t>Bild und Aufzählung</a:t>
             </a:r>
             <a:endParaRPr lang="de-DE" dirty="0"/>
@@ -5861,123 +6110,123 @@
           <a:lstStyle/>
           <a:p>
             <a:r>
-              <a:rPr lang="de-DE" dirty="0" smtClean="0"/>
+              <a:rPr lang="de-DE" dirty="0"/>
               <a:t>Projektziel ist die Entwicklung eines elektrischen Antriebs für ein einsitziges Hochleistungssegelflugzeug (ASG 29). Gegenüber klassischen Applikationen elektrischer Antriebe besteht die Herausforderung darin, eine möglichst große Steigrate bei möglichst geringer Masse in einem sehr beschränkten Bauraum zu erreichen. Gleichzeitig sind die verschiedenen  Anforderungen und</a:t>
             </a:r>
           </a:p>
           <a:p>
-            <a:endParaRPr lang="de-DE" dirty="0" smtClean="0"/>
-          </a:p>
-          <a:p>
-            <a:endParaRPr lang="de-DE" dirty="0" smtClean="0"/>
-          </a:p>
-          <a:p>
-            <a:endParaRPr lang="de-DE" dirty="0" smtClean="0"/>
-          </a:p>
-          <a:p>
-            <a:endParaRPr lang="de-DE" dirty="0" smtClean="0"/>
-          </a:p>
-          <a:p>
-            <a:endParaRPr lang="de-DE" dirty="0" smtClean="0"/>
-          </a:p>
-          <a:p>
-            <a:endParaRPr lang="de-DE" dirty="0" smtClean="0"/>
-          </a:p>
-          <a:p>
-            <a:endParaRPr lang="de-DE" dirty="0" smtClean="0"/>
-          </a:p>
-          <a:p>
-            <a:endParaRPr lang="de-DE" dirty="0" smtClean="0"/>
-          </a:p>
-          <a:p>
-            <a:endParaRPr lang="de-DE" dirty="0" smtClean="0"/>
-          </a:p>
-          <a:p>
-            <a:r>
-              <a:rPr lang="de-DE" b="1" dirty="0" err="1" smtClean="0"/>
+            <a:endParaRPr lang="de-DE" dirty="0"/>
+          </a:p>
+          <a:p>
+            <a:endParaRPr lang="de-DE" dirty="0"/>
+          </a:p>
+          <a:p>
+            <a:endParaRPr lang="de-DE" dirty="0"/>
+          </a:p>
+          <a:p>
+            <a:endParaRPr lang="de-DE" dirty="0"/>
+          </a:p>
+          <a:p>
+            <a:endParaRPr lang="de-DE" dirty="0"/>
+          </a:p>
+          <a:p>
+            <a:endParaRPr lang="de-DE" dirty="0"/>
+          </a:p>
+          <a:p>
+            <a:endParaRPr lang="de-DE" dirty="0"/>
+          </a:p>
+          <a:p>
+            <a:endParaRPr lang="de-DE" dirty="0"/>
+          </a:p>
+          <a:p>
+            <a:endParaRPr lang="de-DE" dirty="0"/>
+          </a:p>
+          <a:p>
+            <a:r>
+              <a:rPr lang="de-DE" b="1" dirty="0" err="1"/>
               <a:t>Zwischenhead</a:t>
             </a:r>
-            <a:endParaRPr lang="de-DE" b="1" dirty="0" smtClean="0"/>
-          </a:p>
-          <a:p>
-            <a:r>
-              <a:rPr lang="de-DE" dirty="0" smtClean="0"/>
+            <a:endParaRPr lang="de-DE" b="1" dirty="0"/>
+          </a:p>
+          <a:p>
+            <a:r>
+              <a:rPr lang="de-DE" dirty="0"/>
               <a:t>Temperaturbereich) Anforderungen und Randbedingungen zu beachten, die sich bei dem Einbau in ein manntragendes Luftfahrzeug ergeben (Sicherheitsanforderungen, Zuverlässigkeit, großer Temperaturbereich) zu beachten, die sich bei dem Einbau in ein manntragendes Luftfahrzeug ergeben (Sicherheitsanforderungen, Zuverlässigkeit, großer Temperaturbereich) Anforderungen und Randbedingungen zu die sich bei dem Einbau in ein manntragendes Luftfahrzeug ergeben</a:t>
             </a:r>
           </a:p>
           <a:p>
-            <a:endParaRPr lang="de-DE" dirty="0" smtClean="0"/>
-          </a:p>
-          <a:p>
-            <a:r>
-              <a:rPr lang="de-DE" b="1" dirty="0" err="1" smtClean="0"/>
+            <a:endParaRPr lang="de-DE" dirty="0"/>
+          </a:p>
+          <a:p>
+            <a:r>
+              <a:rPr lang="de-DE" b="1" dirty="0" err="1"/>
               <a:t>Zwischenhead</a:t>
             </a:r>
-            <a:endParaRPr lang="de-DE" b="1" dirty="0" smtClean="0"/>
-          </a:p>
-          <a:p>
-            <a:r>
-              <a:rPr lang="de-DE" dirty="0" smtClean="0"/>
+            <a:endParaRPr lang="de-DE" b="1" dirty="0"/>
+          </a:p>
+          <a:p>
+            <a:r>
+              <a:rPr lang="de-DE" dirty="0"/>
               <a:t>Temperaturbereich) Anforderungen und Randbedingungen zu beachten, die sich bei dem Einbau in ein manntragendes Luftfahrzeug ergeben (Sicherheitsanforderungen, Zuverlässigkeit, großer Temperaturbereich, ...) zu beachten, die sich bei dem Einbau in ein manntragendes Luftfahrzeug ergeben (Sicherheitsanforderungen, Zuverlässigkeit, großer</a:t>
             </a:r>
           </a:p>
           <a:p>
-            <a:endParaRPr lang="de-DE" dirty="0" smtClean="0"/>
-          </a:p>
-          <a:p>
-            <a:r>
-              <a:rPr lang="de-DE" b="1" dirty="0" err="1" smtClean="0"/>
+            <a:endParaRPr lang="de-DE" dirty="0"/>
+          </a:p>
+          <a:p>
+            <a:r>
+              <a:rPr lang="de-DE" b="1" dirty="0" err="1"/>
               <a:t>Zwischenhead</a:t>
             </a:r>
-            <a:endParaRPr lang="de-DE" b="1" dirty="0" smtClean="0"/>
-          </a:p>
-          <a:p>
-            <a:r>
-              <a:rPr lang="de-DE" dirty="0" smtClean="0"/>
+            <a:endParaRPr lang="de-DE" b="1" dirty="0"/>
+          </a:p>
+          <a:p>
+            <a:r>
+              <a:rPr lang="de-DE" dirty="0"/>
               <a:t>zu beachten, die sich bei dem Einbau in ein manntragendes Luftfahrzeug ergeben (Sicherheitsanforderungen, Zuverlässigkeit, großer Temperaturbereich, ...) Anforderungen und Randbedingungen zu beachten, die sich bei dem Einbau in ein zu beachten, die sich bei dem Einbau in ein</a:t>
             </a:r>
           </a:p>
           <a:p>
-            <a:endParaRPr lang="de-DE" dirty="0" smtClean="0"/>
-          </a:p>
-          <a:p>
-            <a:r>
-              <a:rPr lang="de-DE" b="1" dirty="0" err="1" smtClean="0"/>
+            <a:endParaRPr lang="de-DE" dirty="0"/>
+          </a:p>
+          <a:p>
+            <a:r>
+              <a:rPr lang="de-DE" b="1" dirty="0" err="1"/>
               <a:t>Zwischenhead</a:t>
             </a:r>
-            <a:endParaRPr lang="de-DE" b="1" dirty="0" smtClean="0"/>
-          </a:p>
-          <a:p>
-            <a:r>
-              <a:rPr lang="de-DE" dirty="0" smtClean="0"/>
+            <a:endParaRPr lang="de-DE" b="1" dirty="0"/>
+          </a:p>
+          <a:p>
+            <a:r>
+              <a:rPr lang="de-DE" dirty="0"/>
               <a:t>zu beachten, die sich bei dem Einbau in ein manntragendes Luftfahrzeug ergeben (Sicherheitsanforderungen, Zuverlässigkeit, großer Temperaturbereich, ...) Anforderungen und Randbedingungen zu beachten</a:t>
             </a:r>
           </a:p>
           <a:p>
             <a:pPr lvl="1"/>
             <a:r>
-              <a:rPr lang="de-DE" dirty="0" smtClean="0"/>
+              <a:rPr lang="de-DE" dirty="0"/>
               <a:t>Zweite Textebene: Aufzählungszeichen und Einzug ab der zweiten Zeile:</a:t>
             </a:r>
             <a:br>
-              <a:rPr lang="de-DE" dirty="0" smtClean="0"/>
+              <a:rPr lang="de-DE" dirty="0"/>
             </a:br>
             <a:r>
-              <a:rPr lang="de-DE" dirty="0" smtClean="0"/>
+              <a:rPr lang="de-DE" dirty="0"/>
               <a:t>zu der zweiten Textebene gelangt man durch Klick auf „Einzug vergrößern“. </a:t>
             </a:r>
           </a:p>
           <a:p>
             <a:pPr lvl="1"/>
             <a:r>
-              <a:rPr lang="de-DE" dirty="0" smtClean="0"/>
+              <a:rPr lang="de-DE" dirty="0"/>
               <a:t>Nur über diese Funktion ist das richtige Aufzählungszeichen + Abstand gewährleistet </a:t>
             </a:r>
           </a:p>
           <a:p>
             <a:pPr lvl="1"/>
             <a:r>
-              <a:rPr lang="de-DE" dirty="0" smtClean="0"/>
+              <a:rPr lang="de-DE" dirty="0"/>
               <a:t>Die Linien zwischen den Aufzählungszeichen werden manuell gesetzt</a:t>
             </a:r>
           </a:p>
@@ -5999,10 +6248,9 @@
           <a:lstStyle/>
           <a:p>
             <a:r>
-              <a:rPr lang="de-DE" dirty="0" smtClean="0"/>
+              <a:rPr lang="de-DE" dirty="0"/>
               <a:t>Name, Studiengang</a:t>
             </a:r>
-            <a:endParaRPr lang="de-DE" dirty="0"/>
           </a:p>
         </p:txBody>
       </p:sp>
@@ -6338,7 +6586,7 @@
           <a:lstStyle/>
           <a:p>
             <a:r>
-              <a:rPr lang="de-DE" smtClean="0"/>
+              <a:rPr lang="de-DE"/>
               <a:t>Bildunterschrift</a:t>
             </a:r>
             <a:endParaRPr lang="de-DE" dirty="0"/>
@@ -6990,7 +7238,7 @@
             <a:lstStyle/>
             <a:p>
               <a:r>
-                <a:rPr lang="de-DE" sz="4100" dirty="0" smtClean="0">
+                <a:rPr lang="de-DE" sz="4100" dirty="0">
                   <a:solidFill>
                     <a:schemeClr val="bg1"/>
                   </a:solidFill>
@@ -6998,12 +7246,6 @@
                 </a:rPr>
                 <a:t>Kooperative Partner</a:t>
               </a:r>
-              <a:endParaRPr lang="de-DE" sz="4100" dirty="0">
-                <a:solidFill>
-                  <a:schemeClr val="bg1"/>
-                </a:solidFill>
-                <a:latin typeface="Georgia" panose="02040502050405020303" pitchFamily="18" charset="0"/>
-              </a:endParaRPr>
             </a:p>
           </p:txBody>
         </p:sp>
@@ -7036,7 +7278,7 @@
               </a:lnSpc>
             </a:pPr>
             <a:r>
-              <a:rPr lang="de-DE" sz="2600" b="0" dirty="0" smtClean="0">
+              <a:rPr lang="de-DE" sz="2600" b="0" dirty="0">
                 <a:solidFill>
                   <a:srgbClr val="FFFFFF"/>
                 </a:solidFill>
@@ -7053,7 +7295,7 @@
               </a:lnSpc>
             </a:pPr>
             <a:r>
-              <a:rPr lang="de-DE" sz="2600" b="0" dirty="0" smtClean="0">
+              <a:rPr lang="de-DE" sz="2600" b="0" dirty="0">
                 <a:solidFill>
                   <a:srgbClr val="FFFFFF"/>
                 </a:solidFill>
@@ -7063,7 +7305,7 @@
               <a:t>+49 711</a:t>
             </a:r>
             <a:r>
-              <a:rPr lang="de-DE" sz="2600" b="0" baseline="0" dirty="0" smtClean="0">
+              <a:rPr lang="de-DE" sz="2600" b="0" baseline="0" dirty="0">
                 <a:solidFill>
                   <a:srgbClr val="FFFFFF"/>
                 </a:solidFill>
@@ -7080,7 +7322,7 @@
               </a:lnSpc>
             </a:pPr>
             <a:r>
-              <a:rPr lang="de-DE" sz="2600" b="0" baseline="0" dirty="0" smtClean="0">
+              <a:rPr lang="de-DE" sz="2600" b="0" baseline="0" dirty="0">
                 <a:solidFill>
                   <a:srgbClr val="FFFFFF"/>
                 </a:solidFill>
@@ -7172,13 +7414,6 @@
   <p:clrMapOvr>
     <a:masterClrMapping/>
   </p:clrMapOvr>
-  <p:timing>
-    <p:tnLst>
-      <p:par>
-        <p:cTn id="1" dur="indefinite" restart="never" nodeType="tmRoot"/>
-      </p:par>
-    </p:tnLst>
-  </p:timing>
 </p:sld>
 </file>
 
@@ -7215,14 +7450,14 @@
           <a:lstStyle/>
           <a:p>
             <a:r>
-              <a:rPr lang="pt-BR" smtClean="0"/>
+              <a:rPr lang="pt-BR"/>
               <a:t>Titel: Musterseite mit Bild, </a:t>
             </a:r>
             <a:br>
-              <a:rPr lang="pt-BR" smtClean="0"/>
+              <a:rPr lang="pt-BR"/>
             </a:br>
             <a:r>
-              <a:rPr lang="pt-BR" smtClean="0"/>
+              <a:rPr lang="pt-BR"/>
               <a:t>Aufzählung und Tabelle</a:t>
             </a:r>
             <a:endParaRPr lang="de-DE" dirty="0"/>
@@ -7251,121 +7486,113 @@
           <a:p>
             <a:r>
               <a:rPr lang="de-DE" dirty="0"/>
-              <a:t>Projektziel ist die Entwicklung eines elektrischen Antriebs für ein einsitziges Hochleistungssegelflugzeug (ASG 29). Gegenüber klassischen Applikationen elektrischer Antriebe besteht die Herausforderung darin, eine möglichst große Steigrate bei möglichst geringer Masse in einem sehr beschränkten Bauraum zu erreichen. Gleichzeitig sind die </a:t>
-            </a:r>
-            <a:r>
-              <a:rPr lang="de-DE" dirty="0" smtClean="0"/>
-              <a:t>verschiedenen  </a:t>
-            </a:r>
+              <a:t>Projektziel ist die Entwicklung eines elektrischen Antriebs für ein einsitziges Hochleistungssegelflugzeug (ASG 29). Gegenüber klassischen Applikationen elektrischer Antriebe besteht die Herausforderung darin, eine möglichst große Steigrate bei möglichst geringer Masse in einem sehr beschränkten Bauraum zu erreichen. Gleichzeitig sind die verschiedenen  Anforderungen und</a:t>
+            </a:r>
+          </a:p>
+          <a:p>
+            <a:endParaRPr lang="de-DE" dirty="0"/>
+          </a:p>
+          <a:p>
+            <a:endParaRPr lang="de-DE" dirty="0"/>
+          </a:p>
+          <a:p>
+            <a:endParaRPr lang="de-DE" dirty="0"/>
+          </a:p>
+          <a:p>
+            <a:endParaRPr lang="de-DE" dirty="0"/>
+          </a:p>
+          <a:p>
+            <a:endParaRPr lang="de-DE" dirty="0"/>
+          </a:p>
+          <a:p>
+            <a:endParaRPr lang="de-DE" dirty="0"/>
+          </a:p>
+          <a:p>
+            <a:endParaRPr lang="de-DE" dirty="0"/>
+          </a:p>
+          <a:p>
+            <a:endParaRPr lang="de-DE" dirty="0"/>
+          </a:p>
+          <a:p>
+            <a:endParaRPr lang="de-DE" dirty="0"/>
+          </a:p>
+          <a:p>
+            <a:r>
+              <a:rPr lang="de-DE" b="1" dirty="0" err="1"/>
+              <a:t>Zwischenhead</a:t>
+            </a:r>
+            <a:endParaRPr lang="de-DE" b="1" dirty="0"/>
+          </a:p>
+          <a:p>
             <a:r>
               <a:rPr lang="de-DE" dirty="0"/>
-              <a:t>Anforderungen und</a:t>
-            </a:r>
-          </a:p>
-          <a:p>
-            <a:endParaRPr lang="de-DE" dirty="0" smtClean="0"/>
-          </a:p>
-          <a:p>
-            <a:endParaRPr lang="de-DE" dirty="0" smtClean="0"/>
-          </a:p>
-          <a:p>
-            <a:endParaRPr lang="de-DE" dirty="0" smtClean="0"/>
-          </a:p>
-          <a:p>
-            <a:endParaRPr lang="de-DE" dirty="0" smtClean="0"/>
-          </a:p>
-          <a:p>
-            <a:endParaRPr lang="de-DE" dirty="0" smtClean="0"/>
-          </a:p>
-          <a:p>
-            <a:endParaRPr lang="de-DE" dirty="0" smtClean="0"/>
-          </a:p>
-          <a:p>
-            <a:endParaRPr lang="de-DE" dirty="0" smtClean="0"/>
-          </a:p>
-          <a:p>
-            <a:endParaRPr lang="de-DE" dirty="0" smtClean="0"/>
-          </a:p>
-          <a:p>
-            <a:endParaRPr lang="de-DE" dirty="0" smtClean="0"/>
-          </a:p>
-          <a:p>
-            <a:r>
-              <a:rPr lang="de-DE" b="1" dirty="0" err="1" smtClean="0"/>
+              <a:t>Temperaturbereich) Anforderungen und Randbedingungen zu beachten, die sich bei dem Einbau in ein manntragendes Luftfahrzeug ergeben.</a:t>
+            </a:r>
+          </a:p>
+          <a:p>
+            <a:endParaRPr lang="de-DE" dirty="0"/>
+          </a:p>
+          <a:p>
+            <a:r>
+              <a:rPr lang="de-DE" b="1" dirty="0"/>
+              <a:t>Tabelle</a:t>
+            </a:r>
+          </a:p>
+          <a:p>
+            <a:endParaRPr lang="de-DE" dirty="0"/>
+          </a:p>
+          <a:p>
+            <a:endParaRPr lang="de-DE" dirty="0"/>
+          </a:p>
+          <a:p>
+            <a:endParaRPr lang="de-DE" dirty="0"/>
+          </a:p>
+          <a:p>
+            <a:endParaRPr lang="de-DE" dirty="0"/>
+          </a:p>
+          <a:p>
+            <a:endParaRPr lang="de-DE" dirty="0"/>
+          </a:p>
+          <a:p>
+            <a:endParaRPr lang="de-DE" dirty="0"/>
+          </a:p>
+          <a:p>
+            <a:endParaRPr lang="de-DE" dirty="0"/>
+          </a:p>
+          <a:p>
+            <a:endParaRPr lang="de-DE" dirty="0"/>
+          </a:p>
+          <a:p>
+            <a:endParaRPr lang="de-DE" dirty="0"/>
+          </a:p>
+          <a:p>
+            <a:endParaRPr lang="de-DE" dirty="0"/>
+          </a:p>
+          <a:p>
+            <a:endParaRPr lang="de-DE" dirty="0"/>
+          </a:p>
+          <a:p>
+            <a:endParaRPr lang="de-DE" dirty="0"/>
+          </a:p>
+          <a:p>
+            <a:endParaRPr lang="de-DE" dirty="0"/>
+          </a:p>
+          <a:p>
+            <a:endParaRPr lang="de-DE" dirty="0"/>
+          </a:p>
+          <a:p>
+            <a:endParaRPr lang="de-DE" dirty="0"/>
+          </a:p>
+          <a:p>
+            <a:r>
+              <a:rPr lang="de-DE" b="1" dirty="0" err="1"/>
               <a:t>Zwischenhead</a:t>
             </a:r>
-            <a:endParaRPr lang="de-DE" b="1" dirty="0" smtClean="0"/>
-          </a:p>
-          <a:p>
-            <a:r>
-              <a:rPr lang="de-DE" dirty="0" smtClean="0"/>
-              <a:t>Temperaturbereich) Anforderungen und Randbedingungen zu beachten, die sich bei dem Einbau in ein manntragendes Luftfahrzeug ergeben.</a:t>
-            </a:r>
-          </a:p>
-          <a:p>
-            <a:endParaRPr lang="de-DE" dirty="0" smtClean="0"/>
-          </a:p>
-          <a:p>
-            <a:r>
-              <a:rPr lang="de-DE" b="1" dirty="0" smtClean="0"/>
-              <a:t>Tabelle</a:t>
-            </a:r>
-          </a:p>
-          <a:p>
-            <a:endParaRPr lang="de-DE" dirty="0" smtClean="0"/>
-          </a:p>
-          <a:p>
-            <a:endParaRPr lang="de-DE" dirty="0" smtClean="0"/>
-          </a:p>
-          <a:p>
-            <a:endParaRPr lang="de-DE" dirty="0" smtClean="0"/>
-          </a:p>
-          <a:p>
-            <a:endParaRPr lang="de-DE" dirty="0" smtClean="0"/>
-          </a:p>
-          <a:p>
-            <a:endParaRPr lang="de-DE" dirty="0" smtClean="0"/>
-          </a:p>
-          <a:p>
-            <a:endParaRPr lang="de-DE" dirty="0" smtClean="0"/>
-          </a:p>
-          <a:p>
-            <a:endParaRPr lang="de-DE" dirty="0" smtClean="0"/>
-          </a:p>
-          <a:p>
-            <a:endParaRPr lang="de-DE" dirty="0" smtClean="0"/>
-          </a:p>
-          <a:p>
-            <a:endParaRPr lang="de-DE" dirty="0" smtClean="0"/>
-          </a:p>
-          <a:p>
-            <a:endParaRPr lang="de-DE" dirty="0" smtClean="0"/>
-          </a:p>
-          <a:p>
-            <a:endParaRPr lang="de-DE" dirty="0" smtClean="0"/>
-          </a:p>
-          <a:p>
-            <a:endParaRPr lang="de-DE" dirty="0" smtClean="0"/>
-          </a:p>
-          <a:p>
-            <a:endParaRPr lang="de-DE" dirty="0" smtClean="0"/>
-          </a:p>
-          <a:p>
-            <a:endParaRPr lang="de-DE" dirty="0" smtClean="0"/>
-          </a:p>
-          <a:p>
-            <a:endParaRPr lang="de-DE" dirty="0" smtClean="0"/>
-          </a:p>
-          <a:p>
-            <a:r>
-              <a:rPr lang="de-DE" b="1" dirty="0" err="1" smtClean="0"/>
-              <a:t>Zwischenhead</a:t>
-            </a:r>
-            <a:endParaRPr lang="de-DE" b="1" dirty="0" smtClean="0"/>
-          </a:p>
-          <a:p>
-            <a:r>
-              <a:rPr lang="de-DE" dirty="0" smtClean="0"/>
+            <a:endParaRPr lang="de-DE" b="1" dirty="0"/>
+          </a:p>
+          <a:p>
+            <a:r>
+              <a:rPr lang="de-DE" dirty="0"/>
               <a:t>zu beachten, die sich bei dem Einbau in ein manntragendes Luftfahrzeug ergeben (Sicherheitsanforderungen, Zuverlässigkeit, großer Temperaturbereich, ...) Anforderungen und Randbedingungen zu beachten</a:t>
             </a:r>
           </a:p>
@@ -7398,7 +7625,7 @@
             </a:r>
           </a:p>
           <a:p>
-            <a:endParaRPr lang="de-DE" dirty="0" smtClean="0"/>
+            <a:endParaRPr lang="de-DE" dirty="0"/>
           </a:p>
         </p:txBody>
       </p:sp>
@@ -7418,7 +7645,7 @@
           <a:lstStyle/>
           <a:p>
             <a:r>
-              <a:rPr lang="de-DE" smtClean="0"/>
+              <a:rPr lang="de-DE"/>
               <a:t>Name, Studiengang</a:t>
             </a:r>
             <a:endParaRPr lang="de-DE" dirty="0"/>
@@ -7752,7 +7979,7 @@
           <a:lstStyle/>
           <a:p>
             <a:r>
-              <a:rPr lang="de-DE" smtClean="0"/>
+              <a:rPr lang="de-DE"/>
               <a:t>Bildunterschrift</a:t>
             </a:r>
             <a:endParaRPr lang="de-DE" dirty="0"/>
@@ -7877,17 +8104,83 @@
                 <a:tableStyleId>{5C22544A-7EE6-4342-B048-85BDC9FD1C3A}</a:tableStyleId>
               </a:tblPr>
               <a:tblGrid>
-                <a:gridCol w="212632"/>
-                <a:gridCol w="4068556"/>
-                <a:gridCol w="911289"/>
-                <a:gridCol w="1122361"/>
-                <a:gridCol w="1122361"/>
-                <a:gridCol w="420885"/>
-                <a:gridCol w="212632"/>
-                <a:gridCol w="4068556"/>
-                <a:gridCol w="1122361"/>
-                <a:gridCol w="1122361"/>
-                <a:gridCol w="1122361"/>
+                <a:gridCol w="212632">
+                  <a:extLst>
+                    <a:ext uri="{9D8B030D-6E8A-4147-A177-3AD203B41FA5}">
+                      <a16:colId xmlns:a16="http://schemas.microsoft.com/office/drawing/2014/main" val="20000"/>
+                    </a:ext>
+                  </a:extLst>
+                </a:gridCol>
+                <a:gridCol w="4068556">
+                  <a:extLst>
+                    <a:ext uri="{9D8B030D-6E8A-4147-A177-3AD203B41FA5}">
+                      <a16:colId xmlns:a16="http://schemas.microsoft.com/office/drawing/2014/main" val="20001"/>
+                    </a:ext>
+                  </a:extLst>
+                </a:gridCol>
+                <a:gridCol w="911289">
+                  <a:extLst>
+                    <a:ext uri="{9D8B030D-6E8A-4147-A177-3AD203B41FA5}">
+                      <a16:colId xmlns:a16="http://schemas.microsoft.com/office/drawing/2014/main" val="20002"/>
+                    </a:ext>
+                  </a:extLst>
+                </a:gridCol>
+                <a:gridCol w="1122361">
+                  <a:extLst>
+                    <a:ext uri="{9D8B030D-6E8A-4147-A177-3AD203B41FA5}">
+                      <a16:colId xmlns:a16="http://schemas.microsoft.com/office/drawing/2014/main" val="20003"/>
+                    </a:ext>
+                  </a:extLst>
+                </a:gridCol>
+                <a:gridCol w="1122361">
+                  <a:extLst>
+                    <a:ext uri="{9D8B030D-6E8A-4147-A177-3AD203B41FA5}">
+                      <a16:colId xmlns:a16="http://schemas.microsoft.com/office/drawing/2014/main" val="20004"/>
+                    </a:ext>
+                  </a:extLst>
+                </a:gridCol>
+                <a:gridCol w="420885">
+                  <a:extLst>
+                    <a:ext uri="{9D8B030D-6E8A-4147-A177-3AD203B41FA5}">
+                      <a16:colId xmlns:a16="http://schemas.microsoft.com/office/drawing/2014/main" val="20005"/>
+                    </a:ext>
+                  </a:extLst>
+                </a:gridCol>
+                <a:gridCol w="212632">
+                  <a:extLst>
+                    <a:ext uri="{9D8B030D-6E8A-4147-A177-3AD203B41FA5}">
+                      <a16:colId xmlns:a16="http://schemas.microsoft.com/office/drawing/2014/main" val="20006"/>
+                    </a:ext>
+                  </a:extLst>
+                </a:gridCol>
+                <a:gridCol w="4068556">
+                  <a:extLst>
+                    <a:ext uri="{9D8B030D-6E8A-4147-A177-3AD203B41FA5}">
+                      <a16:colId xmlns:a16="http://schemas.microsoft.com/office/drawing/2014/main" val="20007"/>
+                    </a:ext>
+                  </a:extLst>
+                </a:gridCol>
+                <a:gridCol w="1122361">
+                  <a:extLst>
+                    <a:ext uri="{9D8B030D-6E8A-4147-A177-3AD203B41FA5}">
+                      <a16:colId xmlns:a16="http://schemas.microsoft.com/office/drawing/2014/main" val="20008"/>
+                    </a:ext>
+                  </a:extLst>
+                </a:gridCol>
+                <a:gridCol w="1122361">
+                  <a:extLst>
+                    <a:ext uri="{9D8B030D-6E8A-4147-A177-3AD203B41FA5}">
+                      <a16:colId xmlns:a16="http://schemas.microsoft.com/office/drawing/2014/main" val="20009"/>
+                    </a:ext>
+                  </a:extLst>
+                </a:gridCol>
+                <a:gridCol w="1122361">
+                  <a:extLst>
+                    <a:ext uri="{9D8B030D-6E8A-4147-A177-3AD203B41FA5}">
+                      <a16:colId xmlns:a16="http://schemas.microsoft.com/office/drawing/2014/main" val="20010"/>
+                    </a:ext>
+                  </a:extLst>
+                </a:gridCol>
               </a:tblGrid>
               <a:tr h="870249">
                 <a:tc>
@@ -7896,7 +8189,7 @@
                     <a:lstStyle/>
                     <a:p>
                       <a:r>
-                        <a:rPr lang="de-DE" sz="2100" b="0" dirty="0" smtClean="0">
+                        <a:rPr lang="de-DE" sz="2100" b="0" dirty="0">
                           <a:solidFill>
                             <a:schemeClr val="accent1"/>
                           </a:solidFill>
@@ -7905,13 +8198,6 @@
                         </a:rPr>
                         <a:t>»</a:t>
                       </a:r>
-                      <a:endParaRPr lang="de-DE" sz="2100" b="0" dirty="0">
-                        <a:solidFill>
-                          <a:schemeClr val="accent1"/>
-                        </a:solidFill>
-                        <a:latin typeface="Arial" panose="020B0604020202020204" pitchFamily="34" charset="0"/>
-                        <a:cs typeface="Arial" panose="020B0604020202020204" pitchFamily="34" charset="0"/>
-                      </a:endParaRPr>
                     </a:p>
                   </a:txBody>
                   <a:tcPr marL="0" marR="92142" marT="47588" marB="47588">
@@ -7962,7 +8248,7 @@
                     <a:lstStyle/>
                     <a:p>
                       <a:r>
-                        <a:rPr lang="de-DE" sz="2100" b="0" dirty="0" smtClean="0">
+                        <a:rPr lang="de-DE" sz="2100" b="0" dirty="0">
                           <a:solidFill>
                             <a:schemeClr val="accent1"/>
                           </a:solidFill>
@@ -7974,7 +8260,7 @@
                     </a:p>
                     <a:p>
                       <a:r>
-                        <a:rPr lang="de-DE" sz="2100" b="0" dirty="0" smtClean="0">
+                        <a:rPr lang="de-DE" sz="2100" b="0" dirty="0">
                           <a:solidFill>
                             <a:schemeClr val="tx1"/>
                           </a:solidFill>
@@ -7983,13 +8269,6 @@
                         </a:rPr>
                         <a:t>potential in Mm3</a:t>
                       </a:r>
-                      <a:endParaRPr lang="de-DE" sz="2100" b="0" dirty="0">
-                        <a:solidFill>
-                          <a:schemeClr val="tx1"/>
-                        </a:solidFill>
-                        <a:latin typeface="Arial" panose="020B0604020202020204" pitchFamily="34" charset="0"/>
-                        <a:cs typeface="Arial" panose="020B0604020202020204" pitchFamily="34" charset="0"/>
-                      </a:endParaRPr>
                     </a:p>
                   </a:txBody>
                   <a:tcPr marL="92142" marR="92142" marT="47588" marB="109819" anchor="b">
@@ -8041,7 +8320,7 @@
                     <a:p>
                       <a:pPr algn="r"/>
                       <a:r>
-                        <a:rPr lang="de-DE" sz="2100" b="0" dirty="0" smtClean="0">
+                        <a:rPr lang="de-DE" sz="2100" b="0" dirty="0">
                           <a:solidFill>
                             <a:schemeClr val="tx1"/>
                           </a:solidFill>
@@ -8050,13 +8329,6 @@
                         </a:rPr>
                         <a:t>2010</a:t>
                       </a:r>
-                      <a:endParaRPr lang="de-DE" sz="2100" b="0" dirty="0">
-                        <a:solidFill>
-                          <a:schemeClr val="tx1"/>
-                        </a:solidFill>
-                        <a:latin typeface="Arial" panose="020B0604020202020204" pitchFamily="34" charset="0"/>
-                        <a:cs typeface="Arial" panose="020B0604020202020204" pitchFamily="34" charset="0"/>
-                      </a:endParaRPr>
                     </a:p>
                   </a:txBody>
                   <a:tcPr marL="92142" marR="92142" marT="47588" marB="109819" anchor="b">
@@ -8108,7 +8380,7 @@
                     <a:p>
                       <a:pPr algn="r"/>
                       <a:r>
-                        <a:rPr lang="de-DE" sz="2100" b="0" dirty="0" smtClean="0">
+                        <a:rPr lang="de-DE" sz="2100" b="0" dirty="0">
                           <a:solidFill>
                             <a:schemeClr val="tx1"/>
                           </a:solidFill>
@@ -8117,13 +8389,6 @@
                         </a:rPr>
                         <a:t>2020</a:t>
                       </a:r>
-                      <a:endParaRPr lang="de-DE" sz="2100" b="0" dirty="0">
-                        <a:solidFill>
-                          <a:schemeClr val="tx1"/>
-                        </a:solidFill>
-                        <a:latin typeface="Arial" panose="020B0604020202020204" pitchFamily="34" charset="0"/>
-                        <a:cs typeface="Arial" panose="020B0604020202020204" pitchFamily="34" charset="0"/>
-                      </a:endParaRPr>
                     </a:p>
                   </a:txBody>
                   <a:tcPr marL="92142" marR="92142" marT="47588" marB="109819" anchor="b">
@@ -8175,7 +8440,7 @@
                     <a:p>
                       <a:pPr algn="r"/>
                       <a:r>
-                        <a:rPr lang="de-DE" sz="2100" b="0" dirty="0" smtClean="0">
+                        <a:rPr lang="de-DE" sz="2100" b="0" dirty="0">
                           <a:solidFill>
                             <a:schemeClr val="tx1"/>
                           </a:solidFill>
@@ -8184,13 +8449,6 @@
                         </a:rPr>
                         <a:t>2030</a:t>
                       </a:r>
-                      <a:endParaRPr lang="de-DE" sz="2100" b="0" dirty="0">
-                        <a:solidFill>
-                          <a:schemeClr val="tx1"/>
-                        </a:solidFill>
-                        <a:latin typeface="Arial" panose="020B0604020202020204" pitchFamily="34" charset="0"/>
-                        <a:cs typeface="Arial" panose="020B0604020202020204" pitchFamily="34" charset="0"/>
-                      </a:endParaRPr>
                     </a:p>
                   </a:txBody>
                   <a:tcPr marL="92142" marR="92142" marT="47588" marB="109819" anchor="b">
@@ -8316,7 +8574,7 @@
                         <a:defRPr/>
                       </a:pPr>
                       <a:r>
-                        <a:rPr lang="de-DE" sz="2100" b="0" dirty="0" smtClean="0">
+                        <a:rPr lang="de-DE" sz="2100" b="0" dirty="0">
                           <a:solidFill>
                             <a:schemeClr val="accent1"/>
                           </a:solidFill>
@@ -8384,7 +8642,7 @@
                     <a:lstStyle/>
                     <a:p>
                       <a:r>
-                        <a:rPr lang="de-DE" sz="2100" b="0" i="0" u="none" strike="noStrike" kern="1200" baseline="0" dirty="0" smtClean="0">
+                        <a:rPr lang="de-DE" sz="2100" b="0" i="0" u="none" strike="noStrike" kern="1200" baseline="0" dirty="0">
                           <a:solidFill>
                             <a:schemeClr val="accent1"/>
                           </a:solidFill>
@@ -8397,7 +8655,7 @@
                     </a:p>
                     <a:p>
                       <a:r>
-                        <a:rPr lang="de-DE" sz="2100" b="0" i="0" u="none" strike="noStrike" kern="1200" baseline="0" dirty="0" err="1" smtClean="0">
+                        <a:rPr lang="de-DE" sz="2100" b="0" i="0" u="none" strike="noStrike" kern="1200" baseline="0" dirty="0" err="1">
                           <a:solidFill>
                             <a:schemeClr val="tx1"/>
                           </a:solidFill>
@@ -8408,7 +8666,7 @@
                         <a:t>demand</a:t>
                       </a:r>
                       <a:r>
-                        <a:rPr lang="de-DE" sz="2100" b="0" i="0" u="none" strike="noStrike" kern="1200" baseline="0" dirty="0" smtClean="0">
+                        <a:rPr lang="de-DE" sz="2100" b="0" i="0" u="none" strike="noStrike" kern="1200" baseline="0" dirty="0">
                           <a:solidFill>
                             <a:schemeClr val="tx1"/>
                           </a:solidFill>
@@ -8476,7 +8734,7 @@
                     <a:p>
                       <a:pPr algn="r"/>
                       <a:r>
-                        <a:rPr lang="de-DE" sz="2100" b="0" dirty="0" smtClean="0">
+                        <a:rPr lang="de-DE" sz="2100" b="0" dirty="0">
                           <a:solidFill>
                             <a:schemeClr val="tx1"/>
                           </a:solidFill>
@@ -8485,13 +8743,6 @@
                         </a:rPr>
                         <a:t>2010</a:t>
                       </a:r>
-                      <a:endParaRPr lang="de-DE" sz="2100" b="0" dirty="0">
-                        <a:solidFill>
-                          <a:schemeClr val="tx1"/>
-                        </a:solidFill>
-                        <a:latin typeface="Arial" panose="020B0604020202020204" pitchFamily="34" charset="0"/>
-                        <a:cs typeface="Arial" panose="020B0604020202020204" pitchFamily="34" charset="0"/>
-                      </a:endParaRPr>
                     </a:p>
                   </a:txBody>
                   <a:tcPr marL="92142" marR="92142" marT="47588" marB="109819" anchor="b">
@@ -8543,7 +8794,7 @@
                     <a:p>
                       <a:pPr algn="r"/>
                       <a:r>
-                        <a:rPr lang="de-DE" sz="2100" b="0" dirty="0" smtClean="0">
+                        <a:rPr lang="de-DE" sz="2100" b="0" dirty="0">
                           <a:solidFill>
                             <a:schemeClr val="tx1"/>
                           </a:solidFill>
@@ -8552,13 +8803,6 @@
                         </a:rPr>
                         <a:t>2020</a:t>
                       </a:r>
-                      <a:endParaRPr lang="de-DE" sz="2100" b="0" dirty="0">
-                        <a:solidFill>
-                          <a:schemeClr val="tx1"/>
-                        </a:solidFill>
-                        <a:latin typeface="Arial" panose="020B0604020202020204" pitchFamily="34" charset="0"/>
-                        <a:cs typeface="Arial" panose="020B0604020202020204" pitchFamily="34" charset="0"/>
-                      </a:endParaRPr>
                     </a:p>
                   </a:txBody>
                   <a:tcPr marL="92142" marR="92142" marT="47588" marB="109819" anchor="b">
@@ -8610,7 +8854,7 @@
                     <a:p>
                       <a:pPr algn="r"/>
                       <a:r>
-                        <a:rPr lang="de-DE" sz="2100" b="0" dirty="0" smtClean="0">
+                        <a:rPr lang="de-DE" sz="2100" b="0" dirty="0">
                           <a:solidFill>
                             <a:schemeClr val="tx1"/>
                           </a:solidFill>
@@ -8619,13 +8863,6 @@
                         </a:rPr>
                         <a:t>2030</a:t>
                       </a:r>
-                      <a:endParaRPr lang="de-DE" sz="2100" b="0" dirty="0">
-                        <a:solidFill>
-                          <a:schemeClr val="tx1"/>
-                        </a:solidFill>
-                        <a:latin typeface="Arial" panose="020B0604020202020204" pitchFamily="34" charset="0"/>
-                        <a:cs typeface="Arial" panose="020B0604020202020204" pitchFamily="34" charset="0"/>
-                      </a:endParaRPr>
                     </a:p>
                   </a:txBody>
                   <a:tcPr marL="92142" marR="92142" marT="47588" marB="109819" anchor="b">
@@ -8672,6 +8909,11 @@
                     <a:noFill/>
                   </a:tcPr>
                 </a:tc>
+                <a:extLst>
+                  <a:ext uri="{0D108BD9-81ED-4DB2-BD59-A6C34878D82A}">
+                    <a16:rowId xmlns:a16="http://schemas.microsoft.com/office/drawing/2014/main" val="10000"/>
+                  </a:ext>
+                </a:extLst>
               </a:tr>
               <a:tr h="512486">
                 <a:tc>
@@ -8734,7 +8976,7 @@
                     <a:lstStyle/>
                     <a:p>
                       <a:r>
-                        <a:rPr lang="de-DE" sz="2100" b="0" i="0" u="none" strike="noStrike" kern="1200" baseline="0" dirty="0" err="1" smtClean="0">
+                        <a:rPr lang="de-DE" sz="2100" b="0" i="0" u="none" strike="noStrike" kern="1200" baseline="0" dirty="0" err="1">
                           <a:solidFill>
                             <a:schemeClr val="dk1"/>
                           </a:solidFill>
@@ -8745,7 +8987,7 @@
                         <a:t>stemwood</a:t>
                       </a:r>
                       <a:r>
-                        <a:rPr lang="de-DE" sz="2100" b="0" i="0" u="none" strike="noStrike" kern="1200" baseline="0" dirty="0" smtClean="0">
+                        <a:rPr lang="de-DE" sz="2100" b="0" i="0" u="none" strike="noStrike" kern="1200" baseline="0" dirty="0">
                           <a:solidFill>
                             <a:schemeClr val="dk1"/>
                           </a:solidFill>
@@ -8813,7 +9055,7 @@
                     <a:p>
                       <a:pPr algn="r"/>
                       <a:r>
-                        <a:rPr lang="de-DE" sz="2100" b="0" dirty="0" smtClean="0">
+                        <a:rPr lang="de-DE" sz="2100" b="0" dirty="0">
                           <a:solidFill>
                             <a:schemeClr val="tx1"/>
                           </a:solidFill>
@@ -8822,13 +9064,6 @@
                         </a:rPr>
                         <a:t>100,0</a:t>
                       </a:r>
-                      <a:endParaRPr lang="de-DE" sz="2100" b="0" dirty="0">
-                        <a:solidFill>
-                          <a:schemeClr val="tx1"/>
-                        </a:solidFill>
-                        <a:latin typeface="Arial" panose="020B0604020202020204" pitchFamily="34" charset="0"/>
-                        <a:cs typeface="Arial" panose="020B0604020202020204" pitchFamily="34" charset="0"/>
-                      </a:endParaRPr>
                     </a:p>
                   </a:txBody>
                   <a:tcPr marL="93616" marR="93616" marT="46489" marB="46489" anchor="ctr">
@@ -8880,7 +9115,7 @@
                     <a:p>
                       <a:pPr algn="r"/>
                       <a:r>
-                        <a:rPr lang="de-DE" sz="2100" b="0" dirty="0" smtClean="0">
+                        <a:rPr lang="de-DE" sz="2100" b="0" dirty="0">
                           <a:solidFill>
                             <a:schemeClr val="tx1"/>
                           </a:solidFill>
@@ -8889,13 +9124,6 @@
                         </a:rPr>
                         <a:t>100,0</a:t>
                       </a:r>
-                      <a:endParaRPr lang="de-DE" sz="2100" b="0" dirty="0">
-                        <a:solidFill>
-                          <a:schemeClr val="tx1"/>
-                        </a:solidFill>
-                        <a:latin typeface="Arial" panose="020B0604020202020204" pitchFamily="34" charset="0"/>
-                        <a:cs typeface="Arial" panose="020B0604020202020204" pitchFamily="34" charset="0"/>
-                      </a:endParaRPr>
                     </a:p>
                   </a:txBody>
                   <a:tcPr marL="93616" marR="93616" marT="46489" marB="46489" anchor="ctr">
@@ -8947,7 +9175,7 @@
                     <a:p>
                       <a:pPr algn="r"/>
                       <a:r>
-                        <a:rPr lang="de-DE" sz="2100" b="0" dirty="0" smtClean="0">
+                        <a:rPr lang="de-DE" sz="2100" b="0" dirty="0">
                           <a:solidFill>
                             <a:schemeClr val="tx1"/>
                           </a:solidFill>
@@ -8956,13 +9184,6 @@
                         </a:rPr>
                         <a:t>100,0</a:t>
                       </a:r>
-                      <a:endParaRPr lang="de-DE" sz="2100" b="0" dirty="0">
-                        <a:solidFill>
-                          <a:schemeClr val="tx1"/>
-                        </a:solidFill>
-                        <a:latin typeface="Arial" panose="020B0604020202020204" pitchFamily="34" charset="0"/>
-                        <a:cs typeface="Arial" panose="020B0604020202020204" pitchFamily="34" charset="0"/>
-                      </a:endParaRPr>
                     </a:p>
                   </a:txBody>
                   <a:tcPr marL="93616" marR="93616" marT="46489" marB="46489" anchor="ctr">
@@ -9123,7 +9344,7 @@
                     <a:lstStyle/>
                     <a:p>
                       <a:r>
-                        <a:rPr lang="de-DE" sz="2100" b="0" i="0" u="none" strike="noStrike" kern="1200" baseline="0" dirty="0" err="1" smtClean="0">
+                        <a:rPr lang="de-DE" sz="2100" b="0" i="0" u="none" strike="noStrike" kern="1200" baseline="0" dirty="0" err="1">
                           <a:solidFill>
                             <a:schemeClr val="dk1"/>
                           </a:solidFill>
@@ -9134,7 +9355,7 @@
                         <a:t>stemwood</a:t>
                       </a:r>
                       <a:r>
-                        <a:rPr lang="de-DE" sz="2100" b="0" i="0" u="none" strike="noStrike" kern="1200" baseline="0" dirty="0" smtClean="0">
+                        <a:rPr lang="de-DE" sz="2100" b="0" i="0" u="none" strike="noStrike" kern="1200" baseline="0" dirty="0">
                           <a:solidFill>
                             <a:schemeClr val="dk1"/>
                           </a:solidFill>
@@ -9202,7 +9423,7 @@
                     <a:p>
                       <a:pPr algn="r"/>
                       <a:r>
-                        <a:rPr lang="de-DE" sz="2100" b="0" smtClean="0">
+                        <a:rPr lang="de-DE" sz="2100" b="0">
                           <a:solidFill>
                             <a:schemeClr val="tx1"/>
                           </a:solidFill>
@@ -9269,7 +9490,7 @@
                     <a:p>
                       <a:pPr algn="r"/>
                       <a:r>
-                        <a:rPr lang="de-DE" sz="2100" b="0" dirty="0" smtClean="0">
+                        <a:rPr lang="de-DE" sz="2100" b="0" dirty="0">
                           <a:solidFill>
                             <a:schemeClr val="tx1"/>
                           </a:solidFill>
@@ -9278,13 +9499,6 @@
                         </a:rPr>
                         <a:t>100,0</a:t>
                       </a:r>
-                      <a:endParaRPr lang="de-DE" sz="2100" b="0" dirty="0">
-                        <a:solidFill>
-                          <a:schemeClr val="tx1"/>
-                        </a:solidFill>
-                        <a:latin typeface="Arial" panose="020B0604020202020204" pitchFamily="34" charset="0"/>
-                        <a:cs typeface="Arial" panose="020B0604020202020204" pitchFamily="34" charset="0"/>
-                      </a:endParaRPr>
                     </a:p>
                   </a:txBody>
                   <a:tcPr marL="93616" marR="93616" marT="46489" marB="46489" anchor="ctr">
@@ -9336,7 +9550,7 @@
                     <a:p>
                       <a:pPr algn="r"/>
                       <a:r>
-                        <a:rPr lang="de-DE" sz="2100" b="0" dirty="0" smtClean="0">
+                        <a:rPr lang="de-DE" sz="2100" b="0" dirty="0">
                           <a:solidFill>
                             <a:schemeClr val="tx1"/>
                           </a:solidFill>
@@ -9345,13 +9559,6 @@
                         </a:rPr>
                         <a:t>100,0</a:t>
                       </a:r>
-                      <a:endParaRPr lang="de-DE" sz="2100" b="0" dirty="0">
-                        <a:solidFill>
-                          <a:schemeClr val="tx1"/>
-                        </a:solidFill>
-                        <a:latin typeface="Arial" panose="020B0604020202020204" pitchFamily="34" charset="0"/>
-                        <a:cs typeface="Arial" panose="020B0604020202020204" pitchFamily="34" charset="0"/>
-                      </a:endParaRPr>
                     </a:p>
                   </a:txBody>
                   <a:tcPr marL="93616" marR="93616" marT="46489" marB="46489" anchor="ctr">
@@ -9398,6 +9605,11 @@
                     <a:noFill/>
                   </a:tcPr>
                 </a:tc>
+                <a:extLst>
+                  <a:ext uri="{0D108BD9-81ED-4DB2-BD59-A6C34878D82A}">
+                    <a16:rowId xmlns:a16="http://schemas.microsoft.com/office/drawing/2014/main" val="10001"/>
+                  </a:ext>
+                </a:extLst>
               </a:tr>
               <a:tr h="512486">
                 <a:tc>
@@ -9458,7 +9670,7 @@
                     <a:lstStyle/>
                     <a:p>
                       <a:r>
-                        <a:rPr lang="de-DE" sz="2100" b="0" i="0" u="none" strike="noStrike" kern="1200" baseline="0" dirty="0" err="1" smtClean="0">
+                        <a:rPr lang="de-DE" sz="2100" b="0" i="0" u="none" strike="noStrike" kern="1200" baseline="0" dirty="0" err="1">
                           <a:solidFill>
                             <a:schemeClr val="dk1"/>
                           </a:solidFill>
@@ -9469,7 +9681,7 @@
                         <a:t>stemwood</a:t>
                       </a:r>
                       <a:r>
-                        <a:rPr lang="de-DE" sz="2100" b="0" i="0" u="none" strike="noStrike" kern="1200" baseline="0" dirty="0" smtClean="0">
+                        <a:rPr lang="de-DE" sz="2100" b="0" i="0" u="none" strike="noStrike" kern="1200" baseline="0" dirty="0">
                           <a:solidFill>
                             <a:schemeClr val="dk1"/>
                           </a:solidFill>
@@ -9535,7 +9747,7 @@
                     <a:p>
                       <a:pPr algn="r"/>
                       <a:r>
-                        <a:rPr lang="de-DE" sz="2100" b="0" dirty="0" smtClean="0">
+                        <a:rPr lang="de-DE" sz="2100" b="0" dirty="0">
                           <a:solidFill>
                             <a:schemeClr val="tx1"/>
                           </a:solidFill>
@@ -9544,13 +9756,6 @@
                         </a:rPr>
                         <a:t>100,0</a:t>
                       </a:r>
-                      <a:endParaRPr lang="de-DE" sz="2100" b="0" dirty="0">
-                        <a:solidFill>
-                          <a:schemeClr val="tx1"/>
-                        </a:solidFill>
-                        <a:latin typeface="Arial" panose="020B0604020202020204" pitchFamily="34" charset="0"/>
-                        <a:cs typeface="Arial" panose="020B0604020202020204" pitchFamily="34" charset="0"/>
-                      </a:endParaRPr>
                     </a:p>
                   </a:txBody>
                   <a:tcPr marL="93616" marR="93616" marT="46489" marB="46489" anchor="ctr">
@@ -9600,7 +9805,7 @@
                     <a:p>
                       <a:pPr algn="r"/>
                       <a:r>
-                        <a:rPr lang="de-DE" sz="2100" b="0" dirty="0" smtClean="0">
+                        <a:rPr lang="de-DE" sz="2100" b="0" dirty="0">
                           <a:solidFill>
                             <a:schemeClr val="tx1"/>
                           </a:solidFill>
@@ -9609,13 +9814,6 @@
                         </a:rPr>
                         <a:t>100,0</a:t>
                       </a:r>
-                      <a:endParaRPr lang="de-DE" sz="2100" b="0" dirty="0">
-                        <a:solidFill>
-                          <a:schemeClr val="tx1"/>
-                        </a:solidFill>
-                        <a:latin typeface="Arial" panose="020B0604020202020204" pitchFamily="34" charset="0"/>
-                        <a:cs typeface="Arial" panose="020B0604020202020204" pitchFamily="34" charset="0"/>
-                      </a:endParaRPr>
                     </a:p>
                   </a:txBody>
                   <a:tcPr marL="93616" marR="93616" marT="46489" marB="46489" anchor="ctr">
@@ -9665,7 +9863,7 @@
                     <a:p>
                       <a:pPr algn="r"/>
                       <a:r>
-                        <a:rPr lang="de-DE" sz="2100" b="0" dirty="0" smtClean="0">
+                        <a:rPr lang="de-DE" sz="2100" b="0" dirty="0">
                           <a:solidFill>
                             <a:schemeClr val="tx1"/>
                           </a:solidFill>
@@ -9674,13 +9872,6 @@
                         </a:rPr>
                         <a:t>100,0</a:t>
                       </a:r>
-                      <a:endParaRPr lang="de-DE" sz="2100" b="0" dirty="0">
-                        <a:solidFill>
-                          <a:schemeClr val="tx1"/>
-                        </a:solidFill>
-                        <a:latin typeface="Arial" panose="020B0604020202020204" pitchFamily="34" charset="0"/>
-                        <a:cs typeface="Arial" panose="020B0604020202020204" pitchFamily="34" charset="0"/>
-                      </a:endParaRPr>
                     </a:p>
                   </a:txBody>
                   <a:tcPr marL="93616" marR="93616" marT="46489" marB="46489" anchor="ctr">
@@ -9837,7 +10028,7 @@
                     <a:lstStyle/>
                     <a:p>
                       <a:r>
-                        <a:rPr lang="de-DE" sz="2100" b="0" i="0" u="none" strike="noStrike" kern="1200" baseline="0" dirty="0" err="1" smtClean="0">
+                        <a:rPr lang="de-DE" sz="2100" b="0" i="0" u="none" strike="noStrike" kern="1200" baseline="0" dirty="0" err="1">
                           <a:solidFill>
                             <a:schemeClr val="dk1"/>
                           </a:solidFill>
@@ -9848,7 +10039,7 @@
                         <a:t>stemwood</a:t>
                       </a:r>
                       <a:r>
-                        <a:rPr lang="de-DE" sz="2100" b="0" i="0" u="none" strike="noStrike" kern="1200" baseline="0" dirty="0" smtClean="0">
+                        <a:rPr lang="de-DE" sz="2100" b="0" i="0" u="none" strike="noStrike" kern="1200" baseline="0" dirty="0">
                           <a:solidFill>
                             <a:schemeClr val="dk1"/>
                           </a:solidFill>
@@ -9914,7 +10105,7 @@
                     <a:p>
                       <a:pPr algn="r"/>
                       <a:r>
-                        <a:rPr lang="de-DE" sz="2100" b="0" dirty="0" smtClean="0">
+                        <a:rPr lang="de-DE" sz="2100" b="0" dirty="0">
                           <a:solidFill>
                             <a:schemeClr val="tx1"/>
                           </a:solidFill>
@@ -9923,13 +10114,6 @@
                         </a:rPr>
                         <a:t>100,0</a:t>
                       </a:r>
-                      <a:endParaRPr lang="de-DE" sz="2100" b="0" dirty="0">
-                        <a:solidFill>
-                          <a:schemeClr val="tx1"/>
-                        </a:solidFill>
-                        <a:latin typeface="Arial" panose="020B0604020202020204" pitchFamily="34" charset="0"/>
-                        <a:cs typeface="Arial" panose="020B0604020202020204" pitchFamily="34" charset="0"/>
-                      </a:endParaRPr>
                     </a:p>
                   </a:txBody>
                   <a:tcPr marL="93616" marR="93616" marT="46489" marB="46489" anchor="ctr">
@@ -9979,7 +10163,7 @@
                     <a:p>
                       <a:pPr algn="r"/>
                       <a:r>
-                        <a:rPr lang="de-DE" sz="2100" b="0" dirty="0" smtClean="0">
+                        <a:rPr lang="de-DE" sz="2100" b="0" dirty="0">
                           <a:solidFill>
                             <a:schemeClr val="tx1"/>
                           </a:solidFill>
@@ -9988,13 +10172,6 @@
                         </a:rPr>
                         <a:t>100,0</a:t>
                       </a:r>
-                      <a:endParaRPr lang="de-DE" sz="2100" b="0" dirty="0">
-                        <a:solidFill>
-                          <a:schemeClr val="tx1"/>
-                        </a:solidFill>
-                        <a:latin typeface="Arial" panose="020B0604020202020204" pitchFamily="34" charset="0"/>
-                        <a:cs typeface="Arial" panose="020B0604020202020204" pitchFamily="34" charset="0"/>
-                      </a:endParaRPr>
                     </a:p>
                   </a:txBody>
                   <a:tcPr marL="93616" marR="93616" marT="46489" marB="46489" anchor="ctr">
@@ -10044,7 +10221,7 @@
                     <a:p>
                       <a:pPr algn="r"/>
                       <a:r>
-                        <a:rPr lang="de-DE" sz="2100" b="0" dirty="0" smtClean="0">
+                        <a:rPr lang="de-DE" sz="2100" b="0" dirty="0">
                           <a:solidFill>
                             <a:schemeClr val="tx1"/>
                           </a:solidFill>
@@ -10053,13 +10230,6 @@
                         </a:rPr>
                         <a:t>100,0</a:t>
                       </a:r>
-                      <a:endParaRPr lang="de-DE" sz="2100" b="0" dirty="0">
-                        <a:solidFill>
-                          <a:schemeClr val="tx1"/>
-                        </a:solidFill>
-                        <a:latin typeface="Arial" panose="020B0604020202020204" pitchFamily="34" charset="0"/>
-                        <a:cs typeface="Arial" panose="020B0604020202020204" pitchFamily="34" charset="0"/>
-                      </a:endParaRPr>
                     </a:p>
                   </a:txBody>
                   <a:tcPr marL="93616" marR="93616" marT="46489" marB="46489" anchor="ctr">
@@ -10104,6 +10274,11 @@
                     <a:noFill/>
                   </a:tcPr>
                 </a:tc>
+                <a:extLst>
+                  <a:ext uri="{0D108BD9-81ED-4DB2-BD59-A6C34878D82A}">
+                    <a16:rowId xmlns:a16="http://schemas.microsoft.com/office/drawing/2014/main" val="10002"/>
+                  </a:ext>
+                </a:extLst>
               </a:tr>
               <a:tr h="512486">
                 <a:tc>
@@ -10166,7 +10341,7 @@
                     <a:lstStyle/>
                     <a:p>
                       <a:r>
-                        <a:rPr lang="de-DE" sz="2100" b="0" i="0" u="none" strike="noStrike" kern="1200" baseline="0" dirty="0" err="1" smtClean="0">
+                        <a:rPr lang="de-DE" sz="2100" b="0" i="0" u="none" strike="noStrike" kern="1200" baseline="0" dirty="0" err="1">
                           <a:solidFill>
                             <a:schemeClr val="dk1"/>
                           </a:solidFill>
@@ -10177,7 +10352,7 @@
                         <a:t>stemwood</a:t>
                       </a:r>
                       <a:r>
-                        <a:rPr lang="de-DE" sz="2100" b="0" i="0" u="none" strike="noStrike" kern="1200" baseline="0" dirty="0" smtClean="0">
+                        <a:rPr lang="de-DE" sz="2100" b="0" i="0" u="none" strike="noStrike" kern="1200" baseline="0" dirty="0">
                           <a:solidFill>
                             <a:schemeClr val="dk1"/>
                           </a:solidFill>
@@ -10245,7 +10420,7 @@
                     <a:p>
                       <a:pPr algn="r"/>
                       <a:r>
-                        <a:rPr lang="de-DE" sz="2100" b="0" dirty="0" smtClean="0">
+                        <a:rPr lang="de-DE" sz="2100" b="0" dirty="0">
                           <a:solidFill>
                             <a:schemeClr val="tx1"/>
                           </a:solidFill>
@@ -10254,13 +10429,6 @@
                         </a:rPr>
                         <a:t>100,0</a:t>
                       </a:r>
-                      <a:endParaRPr lang="de-DE" sz="2100" b="0" dirty="0">
-                        <a:solidFill>
-                          <a:schemeClr val="tx1"/>
-                        </a:solidFill>
-                        <a:latin typeface="Arial" panose="020B0604020202020204" pitchFamily="34" charset="0"/>
-                        <a:cs typeface="Arial" panose="020B0604020202020204" pitchFamily="34" charset="0"/>
-                      </a:endParaRPr>
                     </a:p>
                   </a:txBody>
                   <a:tcPr marL="93616" marR="93616" marT="46489" marB="46489" anchor="ctr">
@@ -10312,7 +10480,7 @@
                     <a:p>
                       <a:pPr algn="r"/>
                       <a:r>
-                        <a:rPr lang="de-DE" sz="2100" b="0" dirty="0" smtClean="0">
+                        <a:rPr lang="de-DE" sz="2100" b="0" dirty="0">
                           <a:solidFill>
                             <a:schemeClr val="tx1"/>
                           </a:solidFill>
@@ -10321,13 +10489,6 @@
                         </a:rPr>
                         <a:t>100,0</a:t>
                       </a:r>
-                      <a:endParaRPr lang="de-DE" sz="2100" b="0" dirty="0">
-                        <a:solidFill>
-                          <a:schemeClr val="tx1"/>
-                        </a:solidFill>
-                        <a:latin typeface="Arial" panose="020B0604020202020204" pitchFamily="34" charset="0"/>
-                        <a:cs typeface="Arial" panose="020B0604020202020204" pitchFamily="34" charset="0"/>
-                      </a:endParaRPr>
                     </a:p>
                   </a:txBody>
                   <a:tcPr marL="93616" marR="93616" marT="46489" marB="46489" anchor="ctr">
@@ -10379,7 +10540,7 @@
                     <a:p>
                       <a:pPr algn="r"/>
                       <a:r>
-                        <a:rPr lang="de-DE" sz="2100" b="0" dirty="0" smtClean="0">
+                        <a:rPr lang="de-DE" sz="2100" b="0" dirty="0">
                           <a:solidFill>
                             <a:schemeClr val="tx1"/>
                           </a:solidFill>
@@ -10388,13 +10549,6 @@
                         </a:rPr>
                         <a:t>100,0</a:t>
                       </a:r>
-                      <a:endParaRPr lang="de-DE" sz="2100" b="0" dirty="0">
-                        <a:solidFill>
-                          <a:schemeClr val="tx1"/>
-                        </a:solidFill>
-                        <a:latin typeface="Arial" panose="020B0604020202020204" pitchFamily="34" charset="0"/>
-                        <a:cs typeface="Arial" panose="020B0604020202020204" pitchFamily="34" charset="0"/>
-                      </a:endParaRPr>
                     </a:p>
                   </a:txBody>
                   <a:tcPr marL="93616" marR="93616" marT="46489" marB="46489" anchor="ctr">
@@ -10553,7 +10707,7 @@
                     <a:lstStyle/>
                     <a:p>
                       <a:r>
-                        <a:rPr lang="de-DE" sz="2100" b="0" i="0" u="none" strike="noStrike" kern="1200" baseline="0" smtClean="0">
+                        <a:rPr lang="de-DE" sz="2100" b="0" i="0" u="none" strike="noStrike" kern="1200" baseline="0">
                           <a:solidFill>
                             <a:schemeClr val="dk1"/>
                           </a:solidFill>
@@ -10619,7 +10773,7 @@
                     <a:p>
                       <a:pPr algn="r"/>
                       <a:r>
-                        <a:rPr lang="de-DE" sz="2100" b="0" smtClean="0">
+                        <a:rPr lang="de-DE" sz="2100" b="0">
                           <a:solidFill>
                             <a:schemeClr val="tx1"/>
                           </a:solidFill>
@@ -10684,7 +10838,7 @@
                     <a:p>
                       <a:pPr algn="r"/>
                       <a:r>
-                        <a:rPr lang="de-DE" sz="2100" b="0" smtClean="0">
+                        <a:rPr lang="de-DE" sz="2100" b="0">
                           <a:solidFill>
                             <a:schemeClr val="tx1"/>
                           </a:solidFill>
@@ -10749,7 +10903,7 @@
                     <a:p>
                       <a:pPr algn="r"/>
                       <a:r>
-                        <a:rPr lang="de-DE" sz="2100" b="0" dirty="0" smtClean="0">
+                        <a:rPr lang="de-DE" sz="2100" b="0" dirty="0">
                           <a:solidFill>
                             <a:schemeClr val="tx1"/>
                           </a:solidFill>
@@ -10758,13 +10912,6 @@
                         </a:rPr>
                         <a:t>100,0</a:t>
                       </a:r>
-                      <a:endParaRPr lang="de-DE" sz="2100" b="0" dirty="0">
-                        <a:solidFill>
-                          <a:schemeClr val="tx1"/>
-                        </a:solidFill>
-                        <a:latin typeface="Arial" panose="020B0604020202020204" pitchFamily="34" charset="0"/>
-                        <a:cs typeface="Arial" panose="020B0604020202020204" pitchFamily="34" charset="0"/>
-                      </a:endParaRPr>
                     </a:p>
                   </a:txBody>
                   <a:tcPr marL="93616" marR="93616" marT="46489" marB="46489" anchor="ctr">
@@ -10809,6 +10956,11 @@
                     <a:noFill/>
                   </a:tcPr>
                 </a:tc>
+                <a:extLst>
+                  <a:ext uri="{0D108BD9-81ED-4DB2-BD59-A6C34878D82A}">
+                    <a16:rowId xmlns:a16="http://schemas.microsoft.com/office/drawing/2014/main" val="10003"/>
+                  </a:ext>
+                </a:extLst>
               </a:tr>
               <a:tr h="512486">
                 <a:tc>
@@ -10875,7 +11027,7 @@
                     <a:lstStyle/>
                     <a:p>
                       <a:r>
-                        <a:rPr lang="de-DE" sz="2100" b="0" i="0" u="none" strike="noStrike" kern="1200" baseline="0" dirty="0" err="1" smtClean="0">
+                        <a:rPr lang="de-DE" sz="2100" b="0" i="0" u="none" strike="noStrike" kern="1200" baseline="0" dirty="0" err="1">
                           <a:solidFill>
                             <a:schemeClr val="dk1"/>
                           </a:solidFill>
@@ -10886,7 +11038,7 @@
                         <a:t>stemwood</a:t>
                       </a:r>
                       <a:r>
-                        <a:rPr lang="de-DE" sz="2100" b="0" i="0" u="none" strike="noStrike" kern="1200" baseline="0" dirty="0" smtClean="0">
+                        <a:rPr lang="de-DE" sz="2100" b="0" i="0" u="none" strike="noStrike" kern="1200" baseline="0" dirty="0">
                           <a:solidFill>
                             <a:schemeClr val="dk1"/>
                           </a:solidFill>
@@ -10958,7 +11110,7 @@
                     <a:p>
                       <a:pPr algn="r"/>
                       <a:r>
-                        <a:rPr lang="de-DE" sz="2100" b="0" dirty="0" smtClean="0">
+                        <a:rPr lang="de-DE" sz="2100" b="0" dirty="0">
                           <a:solidFill>
                             <a:schemeClr val="tx1"/>
                           </a:solidFill>
@@ -10967,13 +11119,6 @@
                         </a:rPr>
                         <a:t>100,0</a:t>
                       </a:r>
-                      <a:endParaRPr lang="de-DE" sz="2100" b="0" dirty="0">
-                        <a:solidFill>
-                          <a:schemeClr val="tx1"/>
-                        </a:solidFill>
-                        <a:latin typeface="Arial" panose="020B0604020202020204" pitchFamily="34" charset="0"/>
-                        <a:cs typeface="Arial" panose="020B0604020202020204" pitchFamily="34" charset="0"/>
-                      </a:endParaRPr>
                     </a:p>
                   </a:txBody>
                   <a:tcPr marL="93616" marR="93616" marT="46489" marB="46489" anchor="ctr">
@@ -11029,7 +11174,7 @@
                     <a:p>
                       <a:pPr algn="r"/>
                       <a:r>
-                        <a:rPr lang="de-DE" sz="2100" b="0" dirty="0" smtClean="0">
+                        <a:rPr lang="de-DE" sz="2100" b="0" dirty="0">
                           <a:solidFill>
                             <a:schemeClr val="tx1"/>
                           </a:solidFill>
@@ -11038,13 +11183,6 @@
                         </a:rPr>
                         <a:t>100,0</a:t>
                       </a:r>
-                      <a:endParaRPr lang="de-DE" sz="2100" b="0" dirty="0">
-                        <a:solidFill>
-                          <a:schemeClr val="tx1"/>
-                        </a:solidFill>
-                        <a:latin typeface="Arial" panose="020B0604020202020204" pitchFamily="34" charset="0"/>
-                        <a:cs typeface="Arial" panose="020B0604020202020204" pitchFamily="34" charset="0"/>
-                      </a:endParaRPr>
                     </a:p>
                   </a:txBody>
                   <a:tcPr marL="93616" marR="93616" marT="46489" marB="46489" anchor="ctr">
@@ -11100,7 +11238,7 @@
                     <a:p>
                       <a:pPr algn="r"/>
                       <a:r>
-                        <a:rPr lang="de-DE" sz="2100" b="0" dirty="0" smtClean="0">
+                        <a:rPr lang="de-DE" sz="2100" b="0" dirty="0">
                           <a:solidFill>
                             <a:schemeClr val="tx1"/>
                           </a:solidFill>
@@ -11109,13 +11247,6 @@
                         </a:rPr>
                         <a:t>100,0</a:t>
                       </a:r>
-                      <a:endParaRPr lang="de-DE" sz="2100" b="0" dirty="0">
-                        <a:solidFill>
-                          <a:schemeClr val="tx1"/>
-                        </a:solidFill>
-                        <a:latin typeface="Arial" panose="020B0604020202020204" pitchFamily="34" charset="0"/>
-                        <a:cs typeface="Arial" panose="020B0604020202020204" pitchFamily="34" charset="0"/>
-                      </a:endParaRPr>
                     </a:p>
                   </a:txBody>
                   <a:tcPr marL="93616" marR="93616" marT="46489" marB="46489" anchor="ctr">
@@ -11278,7 +11409,7 @@
                     <a:lstStyle/>
                     <a:p>
                       <a:r>
-                        <a:rPr lang="de-DE" sz="2100" b="0" i="0" u="none" strike="noStrike" kern="1200" baseline="0" smtClean="0">
+                        <a:rPr lang="de-DE" sz="2100" b="0" i="0" u="none" strike="noStrike" kern="1200" baseline="0">
                           <a:solidFill>
                             <a:schemeClr val="dk1"/>
                           </a:solidFill>
@@ -11344,7 +11475,7 @@
                     <a:p>
                       <a:pPr algn="r"/>
                       <a:r>
-                        <a:rPr lang="de-DE" sz="2100" b="0" smtClean="0">
+                        <a:rPr lang="de-DE" sz="2100" b="0">
                           <a:solidFill>
                             <a:schemeClr val="tx1"/>
                           </a:solidFill>
@@ -11409,7 +11540,7 @@
                     <a:p>
                       <a:pPr algn="r"/>
                       <a:r>
-                        <a:rPr lang="de-DE" sz="2100" b="0" smtClean="0">
+                        <a:rPr lang="de-DE" sz="2100" b="0">
                           <a:solidFill>
                             <a:schemeClr val="tx1"/>
                           </a:solidFill>
@@ -11474,7 +11605,7 @@
                     <a:p>
                       <a:pPr algn="r"/>
                       <a:r>
-                        <a:rPr lang="de-DE" sz="2100" b="0" dirty="0" smtClean="0">
+                        <a:rPr lang="de-DE" sz="2100" b="0" dirty="0">
                           <a:solidFill>
                             <a:schemeClr val="tx1"/>
                           </a:solidFill>
@@ -11483,13 +11614,6 @@
                         </a:rPr>
                         <a:t>100,0</a:t>
                       </a:r>
-                      <a:endParaRPr lang="de-DE" sz="2100" b="0" dirty="0">
-                        <a:solidFill>
-                          <a:schemeClr val="tx1"/>
-                        </a:solidFill>
-                        <a:latin typeface="Arial" panose="020B0604020202020204" pitchFamily="34" charset="0"/>
-                        <a:cs typeface="Arial" panose="020B0604020202020204" pitchFamily="34" charset="0"/>
-                      </a:endParaRPr>
                     </a:p>
                   </a:txBody>
                   <a:tcPr marL="93616" marR="93616" marT="46489" marB="46489" anchor="ctr">
@@ -11534,6 +11658,11 @@
                     <a:noFill/>
                   </a:tcPr>
                 </a:tc>
+                <a:extLst>
+                  <a:ext uri="{0D108BD9-81ED-4DB2-BD59-A6C34878D82A}">
+                    <a16:rowId xmlns:a16="http://schemas.microsoft.com/office/drawing/2014/main" val="10004"/>
+                  </a:ext>
+                </a:extLst>
               </a:tr>
               <a:tr h="512486">
                 <a:tc>
@@ -11941,7 +12070,7 @@
                     <a:lstStyle/>
                     <a:p>
                       <a:r>
-                        <a:rPr lang="de-DE" sz="2100" b="0" i="0" u="none" strike="noStrike" kern="1200" baseline="0" smtClean="0">
+                        <a:rPr lang="de-DE" sz="2100" b="0" i="0" u="none" strike="noStrike" kern="1200" baseline="0">
                           <a:solidFill>
                             <a:schemeClr val="dk1"/>
                           </a:solidFill>
@@ -12007,7 +12136,7 @@
                     <a:p>
                       <a:pPr algn="r"/>
                       <a:r>
-                        <a:rPr lang="de-DE" sz="2100" b="0" smtClean="0">
+                        <a:rPr lang="de-DE" sz="2100" b="0">
                           <a:solidFill>
                             <a:schemeClr val="tx1"/>
                           </a:solidFill>
@@ -12072,7 +12201,7 @@
                     <a:p>
                       <a:pPr algn="r"/>
                       <a:r>
-                        <a:rPr lang="de-DE" sz="2100" b="0" smtClean="0">
+                        <a:rPr lang="de-DE" sz="2100" b="0">
                           <a:solidFill>
                             <a:schemeClr val="tx1"/>
                           </a:solidFill>
@@ -12137,7 +12266,7 @@
                     <a:p>
                       <a:pPr algn="r"/>
                       <a:r>
-                        <a:rPr lang="de-DE" sz="2100" b="0" dirty="0" smtClean="0">
+                        <a:rPr lang="de-DE" sz="2100" b="0" dirty="0">
                           <a:solidFill>
                             <a:schemeClr val="tx1"/>
                           </a:solidFill>
@@ -12146,13 +12275,6 @@
                         </a:rPr>
                         <a:t>100,0</a:t>
                       </a:r>
-                      <a:endParaRPr lang="de-DE" sz="2100" b="0" dirty="0">
-                        <a:solidFill>
-                          <a:schemeClr val="tx1"/>
-                        </a:solidFill>
-                        <a:latin typeface="Arial" panose="020B0604020202020204" pitchFamily="34" charset="0"/>
-                        <a:cs typeface="Arial" panose="020B0604020202020204" pitchFamily="34" charset="0"/>
-                      </a:endParaRPr>
                     </a:p>
                   </a:txBody>
                   <a:tcPr marL="93616" marR="93616" marT="46489" marB="46489" anchor="ctr">
@@ -12197,6 +12319,11 @@
                     <a:noFill/>
                   </a:tcPr>
                 </a:tc>
+                <a:extLst>
+                  <a:ext uri="{0D108BD9-81ED-4DB2-BD59-A6C34878D82A}">
+                    <a16:rowId xmlns:a16="http://schemas.microsoft.com/office/drawing/2014/main" val="10005"/>
+                  </a:ext>
+                </a:extLst>
               </a:tr>
               <a:tr h="512486">
                 <a:tc>
@@ -12261,7 +12388,7 @@
                     <a:lstStyle/>
                     <a:p>
                       <a:r>
-                        <a:rPr lang="en-US" sz="2100" b="0" i="0" u="none" strike="noStrike" kern="1200" baseline="0" dirty="0" err="1" smtClean="0">
+                        <a:rPr lang="en-US" sz="2100" b="0" i="0" u="none" strike="noStrike" kern="1200" baseline="0" dirty="0" err="1">
                           <a:solidFill>
                             <a:schemeClr val="dk1"/>
                           </a:solidFill>
@@ -12272,7 +12399,7 @@
                         <a:t>landsc</a:t>
                       </a:r>
                       <a:r>
-                        <a:rPr lang="en-US" sz="2100" b="0" i="0" u="none" strike="noStrike" kern="1200" baseline="0" dirty="0" smtClean="0">
+                        <a:rPr lang="en-US" sz="2100" b="0" i="0" u="none" strike="noStrike" kern="1200" baseline="0" dirty="0">
                           <a:solidFill>
                             <a:schemeClr val="dk1"/>
                           </a:solidFill>
@@ -12358,7 +12485,7 @@
                         <a:defRPr/>
                       </a:pPr>
                       <a:r>
-                        <a:rPr lang="de-DE" sz="2100" b="0" dirty="0" smtClean="0">
+                        <a:rPr lang="de-DE" sz="2100" b="0" dirty="0">
                           <a:solidFill>
                             <a:schemeClr val="tx1"/>
                           </a:solidFill>
@@ -12436,7 +12563,7 @@
                         <a:defRPr/>
                       </a:pPr>
                       <a:r>
-                        <a:rPr lang="de-DE" sz="2100" b="0" dirty="0" smtClean="0">
+                        <a:rPr lang="de-DE" sz="2100" b="0" dirty="0">
                           <a:solidFill>
                             <a:schemeClr val="tx1"/>
                           </a:solidFill>
@@ -12514,7 +12641,7 @@
                         <a:defRPr/>
                       </a:pPr>
                       <a:r>
-                        <a:rPr lang="de-DE" sz="2100" b="0" dirty="0" smtClean="0">
+                        <a:rPr lang="de-DE" sz="2100" b="0" dirty="0">
                           <a:solidFill>
                             <a:schemeClr val="tx1"/>
                           </a:solidFill>
@@ -12685,7 +12812,7 @@
                     <a:lstStyle/>
                     <a:p>
                       <a:r>
-                        <a:rPr lang="de-DE" sz="2100" b="0" i="0" u="none" strike="noStrike" kern="1200" baseline="0" dirty="0" err="1" smtClean="0">
+                        <a:rPr lang="de-DE" sz="2100" b="0" i="0" u="none" strike="noStrike" kern="1200" baseline="0" dirty="0" err="1">
                           <a:solidFill>
                             <a:schemeClr val="dk1"/>
                           </a:solidFill>
@@ -12696,7 +12823,7 @@
                         <a:t>stemwood</a:t>
                       </a:r>
                       <a:r>
-                        <a:rPr lang="de-DE" sz="2100" b="0" i="0" u="none" strike="noStrike" kern="1200" baseline="0" dirty="0" smtClean="0">
+                        <a:rPr lang="de-DE" sz="2100" b="0" i="0" u="none" strike="noStrike" kern="1200" baseline="0" dirty="0">
                           <a:solidFill>
                             <a:schemeClr val="dk1"/>
                           </a:solidFill>
@@ -12764,7 +12891,7 @@
                     <a:p>
                       <a:pPr algn="r"/>
                       <a:r>
-                        <a:rPr lang="de-DE" sz="2100" b="0" smtClean="0">
+                        <a:rPr lang="de-DE" sz="2100" b="0">
                           <a:solidFill>
                             <a:schemeClr val="tx1"/>
                           </a:solidFill>
@@ -12831,7 +12958,7 @@
                     <a:p>
                       <a:pPr algn="r"/>
                       <a:r>
-                        <a:rPr lang="de-DE" sz="2100" b="0" smtClean="0">
+                        <a:rPr lang="de-DE" sz="2100" b="0">
                           <a:solidFill>
                             <a:schemeClr val="tx1"/>
                           </a:solidFill>
@@ -12898,7 +13025,7 @@
                     <a:p>
                       <a:pPr algn="r"/>
                       <a:r>
-                        <a:rPr lang="de-DE" sz="2100" b="0" dirty="0" smtClean="0">
+                        <a:rPr lang="de-DE" sz="2100" b="0" dirty="0">
                           <a:solidFill>
                             <a:schemeClr val="tx1"/>
                           </a:solidFill>
@@ -12907,13 +13034,6 @@
                         </a:rPr>
                         <a:t>100,0</a:t>
                       </a:r>
-                      <a:endParaRPr lang="de-DE" sz="2100" b="0" dirty="0">
-                        <a:solidFill>
-                          <a:schemeClr val="tx1"/>
-                        </a:solidFill>
-                        <a:latin typeface="Arial" panose="020B0604020202020204" pitchFamily="34" charset="0"/>
-                        <a:cs typeface="Arial" panose="020B0604020202020204" pitchFamily="34" charset="0"/>
-                      </a:endParaRPr>
                     </a:p>
                   </a:txBody>
                   <a:tcPr marL="93616" marR="93616" marT="46489" marB="46489" anchor="ctr">
@@ -12960,6 +13080,11 @@
                     <a:noFill/>
                   </a:tcPr>
                 </a:tc>
+                <a:extLst>
+                  <a:ext uri="{0D108BD9-81ED-4DB2-BD59-A6C34878D82A}">
+                    <a16:rowId xmlns:a16="http://schemas.microsoft.com/office/drawing/2014/main" val="10006"/>
+                  </a:ext>
+                </a:extLst>
               </a:tr>
               <a:tr h="512486">
                 <a:tc>
@@ -13373,7 +13498,7 @@
                     <a:lstStyle/>
                     <a:p>
                       <a:r>
-                        <a:rPr lang="en-US" sz="2100" b="0" i="0" u="none" strike="noStrike" kern="1200" baseline="0" dirty="0" err="1" smtClean="0">
+                        <a:rPr lang="en-US" sz="2100" b="0" i="0" u="none" strike="noStrike" kern="1200" baseline="0" dirty="0" err="1">
                           <a:solidFill>
                             <a:schemeClr val="dk1"/>
                           </a:solidFill>
@@ -13384,7 +13509,7 @@
                         <a:t>landsc</a:t>
                       </a:r>
                       <a:r>
-                        <a:rPr lang="en-US" sz="2100" b="0" i="0" u="none" strike="noStrike" kern="1200" baseline="0" dirty="0" smtClean="0">
+                        <a:rPr lang="en-US" sz="2100" b="0" i="0" u="none" strike="noStrike" kern="1200" baseline="0" dirty="0">
                           <a:solidFill>
                             <a:schemeClr val="dk1"/>
                           </a:solidFill>
@@ -13456,7 +13581,7 @@
                     <a:p>
                       <a:pPr algn="r"/>
                       <a:r>
-                        <a:rPr lang="de-DE" sz="2100" b="0" dirty="0" smtClean="0">
+                        <a:rPr lang="de-DE" sz="2100" b="0" dirty="0">
                           <a:solidFill>
                             <a:schemeClr val="tx1"/>
                           </a:solidFill>
@@ -13465,13 +13590,6 @@
                         </a:rPr>
                         <a:t>100,0</a:t>
                       </a:r>
-                      <a:endParaRPr lang="de-DE" sz="2100" b="0" dirty="0">
-                        <a:solidFill>
-                          <a:schemeClr val="tx1"/>
-                        </a:solidFill>
-                        <a:latin typeface="Arial" panose="020B0604020202020204" pitchFamily="34" charset="0"/>
-                        <a:cs typeface="Arial" panose="020B0604020202020204" pitchFamily="34" charset="0"/>
-                      </a:endParaRPr>
                     </a:p>
                   </a:txBody>
                   <a:tcPr marL="93616" marR="93616" marT="46489" marB="46489" anchor="ctr">
@@ -13527,7 +13645,7 @@
                     <a:p>
                       <a:pPr algn="r"/>
                       <a:r>
-                        <a:rPr lang="de-DE" sz="2100" b="0" dirty="0" smtClean="0">
+                        <a:rPr lang="de-DE" sz="2100" b="0" dirty="0">
                           <a:solidFill>
                             <a:schemeClr val="tx1"/>
                           </a:solidFill>
@@ -13536,13 +13654,6 @@
                         </a:rPr>
                         <a:t>100,0</a:t>
                       </a:r>
-                      <a:endParaRPr lang="de-DE" sz="2100" b="0" dirty="0">
-                        <a:solidFill>
-                          <a:schemeClr val="tx1"/>
-                        </a:solidFill>
-                        <a:latin typeface="Arial" panose="020B0604020202020204" pitchFamily="34" charset="0"/>
-                        <a:cs typeface="Arial" panose="020B0604020202020204" pitchFamily="34" charset="0"/>
-                      </a:endParaRPr>
                     </a:p>
                   </a:txBody>
                   <a:tcPr marL="93616" marR="93616" marT="46489" marB="46489" anchor="ctr">
@@ -13598,7 +13709,7 @@
                     <a:p>
                       <a:pPr algn="r"/>
                       <a:r>
-                        <a:rPr lang="de-DE" sz="2100" b="0" dirty="0" smtClean="0">
+                        <a:rPr lang="de-DE" sz="2100" b="0" dirty="0">
                           <a:solidFill>
                             <a:schemeClr val="tx1"/>
                           </a:solidFill>
@@ -13607,13 +13718,6 @@
                         </a:rPr>
                         <a:t>100,0</a:t>
                       </a:r>
-                      <a:endParaRPr lang="de-DE" sz="2100" b="0" dirty="0">
-                        <a:solidFill>
-                          <a:schemeClr val="tx1"/>
-                        </a:solidFill>
-                        <a:latin typeface="Arial" panose="020B0604020202020204" pitchFamily="34" charset="0"/>
-                        <a:cs typeface="Arial" panose="020B0604020202020204" pitchFamily="34" charset="0"/>
-                      </a:endParaRPr>
                     </a:p>
                   </a:txBody>
                   <a:tcPr marL="93616" marR="93616" marT="46489" marB="46489" anchor="ctr">
@@ -13664,6 +13768,11 @@
                     </a:solidFill>
                   </a:tcPr>
                 </a:tc>
+                <a:extLst>
+                  <a:ext uri="{0D108BD9-81ED-4DB2-BD59-A6C34878D82A}">
+                    <a16:rowId xmlns:a16="http://schemas.microsoft.com/office/drawing/2014/main" val="10007"/>
+                  </a:ext>
+                </a:extLst>
               </a:tr>
               <a:tr h="512486">
                 <a:tc>
@@ -13728,7 +13837,7 @@
                     <a:lstStyle/>
                     <a:p>
                       <a:r>
-                        <a:rPr lang="de-DE" sz="2100" b="0" i="0" u="none" strike="noStrike" kern="1200" baseline="0" dirty="0" err="1" smtClean="0">
+                        <a:rPr lang="de-DE" sz="2100" b="0" i="0" u="none" strike="noStrike" kern="1200" baseline="0" dirty="0" err="1">
                           <a:solidFill>
                             <a:schemeClr val="dk1"/>
                           </a:solidFill>
@@ -13739,7 +13848,7 @@
                         <a:t>stemwood</a:t>
                       </a:r>
                       <a:r>
-                        <a:rPr lang="de-DE" sz="2100" b="0" i="0" u="none" strike="noStrike" kern="1200" baseline="0" dirty="0" smtClean="0">
+                        <a:rPr lang="de-DE" sz="2100" b="0" i="0" u="none" strike="noStrike" kern="1200" baseline="0" dirty="0">
                           <a:solidFill>
                             <a:schemeClr val="dk1"/>
                           </a:solidFill>
@@ -13809,7 +13918,7 @@
                     <a:p>
                       <a:pPr algn="r"/>
                       <a:r>
-                        <a:rPr lang="de-DE" sz="2100" b="0" dirty="0" smtClean="0">
+                        <a:rPr lang="de-DE" sz="2100" b="0" dirty="0">
                           <a:solidFill>
                             <a:schemeClr val="tx1"/>
                           </a:solidFill>
@@ -13818,13 +13927,6 @@
                         </a:rPr>
                         <a:t>100,0</a:t>
                       </a:r>
-                      <a:endParaRPr lang="de-DE" sz="2100" b="0" dirty="0">
-                        <a:solidFill>
-                          <a:schemeClr val="tx1"/>
-                        </a:solidFill>
-                        <a:latin typeface="Arial" panose="020B0604020202020204" pitchFamily="34" charset="0"/>
-                        <a:cs typeface="Arial" panose="020B0604020202020204" pitchFamily="34" charset="0"/>
-                      </a:endParaRPr>
                     </a:p>
                   </a:txBody>
                   <a:tcPr marL="93616" marR="93616" marT="46489" marB="46489" anchor="ctr">
@@ -13878,7 +13980,7 @@
                     <a:p>
                       <a:pPr algn="r"/>
                       <a:r>
-                        <a:rPr lang="de-DE" sz="2100" b="0" dirty="0" smtClean="0">
+                        <a:rPr lang="de-DE" sz="2100" b="0" dirty="0">
                           <a:solidFill>
                             <a:schemeClr val="tx1"/>
                           </a:solidFill>
@@ -13887,13 +13989,6 @@
                         </a:rPr>
                         <a:t>100,0</a:t>
                       </a:r>
-                      <a:endParaRPr lang="de-DE" sz="2100" b="0" dirty="0">
-                        <a:solidFill>
-                          <a:schemeClr val="tx1"/>
-                        </a:solidFill>
-                        <a:latin typeface="Arial" panose="020B0604020202020204" pitchFamily="34" charset="0"/>
-                        <a:cs typeface="Arial" panose="020B0604020202020204" pitchFamily="34" charset="0"/>
-                      </a:endParaRPr>
                     </a:p>
                   </a:txBody>
                   <a:tcPr marL="93616" marR="93616" marT="46489" marB="46489" anchor="ctr">
@@ -13947,7 +14042,7 @@
                     <a:p>
                       <a:pPr algn="r"/>
                       <a:r>
-                        <a:rPr lang="de-DE" sz="2100" b="0" dirty="0" smtClean="0">
+                        <a:rPr lang="de-DE" sz="2100" b="0" dirty="0">
                           <a:solidFill>
                             <a:schemeClr val="tx1"/>
                           </a:solidFill>
@@ -13956,13 +14051,6 @@
                         </a:rPr>
                         <a:t>100,0</a:t>
                       </a:r>
-                      <a:endParaRPr lang="de-DE" sz="2100" b="0" dirty="0">
-                        <a:solidFill>
-                          <a:schemeClr val="tx1"/>
-                        </a:solidFill>
-                        <a:latin typeface="Arial" panose="020B0604020202020204" pitchFamily="34" charset="0"/>
-                        <a:cs typeface="Arial" panose="020B0604020202020204" pitchFamily="34" charset="0"/>
-                      </a:endParaRPr>
                     </a:p>
                   </a:txBody>
                   <a:tcPr marL="93616" marR="93616" marT="46489" marB="46489" anchor="ctr">
@@ -14125,7 +14213,7 @@
                     <a:lstStyle/>
                     <a:p>
                       <a:r>
-                        <a:rPr lang="de-DE" sz="2100" b="0" i="0" u="none" strike="noStrike" kern="1200" baseline="0" dirty="0" err="1" smtClean="0">
+                        <a:rPr lang="de-DE" sz="2100" b="0" i="0" u="none" strike="noStrike" kern="1200" baseline="0" dirty="0" err="1">
                           <a:solidFill>
                             <a:schemeClr val="dk1"/>
                           </a:solidFill>
@@ -14136,7 +14224,7 @@
                         <a:t>stemwood</a:t>
                       </a:r>
                       <a:r>
-                        <a:rPr lang="de-DE" sz="2100" b="0" i="0" u="none" strike="noStrike" kern="1200" baseline="0" dirty="0" smtClean="0">
+                        <a:rPr lang="de-DE" sz="2100" b="0" i="0" u="none" strike="noStrike" kern="1200" baseline="0" dirty="0">
                           <a:solidFill>
                             <a:schemeClr val="dk1"/>
                           </a:solidFill>
@@ -14204,7 +14292,7 @@
                     <a:p>
                       <a:pPr algn="r"/>
                       <a:r>
-                        <a:rPr lang="de-DE" sz="2100" b="0" smtClean="0">
+                        <a:rPr lang="de-DE" sz="2100" b="0">
                           <a:solidFill>
                             <a:schemeClr val="tx1"/>
                           </a:solidFill>
@@ -14271,7 +14359,7 @@
                     <a:p>
                       <a:pPr algn="r"/>
                       <a:r>
-                        <a:rPr lang="de-DE" sz="2100" b="0" smtClean="0">
+                        <a:rPr lang="de-DE" sz="2100" b="0">
                           <a:solidFill>
                             <a:schemeClr val="tx1"/>
                           </a:solidFill>
@@ -14338,7 +14426,7 @@
                     <a:p>
                       <a:pPr algn="r"/>
                       <a:r>
-                        <a:rPr lang="de-DE" sz="2100" b="0" dirty="0" smtClean="0">
+                        <a:rPr lang="de-DE" sz="2100" b="0" dirty="0">
                           <a:solidFill>
                             <a:schemeClr val="tx1"/>
                           </a:solidFill>
@@ -14347,13 +14435,6 @@
                         </a:rPr>
                         <a:t>100,0</a:t>
                       </a:r>
-                      <a:endParaRPr lang="de-DE" sz="2100" b="0" dirty="0">
-                        <a:solidFill>
-                          <a:schemeClr val="tx1"/>
-                        </a:solidFill>
-                        <a:latin typeface="Arial" panose="020B0604020202020204" pitchFamily="34" charset="0"/>
-                        <a:cs typeface="Arial" panose="020B0604020202020204" pitchFamily="34" charset="0"/>
-                      </a:endParaRPr>
                     </a:p>
                   </a:txBody>
                   <a:tcPr marL="93616" marR="93616" marT="46489" marB="46489" anchor="ctr">
@@ -14400,6 +14481,11 @@
                     <a:noFill/>
                   </a:tcPr>
                 </a:tc>
+                <a:extLst>
+                  <a:ext uri="{0D108BD9-81ED-4DB2-BD59-A6C34878D82A}">
+                    <a16:rowId xmlns:a16="http://schemas.microsoft.com/office/drawing/2014/main" val="10008"/>
+                  </a:ext>
+                </a:extLst>
               </a:tr>
               <a:tr h="512486">
                 <a:tc>
@@ -14462,7 +14548,7 @@
                     <a:lstStyle/>
                     <a:p>
                       <a:r>
-                        <a:rPr lang="de-DE" sz="2100" b="0" i="0" u="none" strike="noStrike" kern="1200" baseline="0" dirty="0" err="1" smtClean="0">
+                        <a:rPr lang="de-DE" sz="2100" b="0" i="0" u="none" strike="noStrike" kern="1200" baseline="0" dirty="0" err="1">
                           <a:solidFill>
                             <a:schemeClr val="dk1"/>
                           </a:solidFill>
@@ -14473,7 +14559,7 @@
                         <a:t>stemwood</a:t>
                       </a:r>
                       <a:r>
-                        <a:rPr lang="de-DE" sz="2100" b="0" i="0" u="none" strike="noStrike" kern="1200" baseline="0" dirty="0" smtClean="0">
+                        <a:rPr lang="de-DE" sz="2100" b="0" i="0" u="none" strike="noStrike" kern="1200" baseline="0" dirty="0">
                           <a:solidFill>
                             <a:schemeClr val="dk1"/>
                           </a:solidFill>
@@ -14541,7 +14627,7 @@
                     <a:p>
                       <a:pPr algn="r"/>
                       <a:r>
-                        <a:rPr lang="de-DE" sz="2100" b="0" dirty="0" smtClean="0">
+                        <a:rPr lang="de-DE" sz="2100" b="0" dirty="0">
                           <a:solidFill>
                             <a:schemeClr val="tx1"/>
                           </a:solidFill>
@@ -14550,13 +14636,6 @@
                         </a:rPr>
                         <a:t>100,0</a:t>
                       </a:r>
-                      <a:endParaRPr lang="de-DE" sz="2100" b="0" dirty="0">
-                        <a:solidFill>
-                          <a:schemeClr val="tx1"/>
-                        </a:solidFill>
-                        <a:latin typeface="Arial" panose="020B0604020202020204" pitchFamily="34" charset="0"/>
-                        <a:cs typeface="Arial" panose="020B0604020202020204" pitchFamily="34" charset="0"/>
-                      </a:endParaRPr>
                     </a:p>
                   </a:txBody>
                   <a:tcPr marL="93616" marR="93616" marT="46489" marB="46489" anchor="ctr">
@@ -14608,7 +14687,7 @@
                     <a:p>
                       <a:pPr algn="r"/>
                       <a:r>
-                        <a:rPr lang="de-DE" sz="2100" b="0" dirty="0" smtClean="0">
+                        <a:rPr lang="de-DE" sz="2100" b="0" dirty="0">
                           <a:solidFill>
                             <a:schemeClr val="tx1"/>
                           </a:solidFill>
@@ -14617,13 +14696,6 @@
                         </a:rPr>
                         <a:t>100,0</a:t>
                       </a:r>
-                      <a:endParaRPr lang="de-DE" sz="2100" b="0" dirty="0">
-                        <a:solidFill>
-                          <a:schemeClr val="tx1"/>
-                        </a:solidFill>
-                        <a:latin typeface="Arial" panose="020B0604020202020204" pitchFamily="34" charset="0"/>
-                        <a:cs typeface="Arial" panose="020B0604020202020204" pitchFamily="34" charset="0"/>
-                      </a:endParaRPr>
                     </a:p>
                   </a:txBody>
                   <a:tcPr marL="93616" marR="93616" marT="46489" marB="46489" anchor="ctr">
@@ -14675,7 +14747,7 @@
                     <a:p>
                       <a:pPr algn="r"/>
                       <a:r>
-                        <a:rPr lang="de-DE" sz="2100" b="0" dirty="0" smtClean="0">
+                        <a:rPr lang="de-DE" sz="2100" b="0" dirty="0">
                           <a:solidFill>
                             <a:schemeClr val="tx1"/>
                           </a:solidFill>
@@ -14684,13 +14756,6 @@
                         </a:rPr>
                         <a:t>100,0</a:t>
                       </a:r>
-                      <a:endParaRPr lang="de-DE" sz="2100" b="0" dirty="0">
-                        <a:solidFill>
-                          <a:schemeClr val="tx1"/>
-                        </a:solidFill>
-                        <a:latin typeface="Arial" panose="020B0604020202020204" pitchFamily="34" charset="0"/>
-                        <a:cs typeface="Arial" panose="020B0604020202020204" pitchFamily="34" charset="0"/>
-                      </a:endParaRPr>
                     </a:p>
                   </a:txBody>
                   <a:tcPr marL="93616" marR="93616" marT="46489" marB="46489" anchor="ctr">
@@ -14849,7 +14914,7 @@
                     <a:lstStyle/>
                     <a:p>
                       <a:r>
-                        <a:rPr lang="de-DE" sz="2100" b="0" i="0" u="none" strike="noStrike" kern="1200" baseline="0" dirty="0" err="1" smtClean="0">
+                        <a:rPr lang="de-DE" sz="2100" b="0" i="0" u="none" strike="noStrike" kern="1200" baseline="0" dirty="0" err="1">
                           <a:solidFill>
                             <a:schemeClr val="dk1"/>
                           </a:solidFill>
@@ -14860,7 +14925,7 @@
                         <a:t>stemwood</a:t>
                       </a:r>
                       <a:r>
-                        <a:rPr lang="de-DE" sz="2100" b="0" i="0" u="none" strike="noStrike" kern="1200" baseline="0" dirty="0" smtClean="0">
+                        <a:rPr lang="de-DE" sz="2100" b="0" i="0" u="none" strike="noStrike" kern="1200" baseline="0" dirty="0">
                           <a:solidFill>
                             <a:schemeClr val="dk1"/>
                           </a:solidFill>
@@ -14926,7 +14991,7 @@
                     <a:p>
                       <a:pPr algn="r"/>
                       <a:r>
-                        <a:rPr lang="de-DE" sz="2100" b="0" dirty="0" smtClean="0">
+                        <a:rPr lang="de-DE" sz="2100" b="0" dirty="0">
                           <a:solidFill>
                             <a:schemeClr val="tx1"/>
                           </a:solidFill>
@@ -14935,13 +15000,6 @@
                         </a:rPr>
                         <a:t>100,0</a:t>
                       </a:r>
-                      <a:endParaRPr lang="de-DE" sz="2100" b="0" dirty="0">
-                        <a:solidFill>
-                          <a:schemeClr val="tx1"/>
-                        </a:solidFill>
-                        <a:latin typeface="Arial" panose="020B0604020202020204" pitchFamily="34" charset="0"/>
-                        <a:cs typeface="Arial" panose="020B0604020202020204" pitchFamily="34" charset="0"/>
-                      </a:endParaRPr>
                     </a:p>
                   </a:txBody>
                   <a:tcPr marL="93616" marR="93616" marT="46489" marB="46489" anchor="ctr">
@@ -14991,7 +15049,7 @@
                     <a:p>
                       <a:pPr algn="r"/>
                       <a:r>
-                        <a:rPr lang="de-DE" sz="2100" b="0" dirty="0" smtClean="0">
+                        <a:rPr lang="de-DE" sz="2100" b="0" dirty="0">
                           <a:solidFill>
                             <a:schemeClr val="tx1"/>
                           </a:solidFill>
@@ -15000,13 +15058,6 @@
                         </a:rPr>
                         <a:t>100,0</a:t>
                       </a:r>
-                      <a:endParaRPr lang="de-DE" sz="2100" b="0" dirty="0">
-                        <a:solidFill>
-                          <a:schemeClr val="tx1"/>
-                        </a:solidFill>
-                        <a:latin typeface="Arial" panose="020B0604020202020204" pitchFamily="34" charset="0"/>
-                        <a:cs typeface="Arial" panose="020B0604020202020204" pitchFamily="34" charset="0"/>
-                      </a:endParaRPr>
                     </a:p>
                   </a:txBody>
                   <a:tcPr marL="93616" marR="93616" marT="46489" marB="46489" anchor="ctr">
@@ -15056,7 +15107,7 @@
                     <a:p>
                       <a:pPr algn="r"/>
                       <a:r>
-                        <a:rPr lang="de-DE" sz="2100" b="0" dirty="0" smtClean="0">
+                        <a:rPr lang="de-DE" sz="2100" b="0" dirty="0">
                           <a:solidFill>
                             <a:schemeClr val="tx1"/>
                           </a:solidFill>
@@ -15065,13 +15116,6 @@
                         </a:rPr>
                         <a:t>100,0</a:t>
                       </a:r>
-                      <a:endParaRPr lang="de-DE" sz="2100" b="0" dirty="0">
-                        <a:solidFill>
-                          <a:schemeClr val="tx1"/>
-                        </a:solidFill>
-                        <a:latin typeface="Arial" panose="020B0604020202020204" pitchFamily="34" charset="0"/>
-                        <a:cs typeface="Arial" panose="020B0604020202020204" pitchFamily="34" charset="0"/>
-                      </a:endParaRPr>
                     </a:p>
                   </a:txBody>
                   <a:tcPr marL="93616" marR="93616" marT="46489" marB="46489" anchor="ctr">
@@ -15116,6 +15160,11 @@
                     <a:noFill/>
                   </a:tcPr>
                 </a:tc>
+                <a:extLst>
+                  <a:ext uri="{0D108BD9-81ED-4DB2-BD59-A6C34878D82A}">
+                    <a16:rowId xmlns:a16="http://schemas.microsoft.com/office/drawing/2014/main" val="10009"/>
+                  </a:ext>
+                </a:extLst>
               </a:tr>
               <a:tr h="512486">
                 <a:tc>
@@ -15180,7 +15229,7 @@
                     <a:lstStyle/>
                     <a:p>
                       <a:r>
-                        <a:rPr lang="de-DE" sz="2100" b="0" i="0" u="none" strike="noStrike" kern="1200" baseline="0" dirty="0" err="1" smtClean="0">
+                        <a:rPr lang="de-DE" sz="2100" b="0" i="0" u="none" strike="noStrike" kern="1200" baseline="0" dirty="0" err="1">
                           <a:solidFill>
                             <a:schemeClr val="dk1"/>
                           </a:solidFill>
@@ -15191,7 +15240,7 @@
                         <a:t>stemwood</a:t>
                       </a:r>
                       <a:r>
-                        <a:rPr lang="de-DE" sz="2100" b="0" i="0" u="none" strike="noStrike" kern="1200" baseline="0" dirty="0" smtClean="0">
+                        <a:rPr lang="de-DE" sz="2100" b="0" i="0" u="none" strike="noStrike" kern="1200" baseline="0" dirty="0">
                           <a:solidFill>
                             <a:schemeClr val="dk1"/>
                           </a:solidFill>
@@ -15261,7 +15310,7 @@
                     <a:p>
                       <a:pPr algn="r"/>
                       <a:r>
-                        <a:rPr lang="de-DE" sz="2100" b="0" dirty="0" smtClean="0">
+                        <a:rPr lang="de-DE" sz="2100" b="0" dirty="0">
                           <a:solidFill>
                             <a:schemeClr val="tx1"/>
                           </a:solidFill>
@@ -15270,13 +15319,6 @@
                         </a:rPr>
                         <a:t>100,0</a:t>
                       </a:r>
-                      <a:endParaRPr lang="de-DE" sz="2100" b="0" dirty="0">
-                        <a:solidFill>
-                          <a:schemeClr val="tx1"/>
-                        </a:solidFill>
-                        <a:latin typeface="Arial" panose="020B0604020202020204" pitchFamily="34" charset="0"/>
-                        <a:cs typeface="Arial" panose="020B0604020202020204" pitchFamily="34" charset="0"/>
-                      </a:endParaRPr>
                     </a:p>
                   </a:txBody>
                   <a:tcPr marL="93616" marR="93616" marT="46489" marB="46489" anchor="ctr">
@@ -15330,7 +15372,7 @@
                     <a:p>
                       <a:pPr algn="r"/>
                       <a:r>
-                        <a:rPr lang="de-DE" sz="2100" b="0" dirty="0" smtClean="0">
+                        <a:rPr lang="de-DE" sz="2100" b="0" dirty="0">
                           <a:solidFill>
                             <a:schemeClr val="tx1"/>
                           </a:solidFill>
@@ -15339,13 +15381,6 @@
                         </a:rPr>
                         <a:t>100,0</a:t>
                       </a:r>
-                      <a:endParaRPr lang="de-DE" sz="2100" b="0" dirty="0">
-                        <a:solidFill>
-                          <a:schemeClr val="tx1"/>
-                        </a:solidFill>
-                        <a:latin typeface="Arial" panose="020B0604020202020204" pitchFamily="34" charset="0"/>
-                        <a:cs typeface="Arial" panose="020B0604020202020204" pitchFamily="34" charset="0"/>
-                      </a:endParaRPr>
                     </a:p>
                   </a:txBody>
                   <a:tcPr marL="93616" marR="93616" marT="46489" marB="46489" anchor="ctr">
@@ -15399,7 +15434,7 @@
                     <a:p>
                       <a:pPr algn="r"/>
                       <a:r>
-                        <a:rPr lang="de-DE" sz="2100" b="0" dirty="0" smtClean="0">
+                        <a:rPr lang="de-DE" sz="2100" b="0" dirty="0">
                           <a:solidFill>
                             <a:schemeClr val="tx1"/>
                           </a:solidFill>
@@ -15408,13 +15443,6 @@
                         </a:rPr>
                         <a:t>100,0</a:t>
                       </a:r>
-                      <a:endParaRPr lang="de-DE" sz="2100" b="0" dirty="0">
-                        <a:solidFill>
-                          <a:schemeClr val="tx1"/>
-                        </a:solidFill>
-                        <a:latin typeface="Arial" panose="020B0604020202020204" pitchFamily="34" charset="0"/>
-                        <a:cs typeface="Arial" panose="020B0604020202020204" pitchFamily="34" charset="0"/>
-                      </a:endParaRPr>
                     </a:p>
                   </a:txBody>
                   <a:tcPr marL="93616" marR="93616" marT="46489" marB="46489" anchor="ctr">
@@ -15575,7 +15603,7 @@
                     <a:lstStyle/>
                     <a:p>
                       <a:r>
-                        <a:rPr lang="de-DE" sz="2100" b="0" i="0" u="none" strike="noStrike" kern="1200" baseline="0" dirty="0" err="1" smtClean="0">
+                        <a:rPr lang="de-DE" sz="2100" b="0" i="0" u="none" strike="noStrike" kern="1200" baseline="0" dirty="0" err="1">
                           <a:solidFill>
                             <a:schemeClr val="dk1"/>
                           </a:solidFill>
@@ -15586,7 +15614,7 @@
                         <a:t>stemwood</a:t>
                       </a:r>
                       <a:r>
-                        <a:rPr lang="de-DE" sz="2100" b="0" i="0" u="none" strike="noStrike" kern="1200" baseline="0" dirty="0" smtClean="0">
+                        <a:rPr lang="de-DE" sz="2100" b="0" i="0" u="none" strike="noStrike" kern="1200" baseline="0" dirty="0">
                           <a:solidFill>
                             <a:schemeClr val="dk1"/>
                           </a:solidFill>
@@ -15652,7 +15680,7 @@
                     <a:p>
                       <a:pPr algn="r"/>
                       <a:r>
-                        <a:rPr lang="de-DE" sz="2100" b="0" smtClean="0">
+                        <a:rPr lang="de-DE" sz="2100" b="0">
                           <a:solidFill>
                             <a:schemeClr val="tx1"/>
                           </a:solidFill>
@@ -15717,7 +15745,7 @@
                     <a:p>
                       <a:pPr algn="r"/>
                       <a:r>
-                        <a:rPr lang="de-DE" sz="2100" b="0" dirty="0" smtClean="0">
+                        <a:rPr lang="de-DE" sz="2100" b="0" dirty="0">
                           <a:solidFill>
                             <a:schemeClr val="tx1"/>
                           </a:solidFill>
@@ -15726,13 +15754,6 @@
                         </a:rPr>
                         <a:t>100,0</a:t>
                       </a:r>
-                      <a:endParaRPr lang="de-DE" sz="2100" b="0" dirty="0">
-                        <a:solidFill>
-                          <a:schemeClr val="tx1"/>
-                        </a:solidFill>
-                        <a:latin typeface="Arial" panose="020B0604020202020204" pitchFamily="34" charset="0"/>
-                        <a:cs typeface="Arial" panose="020B0604020202020204" pitchFamily="34" charset="0"/>
-                      </a:endParaRPr>
                     </a:p>
                   </a:txBody>
                   <a:tcPr marL="93616" marR="93616" marT="46489" marB="46489" anchor="ctr">
@@ -15782,7 +15803,7 @@
                     <a:p>
                       <a:pPr algn="r"/>
                       <a:r>
-                        <a:rPr lang="de-DE" sz="2100" b="0" dirty="0" smtClean="0">
+                        <a:rPr lang="de-DE" sz="2100" b="0" dirty="0">
                           <a:solidFill>
                             <a:schemeClr val="tx1"/>
                           </a:solidFill>
@@ -15791,13 +15812,6 @@
                         </a:rPr>
                         <a:t>100,0</a:t>
                       </a:r>
-                      <a:endParaRPr lang="de-DE" sz="2100" b="0" dirty="0">
-                        <a:solidFill>
-                          <a:schemeClr val="tx1"/>
-                        </a:solidFill>
-                        <a:latin typeface="Arial" panose="020B0604020202020204" pitchFamily="34" charset="0"/>
-                        <a:cs typeface="Arial" panose="020B0604020202020204" pitchFamily="34" charset="0"/>
-                      </a:endParaRPr>
                     </a:p>
                   </a:txBody>
                   <a:tcPr marL="93616" marR="93616" marT="46489" marB="46489" anchor="ctr">
@@ -15842,6 +15856,11 @@
                     <a:noFill/>
                   </a:tcPr>
                 </a:tc>
+                <a:extLst>
+                  <a:ext uri="{0D108BD9-81ED-4DB2-BD59-A6C34878D82A}">
+                    <a16:rowId xmlns:a16="http://schemas.microsoft.com/office/drawing/2014/main" val="10010"/>
+                  </a:ext>
+                </a:extLst>
               </a:tr>
               <a:tr h="512486">
                 <a:tc>
@@ -15906,7 +15925,7 @@
                     <a:lstStyle/>
                     <a:p>
                       <a:r>
-                        <a:rPr lang="de-DE" sz="2100" b="0" i="0" u="none" strike="noStrike" kern="1200" baseline="0" dirty="0" err="1" smtClean="0">
+                        <a:rPr lang="de-DE" sz="2100" b="0" i="0" u="none" strike="noStrike" kern="1200" baseline="0" dirty="0" err="1">
                           <a:solidFill>
                             <a:schemeClr val="dk1"/>
                           </a:solidFill>
@@ -15917,7 +15936,7 @@
                         <a:t>stemwood</a:t>
                       </a:r>
                       <a:r>
-                        <a:rPr lang="de-DE" sz="2100" b="0" i="0" u="none" strike="noStrike" kern="1200" baseline="0" dirty="0" smtClean="0">
+                        <a:rPr lang="de-DE" sz="2100" b="0" i="0" u="none" strike="noStrike" kern="1200" baseline="0" dirty="0">
                           <a:solidFill>
                             <a:schemeClr val="dk1"/>
                           </a:solidFill>
@@ -15987,7 +16006,7 @@
                     <a:p>
                       <a:pPr algn="r"/>
                       <a:r>
-                        <a:rPr lang="de-DE" sz="2100" b="0" dirty="0" smtClean="0">
+                        <a:rPr lang="de-DE" sz="2100" b="0" dirty="0">
                           <a:solidFill>
                             <a:schemeClr val="tx1"/>
                           </a:solidFill>
@@ -15996,13 +16015,6 @@
                         </a:rPr>
                         <a:t>100,0</a:t>
                       </a:r>
-                      <a:endParaRPr lang="de-DE" sz="2100" b="0" dirty="0">
-                        <a:solidFill>
-                          <a:schemeClr val="tx1"/>
-                        </a:solidFill>
-                        <a:latin typeface="Arial" panose="020B0604020202020204" pitchFamily="34" charset="0"/>
-                        <a:cs typeface="Arial" panose="020B0604020202020204" pitchFamily="34" charset="0"/>
-                      </a:endParaRPr>
                     </a:p>
                   </a:txBody>
                   <a:tcPr marL="93616" marR="93616" marT="46489" marB="46489" anchor="ctr">
@@ -16056,7 +16068,7 @@
                     <a:p>
                       <a:pPr algn="r"/>
                       <a:r>
-                        <a:rPr lang="de-DE" sz="2100" b="0" dirty="0" smtClean="0">
+                        <a:rPr lang="de-DE" sz="2100" b="0" dirty="0">
                           <a:solidFill>
                             <a:schemeClr val="tx1"/>
                           </a:solidFill>
@@ -16065,13 +16077,6 @@
                         </a:rPr>
                         <a:t>100,0</a:t>
                       </a:r>
-                      <a:endParaRPr lang="de-DE" sz="2100" b="0" dirty="0">
-                        <a:solidFill>
-                          <a:schemeClr val="tx1"/>
-                        </a:solidFill>
-                        <a:latin typeface="Arial" panose="020B0604020202020204" pitchFamily="34" charset="0"/>
-                        <a:cs typeface="Arial" panose="020B0604020202020204" pitchFamily="34" charset="0"/>
-                      </a:endParaRPr>
                     </a:p>
                   </a:txBody>
                   <a:tcPr marL="93616" marR="93616" marT="46489" marB="46489" anchor="ctr">
@@ -16125,7 +16130,7 @@
                     <a:p>
                       <a:pPr algn="r"/>
                       <a:r>
-                        <a:rPr lang="de-DE" sz="2100" b="0" dirty="0" smtClean="0">
+                        <a:rPr lang="de-DE" sz="2100" b="0" dirty="0">
                           <a:solidFill>
                             <a:schemeClr val="tx1"/>
                           </a:solidFill>
@@ -16134,13 +16139,6 @@
                         </a:rPr>
                         <a:t>100,0</a:t>
                       </a:r>
-                      <a:endParaRPr lang="de-DE" sz="2100" b="0" dirty="0">
-                        <a:solidFill>
-                          <a:schemeClr val="tx1"/>
-                        </a:solidFill>
-                        <a:latin typeface="Arial" panose="020B0604020202020204" pitchFamily="34" charset="0"/>
-                        <a:cs typeface="Arial" panose="020B0604020202020204" pitchFamily="34" charset="0"/>
-                      </a:endParaRPr>
                     </a:p>
                   </a:txBody>
                   <a:tcPr marL="93616" marR="93616" marT="46489" marB="46489" anchor="ctr">
@@ -16301,7 +16299,7 @@
                     <a:lstStyle/>
                     <a:p>
                       <a:r>
-                        <a:rPr lang="de-DE" sz="2100" b="0" i="0" u="none" strike="noStrike" kern="1200" baseline="0" dirty="0" err="1" smtClean="0">
+                        <a:rPr lang="de-DE" sz="2100" b="0" i="0" u="none" strike="noStrike" kern="1200" baseline="0" dirty="0" err="1">
                           <a:solidFill>
                             <a:schemeClr val="dk1"/>
                           </a:solidFill>
@@ -16312,7 +16310,7 @@
                         <a:t>stemwood</a:t>
                       </a:r>
                       <a:r>
-                        <a:rPr lang="de-DE" sz="2100" b="0" i="0" u="none" strike="noStrike" kern="1200" baseline="0" dirty="0" smtClean="0">
+                        <a:rPr lang="de-DE" sz="2100" b="0" i="0" u="none" strike="noStrike" kern="1200" baseline="0" dirty="0">
                           <a:solidFill>
                             <a:schemeClr val="dk1"/>
                           </a:solidFill>
@@ -16378,7 +16376,7 @@
                     <a:p>
                       <a:pPr algn="r"/>
                       <a:r>
-                        <a:rPr lang="de-DE" sz="2100" b="0" dirty="0" smtClean="0">
+                        <a:rPr lang="de-DE" sz="2100" b="0" dirty="0">
                           <a:solidFill>
                             <a:schemeClr val="tx1"/>
                           </a:solidFill>
@@ -16387,13 +16385,6 @@
                         </a:rPr>
                         <a:t>100,0</a:t>
                       </a:r>
-                      <a:endParaRPr lang="de-DE" sz="2100" b="0" dirty="0">
-                        <a:solidFill>
-                          <a:schemeClr val="tx1"/>
-                        </a:solidFill>
-                        <a:latin typeface="Arial" panose="020B0604020202020204" pitchFamily="34" charset="0"/>
-                        <a:cs typeface="Arial" panose="020B0604020202020204" pitchFamily="34" charset="0"/>
-                      </a:endParaRPr>
                     </a:p>
                   </a:txBody>
                   <a:tcPr marL="93616" marR="93616" marT="46489" marB="46489" anchor="ctr">
@@ -16443,7 +16434,7 @@
                     <a:p>
                       <a:pPr algn="r"/>
                       <a:r>
-                        <a:rPr lang="de-DE" sz="2100" b="0" dirty="0" smtClean="0">
+                        <a:rPr lang="de-DE" sz="2100" b="0" dirty="0">
                           <a:solidFill>
                             <a:schemeClr val="tx1"/>
                           </a:solidFill>
@@ -16452,13 +16443,6 @@
                         </a:rPr>
                         <a:t>100,0</a:t>
                       </a:r>
-                      <a:endParaRPr lang="de-DE" sz="2100" b="0" dirty="0">
-                        <a:solidFill>
-                          <a:schemeClr val="tx1"/>
-                        </a:solidFill>
-                        <a:latin typeface="Arial" panose="020B0604020202020204" pitchFamily="34" charset="0"/>
-                        <a:cs typeface="Arial" panose="020B0604020202020204" pitchFamily="34" charset="0"/>
-                      </a:endParaRPr>
                     </a:p>
                   </a:txBody>
                   <a:tcPr marL="93616" marR="93616" marT="46489" marB="46489" anchor="ctr">
@@ -16508,7 +16492,7 @@
                     <a:p>
                       <a:pPr algn="r"/>
                       <a:r>
-                        <a:rPr lang="de-DE" sz="2100" b="0" dirty="0" smtClean="0">
+                        <a:rPr lang="de-DE" sz="2100" b="0" dirty="0">
                           <a:solidFill>
                             <a:schemeClr val="tx1"/>
                           </a:solidFill>
@@ -16517,13 +16501,6 @@
                         </a:rPr>
                         <a:t>100,0</a:t>
                       </a:r>
-                      <a:endParaRPr lang="de-DE" sz="2100" b="0" dirty="0">
-                        <a:solidFill>
-                          <a:schemeClr val="tx1"/>
-                        </a:solidFill>
-                        <a:latin typeface="Arial" panose="020B0604020202020204" pitchFamily="34" charset="0"/>
-                        <a:cs typeface="Arial" panose="020B0604020202020204" pitchFamily="34" charset="0"/>
-                      </a:endParaRPr>
                     </a:p>
                   </a:txBody>
                   <a:tcPr marL="93616" marR="93616" marT="46489" marB="46489" anchor="ctr">
@@ -16568,6 +16545,11 @@
                     <a:noFill/>
                   </a:tcPr>
                 </a:tc>
+                <a:extLst>
+                  <a:ext uri="{0D108BD9-81ED-4DB2-BD59-A6C34878D82A}">
+                    <a16:rowId xmlns:a16="http://schemas.microsoft.com/office/drawing/2014/main" val="10011"/>
+                  </a:ext>
+                </a:extLst>
               </a:tr>
               <a:tr h="512486">
                 <a:tc>
@@ -16634,7 +16616,7 @@
                     <a:lstStyle/>
                     <a:p>
                       <a:r>
-                        <a:rPr lang="de-DE" sz="2100" b="0" i="0" u="none" strike="noStrike" kern="1200" baseline="0" dirty="0" err="1" smtClean="0">
+                        <a:rPr lang="de-DE" sz="2100" b="0" i="0" u="none" strike="noStrike" kern="1200" baseline="0" dirty="0" err="1">
                           <a:solidFill>
                             <a:schemeClr val="dk1"/>
                           </a:solidFill>
@@ -16645,7 +16627,7 @@
                         <a:t>stemwood</a:t>
                       </a:r>
                       <a:r>
-                        <a:rPr lang="de-DE" sz="2100" b="0" i="0" u="none" strike="noStrike" kern="1200" baseline="0" dirty="0" smtClean="0">
+                        <a:rPr lang="de-DE" sz="2100" b="0" i="0" u="none" strike="noStrike" kern="1200" baseline="0" dirty="0">
                           <a:solidFill>
                             <a:schemeClr val="dk1"/>
                           </a:solidFill>
@@ -16717,7 +16699,7 @@
                     <a:p>
                       <a:pPr algn="r"/>
                       <a:r>
-                        <a:rPr lang="de-DE" sz="2100" b="0" dirty="0" smtClean="0">
+                        <a:rPr lang="de-DE" sz="2100" b="0" dirty="0">
                           <a:solidFill>
                             <a:schemeClr val="tx1"/>
                           </a:solidFill>
@@ -16726,13 +16708,6 @@
                         </a:rPr>
                         <a:t>100,0</a:t>
                       </a:r>
-                      <a:endParaRPr lang="de-DE" sz="2100" b="0" dirty="0">
-                        <a:solidFill>
-                          <a:schemeClr val="tx1"/>
-                        </a:solidFill>
-                        <a:latin typeface="Arial" panose="020B0604020202020204" pitchFamily="34" charset="0"/>
-                        <a:cs typeface="Arial" panose="020B0604020202020204" pitchFamily="34" charset="0"/>
-                      </a:endParaRPr>
                     </a:p>
                   </a:txBody>
                   <a:tcPr marL="93616" marR="93616" marT="46489" marB="46489" anchor="ctr">
@@ -16788,7 +16763,7 @@
                     <a:p>
                       <a:pPr algn="r"/>
                       <a:r>
-                        <a:rPr lang="de-DE" sz="2100" b="0" dirty="0" smtClean="0">
+                        <a:rPr lang="de-DE" sz="2100" b="0" dirty="0">
                           <a:solidFill>
                             <a:schemeClr val="tx1"/>
                           </a:solidFill>
@@ -16797,13 +16772,6 @@
                         </a:rPr>
                         <a:t>100,0</a:t>
                       </a:r>
-                      <a:endParaRPr lang="de-DE" sz="2100" b="0" dirty="0">
-                        <a:solidFill>
-                          <a:schemeClr val="tx1"/>
-                        </a:solidFill>
-                        <a:latin typeface="Arial" panose="020B0604020202020204" pitchFamily="34" charset="0"/>
-                        <a:cs typeface="Arial" panose="020B0604020202020204" pitchFamily="34" charset="0"/>
-                      </a:endParaRPr>
                     </a:p>
                   </a:txBody>
                   <a:tcPr marL="93616" marR="93616" marT="46489" marB="46489" anchor="ctr">
@@ -16859,7 +16827,7 @@
                     <a:p>
                       <a:pPr algn="r"/>
                       <a:r>
-                        <a:rPr lang="de-DE" sz="2100" b="0" dirty="0" smtClean="0">
+                        <a:rPr lang="de-DE" sz="2100" b="0" dirty="0">
                           <a:solidFill>
                             <a:schemeClr val="tx1"/>
                           </a:solidFill>
@@ -16868,13 +16836,6 @@
                         </a:rPr>
                         <a:t>100,0</a:t>
                       </a:r>
-                      <a:endParaRPr lang="de-DE" sz="2100" b="0" dirty="0">
-                        <a:solidFill>
-                          <a:schemeClr val="tx1"/>
-                        </a:solidFill>
-                        <a:latin typeface="Arial" panose="020B0604020202020204" pitchFamily="34" charset="0"/>
-                        <a:cs typeface="Arial" panose="020B0604020202020204" pitchFamily="34" charset="0"/>
-                      </a:endParaRPr>
                     </a:p>
                   </a:txBody>
                   <a:tcPr marL="93616" marR="93616" marT="46489" marB="46489" anchor="ctr">
@@ -17039,7 +17000,7 @@
                     <a:lstStyle/>
                     <a:p>
                       <a:r>
-                        <a:rPr lang="de-DE" sz="2100" b="0" i="0" u="none" strike="noStrike" kern="1200" baseline="0" dirty="0" err="1" smtClean="0">
+                        <a:rPr lang="de-DE" sz="2100" b="0" i="0" u="none" strike="noStrike" kern="1200" baseline="0" dirty="0" err="1">
                           <a:solidFill>
                             <a:schemeClr val="dk1"/>
                           </a:solidFill>
@@ -17050,7 +17011,7 @@
                         <a:t>stemwood</a:t>
                       </a:r>
                       <a:r>
-                        <a:rPr lang="de-DE" sz="2100" b="0" i="0" u="none" strike="noStrike" kern="1200" baseline="0" dirty="0" smtClean="0">
+                        <a:rPr lang="de-DE" sz="2100" b="0" i="0" u="none" strike="noStrike" kern="1200" baseline="0" dirty="0">
                           <a:solidFill>
                             <a:schemeClr val="dk1"/>
                           </a:solidFill>
@@ -17118,7 +17079,7 @@
                     <a:p>
                       <a:pPr algn="r"/>
                       <a:r>
-                        <a:rPr lang="de-DE" sz="2100" b="0" smtClean="0">
+                        <a:rPr lang="de-DE" sz="2100" b="0">
                           <a:solidFill>
                             <a:schemeClr val="tx1"/>
                           </a:solidFill>
@@ -17185,7 +17146,7 @@
                     <a:p>
                       <a:pPr algn="r"/>
                       <a:r>
-                        <a:rPr lang="de-DE" sz="2100" b="0" dirty="0" smtClean="0">
+                        <a:rPr lang="de-DE" sz="2100" b="0" dirty="0">
                           <a:solidFill>
                             <a:schemeClr val="tx1"/>
                           </a:solidFill>
@@ -17194,13 +17155,6 @@
                         </a:rPr>
                         <a:t>100,0</a:t>
                       </a:r>
-                      <a:endParaRPr lang="de-DE" sz="2100" b="0" dirty="0">
-                        <a:solidFill>
-                          <a:schemeClr val="tx1"/>
-                        </a:solidFill>
-                        <a:latin typeface="Arial" panose="020B0604020202020204" pitchFamily="34" charset="0"/>
-                        <a:cs typeface="Arial" panose="020B0604020202020204" pitchFamily="34" charset="0"/>
-                      </a:endParaRPr>
                     </a:p>
                   </a:txBody>
                   <a:tcPr marL="93616" marR="93616" marT="46489" marB="46489" anchor="ctr">
@@ -17252,7 +17206,7 @@
                     <a:p>
                       <a:pPr algn="r"/>
                       <a:r>
-                        <a:rPr lang="de-DE" sz="2100" b="0" dirty="0" smtClean="0">
+                        <a:rPr lang="de-DE" sz="2100" b="0" dirty="0">
                           <a:solidFill>
                             <a:schemeClr val="tx1"/>
                           </a:solidFill>
@@ -17261,13 +17215,6 @@
                         </a:rPr>
                         <a:t>100,0</a:t>
                       </a:r>
-                      <a:endParaRPr lang="de-DE" sz="2100" b="0" dirty="0">
-                        <a:solidFill>
-                          <a:schemeClr val="tx1"/>
-                        </a:solidFill>
-                        <a:latin typeface="Arial" panose="020B0604020202020204" pitchFamily="34" charset="0"/>
-                        <a:cs typeface="Arial" panose="020B0604020202020204" pitchFamily="34" charset="0"/>
-                      </a:endParaRPr>
                     </a:p>
                   </a:txBody>
                   <a:tcPr marL="93616" marR="93616" marT="46489" marB="46489" anchor="ctr">
@@ -17314,6 +17261,11 @@
                     <a:noFill/>
                   </a:tcPr>
                 </a:tc>
+                <a:extLst>
+                  <a:ext uri="{0D108BD9-81ED-4DB2-BD59-A6C34878D82A}">
+                    <a16:rowId xmlns:a16="http://schemas.microsoft.com/office/drawing/2014/main" val="10012"/>
+                  </a:ext>
+                </a:extLst>
               </a:tr>
               <a:tr h="512486">
                 <a:tc>
@@ -17380,7 +17332,7 @@
                     <a:lstStyle/>
                     <a:p>
                       <a:r>
-                        <a:rPr lang="de-DE" sz="2100" b="1" i="0" u="none" strike="noStrike" kern="1200" baseline="0" dirty="0" smtClean="0">
+                        <a:rPr lang="de-DE" sz="2100" b="1" i="0" u="none" strike="noStrike" kern="1200" baseline="0" dirty="0">
                           <a:solidFill>
                             <a:schemeClr val="dk1"/>
                           </a:solidFill>
@@ -17452,7 +17404,7 @@
                     <a:p>
                       <a:pPr algn="r"/>
                       <a:r>
-                        <a:rPr lang="de-DE" sz="2100" b="1" dirty="0" smtClean="0">
+                        <a:rPr lang="de-DE" sz="2100" b="1" dirty="0">
                           <a:solidFill>
                             <a:schemeClr val="tx1"/>
                           </a:solidFill>
@@ -17461,13 +17413,6 @@
                         </a:rPr>
                         <a:t>100,0</a:t>
                       </a:r>
-                      <a:endParaRPr lang="de-DE" sz="2100" b="1" dirty="0">
-                        <a:solidFill>
-                          <a:schemeClr val="tx1"/>
-                        </a:solidFill>
-                        <a:latin typeface="Arial" panose="020B0604020202020204" pitchFamily="34" charset="0"/>
-                        <a:cs typeface="Arial" panose="020B0604020202020204" pitchFamily="34" charset="0"/>
-                      </a:endParaRPr>
                     </a:p>
                   </a:txBody>
                   <a:tcPr marL="93616" marR="93616" marT="46489" marB="46489" anchor="ctr">
@@ -17523,7 +17468,7 @@
                     <a:p>
                       <a:pPr algn="r"/>
                       <a:r>
-                        <a:rPr lang="de-DE" sz="2100" b="1" dirty="0" smtClean="0">
+                        <a:rPr lang="de-DE" sz="2100" b="1" dirty="0">
                           <a:solidFill>
                             <a:schemeClr val="tx1"/>
                           </a:solidFill>
@@ -17532,13 +17477,6 @@
                         </a:rPr>
                         <a:t>100,0</a:t>
                       </a:r>
-                      <a:endParaRPr lang="de-DE" sz="2100" b="1" dirty="0">
-                        <a:solidFill>
-                          <a:schemeClr val="tx1"/>
-                        </a:solidFill>
-                        <a:latin typeface="Arial" panose="020B0604020202020204" pitchFamily="34" charset="0"/>
-                        <a:cs typeface="Arial" panose="020B0604020202020204" pitchFamily="34" charset="0"/>
-                      </a:endParaRPr>
                     </a:p>
                   </a:txBody>
                   <a:tcPr marL="93616" marR="93616" marT="46489" marB="46489" anchor="ctr">
@@ -17594,7 +17532,7 @@
                     <a:p>
                       <a:pPr algn="r"/>
                       <a:r>
-                        <a:rPr lang="de-DE" sz="2100" b="1" dirty="0" smtClean="0">
+                        <a:rPr lang="de-DE" sz="2100" b="1" dirty="0">
                           <a:solidFill>
                             <a:schemeClr val="tx1"/>
                           </a:solidFill>
@@ -17603,13 +17541,6 @@
                         </a:rPr>
                         <a:t>100,0</a:t>
                       </a:r>
-                      <a:endParaRPr lang="de-DE" sz="2100" b="1" dirty="0">
-                        <a:solidFill>
-                          <a:schemeClr val="tx1"/>
-                        </a:solidFill>
-                        <a:latin typeface="Arial" panose="020B0604020202020204" pitchFamily="34" charset="0"/>
-                        <a:cs typeface="Arial" panose="020B0604020202020204" pitchFamily="34" charset="0"/>
-                      </a:endParaRPr>
                     </a:p>
                   </a:txBody>
                   <a:tcPr marL="93616" marR="93616" marT="46489" marB="46489" anchor="ctr">
@@ -17778,7 +17709,7 @@
                     <a:lstStyle/>
                     <a:p>
                       <a:r>
-                        <a:rPr lang="de-DE" sz="2100" b="1" dirty="0" smtClean="0">
+                        <a:rPr lang="de-DE" sz="2100" b="1" dirty="0">
                           <a:solidFill>
                             <a:schemeClr val="tx1"/>
                           </a:solidFill>
@@ -17787,13 +17718,6 @@
                         </a:rPr>
                         <a:t>total</a:t>
                       </a:r>
-                      <a:endParaRPr lang="de-DE" sz="2100" b="1" dirty="0">
-                        <a:solidFill>
-                          <a:schemeClr val="tx1"/>
-                        </a:solidFill>
-                        <a:latin typeface="Arial" panose="020B0604020202020204" pitchFamily="34" charset="0"/>
-                        <a:cs typeface="Arial" panose="020B0604020202020204" pitchFamily="34" charset="0"/>
-                      </a:endParaRPr>
                     </a:p>
                   </a:txBody>
                   <a:tcPr marL="93616" marR="93616" marT="46489" marB="46489" anchor="ctr">
@@ -17849,7 +17773,7 @@
                     <a:p>
                       <a:pPr algn="r"/>
                       <a:r>
-                        <a:rPr lang="de-DE" sz="2100" b="1" dirty="0" smtClean="0">
+                        <a:rPr lang="de-DE" sz="2100" b="1" dirty="0">
                           <a:solidFill>
                             <a:schemeClr val="tx1"/>
                           </a:solidFill>
@@ -17858,13 +17782,6 @@
                         </a:rPr>
                         <a:t>100,0</a:t>
                       </a:r>
-                      <a:endParaRPr lang="de-DE" sz="2100" b="1" dirty="0">
-                        <a:solidFill>
-                          <a:schemeClr val="tx1"/>
-                        </a:solidFill>
-                        <a:latin typeface="Arial" panose="020B0604020202020204" pitchFamily="34" charset="0"/>
-                        <a:cs typeface="Arial" panose="020B0604020202020204" pitchFamily="34" charset="0"/>
-                      </a:endParaRPr>
                     </a:p>
                   </a:txBody>
                   <a:tcPr marL="93616" marR="93616" marT="46489" marB="46489" anchor="ctr">
@@ -17920,7 +17837,7 @@
                     <a:p>
                       <a:pPr algn="r"/>
                       <a:r>
-                        <a:rPr lang="de-DE" sz="2100" b="1" dirty="0" smtClean="0">
+                        <a:rPr lang="de-DE" sz="2100" b="1" dirty="0">
                           <a:solidFill>
                             <a:schemeClr val="tx1"/>
                           </a:solidFill>
@@ -17929,13 +17846,6 @@
                         </a:rPr>
                         <a:t>100,0</a:t>
                       </a:r>
-                      <a:endParaRPr lang="de-DE" sz="2100" b="1" dirty="0">
-                        <a:solidFill>
-                          <a:schemeClr val="tx1"/>
-                        </a:solidFill>
-                        <a:latin typeface="Arial" panose="020B0604020202020204" pitchFamily="34" charset="0"/>
-                        <a:cs typeface="Arial" panose="020B0604020202020204" pitchFamily="34" charset="0"/>
-                      </a:endParaRPr>
                     </a:p>
                   </a:txBody>
                   <a:tcPr marL="93616" marR="93616" marT="46489" marB="46489" anchor="ctr">
@@ -17991,7 +17901,7 @@
                     <a:p>
                       <a:pPr algn="r"/>
                       <a:r>
-                        <a:rPr lang="de-DE" sz="2100" b="1" dirty="0" smtClean="0">
+                        <a:rPr lang="de-DE" sz="2100" b="1" dirty="0">
                           <a:solidFill>
                             <a:schemeClr val="tx1"/>
                           </a:solidFill>
@@ -18000,13 +17910,6 @@
                         </a:rPr>
                         <a:t>100,0</a:t>
                       </a:r>
-                      <a:endParaRPr lang="de-DE" sz="2100" b="1" dirty="0">
-                        <a:solidFill>
-                          <a:schemeClr val="tx1"/>
-                        </a:solidFill>
-                        <a:latin typeface="Arial" panose="020B0604020202020204" pitchFamily="34" charset="0"/>
-                        <a:cs typeface="Arial" panose="020B0604020202020204" pitchFamily="34" charset="0"/>
-                      </a:endParaRPr>
                     </a:p>
                   </a:txBody>
                   <a:tcPr marL="93616" marR="93616" marT="46489" marB="46489" anchor="ctr">
@@ -18057,6 +17960,11 @@
                     </a:solidFill>
                   </a:tcPr>
                 </a:tc>
+                <a:extLst>
+                  <a:ext uri="{0D108BD9-81ED-4DB2-BD59-A6C34878D82A}">
+                    <a16:rowId xmlns:a16="http://schemas.microsoft.com/office/drawing/2014/main" val="10013"/>
+                  </a:ext>
+                </a:extLst>
               </a:tr>
             </a:tbl>
           </a:graphicData>
@@ -18492,7 +18400,7 @@
             <a:lstStyle/>
             <a:p>
               <a:r>
-                <a:rPr lang="de-DE" sz="4100" dirty="0" smtClean="0">
+                <a:rPr lang="de-DE" sz="4100" dirty="0">
                   <a:solidFill>
                     <a:schemeClr val="bg1"/>
                   </a:solidFill>
@@ -18500,12 +18408,6 @@
                 </a:rPr>
                 <a:t>Kooperative Partner</a:t>
               </a:r>
-              <a:endParaRPr lang="de-DE" sz="4100" dirty="0">
-                <a:solidFill>
-                  <a:schemeClr val="bg1"/>
-                </a:solidFill>
-                <a:latin typeface="Georgia" panose="02040502050405020303" pitchFamily="18" charset="0"/>
-              </a:endParaRPr>
             </a:p>
           </p:txBody>
         </p:sp>
@@ -18538,7 +18440,7 @@
               </a:lnSpc>
             </a:pPr>
             <a:r>
-              <a:rPr lang="de-DE" sz="2600" b="0" dirty="0" smtClean="0">
+              <a:rPr lang="de-DE" sz="2600" b="0" dirty="0">
                 <a:solidFill>
                   <a:srgbClr val="FFFFFF"/>
                 </a:solidFill>
@@ -18555,7 +18457,7 @@
               </a:lnSpc>
             </a:pPr>
             <a:r>
-              <a:rPr lang="de-DE" sz="2600" b="0" dirty="0" smtClean="0">
+              <a:rPr lang="de-DE" sz="2600" b="0" dirty="0">
                 <a:solidFill>
                   <a:srgbClr val="FFFFFF"/>
                 </a:solidFill>
@@ -18565,7 +18467,7 @@
               <a:t>+49 711</a:t>
             </a:r>
             <a:r>
-              <a:rPr lang="de-DE" sz="2600" b="0" baseline="0" dirty="0" smtClean="0">
+              <a:rPr lang="de-DE" sz="2600" b="0" baseline="0" dirty="0">
                 <a:solidFill>
                   <a:srgbClr val="FFFFFF"/>
                 </a:solidFill>
@@ -18582,7 +18484,7 @@
               </a:lnSpc>
             </a:pPr>
             <a:r>
-              <a:rPr lang="de-DE" sz="2600" b="0" baseline="0" dirty="0" smtClean="0">
+              <a:rPr lang="de-DE" sz="2600" b="0" baseline="0" dirty="0">
                 <a:solidFill>
                   <a:srgbClr val="FFFFFF"/>
                 </a:solidFill>
@@ -18674,13 +18576,6 @@
   <p:clrMapOvr>
     <a:masterClrMapping/>
   </p:clrMapOvr>
-  <p:timing>
-    <p:tnLst>
-      <p:par>
-        <p:cTn id="1" dur="indefinite" restart="never" nodeType="tmRoot"/>
-      </p:par>
-    </p:tnLst>
-  </p:timing>
 </p:sld>
 </file>
 
@@ -19241,14 +19136,14 @@
           <a:lstStyle/>
           <a:p>
             <a:r>
-              <a:rPr lang="pt-BR" smtClean="0"/>
+              <a:rPr lang="pt-BR"/>
               <a:t>Titel: Musterseite mit Bild, </a:t>
             </a:r>
             <a:br>
-              <a:rPr lang="pt-BR" smtClean="0"/>
+              <a:rPr lang="pt-BR"/>
             </a:br>
             <a:r>
-              <a:rPr lang="pt-BR" smtClean="0"/>
+              <a:rPr lang="pt-BR"/>
               <a:t>Aufzählung und Diagrammen</a:t>
             </a:r>
             <a:endParaRPr lang="de-DE" dirty="0"/>
@@ -19277,159 +19172,147 @@
           <a:p>
             <a:r>
               <a:rPr lang="de-DE" dirty="0"/>
-              <a:t>Projektziel ist die Entwicklung eines elektrischen Antriebs für ein einsitziges Hochleistungssegelflugzeug (ASG 29). Gegenüber klassischen Applikationen elektrischer Antriebe besteht die Herausforderung darin, eine möglichst große Steigrate bei möglichst geringer Masse in einem sehr beschränkten Bauraum zu erreichen. Gleichzeitig sind die verschiedenen </a:t>
-            </a:r>
-            <a:r>
-              <a:rPr lang="de-DE" dirty="0" smtClean="0"/>
-              <a:t> Anforderungen </a:t>
-            </a:r>
+              <a:t>Projektziel ist die Entwicklung eines elektrischen Antriebs für ein einsitziges Hochleistungssegelflugzeug (ASG 29). Gegenüber klassischen Applikationen elektrischer Antriebe besteht die Herausforderung darin, eine möglichst große Steigrate bei möglichst geringer Masse in einem sehr beschränkten Bauraum zu erreichen. Gleichzeitig sind die verschiedenen  Anforderungen und</a:t>
+            </a:r>
+          </a:p>
+          <a:p>
+            <a:endParaRPr lang="de-DE" dirty="0"/>
+          </a:p>
+          <a:p>
+            <a:endParaRPr lang="de-DE" dirty="0"/>
+          </a:p>
+          <a:p>
+            <a:endParaRPr lang="de-DE" dirty="0"/>
+          </a:p>
+          <a:p>
+            <a:endParaRPr lang="de-DE" dirty="0"/>
+          </a:p>
+          <a:p>
+            <a:endParaRPr lang="de-DE" dirty="0"/>
+          </a:p>
+          <a:p>
+            <a:endParaRPr lang="de-DE" dirty="0"/>
+          </a:p>
+          <a:p>
+            <a:endParaRPr lang="de-DE" dirty="0"/>
+          </a:p>
+          <a:p>
+            <a:endParaRPr lang="de-DE" dirty="0"/>
+          </a:p>
+          <a:p>
+            <a:endParaRPr lang="de-DE" dirty="0"/>
+          </a:p>
+          <a:p>
+            <a:endParaRPr lang="de-DE" dirty="0"/>
+          </a:p>
+          <a:p>
+            <a:r>
+              <a:rPr lang="de-DE" b="1" dirty="0" err="1"/>
+              <a:t>Zwischenhead</a:t>
+            </a:r>
+            <a:endParaRPr lang="de-DE" b="1" dirty="0"/>
+          </a:p>
+          <a:p>
             <a:r>
               <a:rPr lang="de-DE" dirty="0"/>
-              <a:t>und</a:t>
-            </a:r>
-          </a:p>
-          <a:p>
-            <a:endParaRPr lang="de-DE" dirty="0" smtClean="0"/>
-          </a:p>
-          <a:p>
-            <a:endParaRPr lang="de-DE" dirty="0" smtClean="0"/>
-          </a:p>
-          <a:p>
-            <a:endParaRPr lang="de-DE" dirty="0" smtClean="0"/>
-          </a:p>
-          <a:p>
-            <a:endParaRPr lang="de-DE" dirty="0" smtClean="0"/>
-          </a:p>
-          <a:p>
-            <a:endParaRPr lang="de-DE" dirty="0" smtClean="0"/>
-          </a:p>
-          <a:p>
-            <a:endParaRPr lang="de-DE" dirty="0" smtClean="0"/>
-          </a:p>
-          <a:p>
-            <a:endParaRPr lang="de-DE" dirty="0" smtClean="0"/>
-          </a:p>
-          <a:p>
-            <a:endParaRPr lang="de-DE" dirty="0" smtClean="0"/>
-          </a:p>
-          <a:p>
-            <a:endParaRPr lang="de-DE" dirty="0" smtClean="0"/>
-          </a:p>
-          <a:p>
-            <a:endParaRPr lang="de-DE" dirty="0" smtClean="0"/>
-          </a:p>
-          <a:p>
-            <a:r>
-              <a:rPr lang="de-DE" b="1" dirty="0" err="1" smtClean="0"/>
+              <a:t>Temperaturbereich, Anforderungen und Randbedingungen zu beachten, die sich bei dem Einbau in ein manntragendes Luftfahrzeug ergeben.</a:t>
+            </a:r>
+          </a:p>
+          <a:p>
+            <a:endParaRPr lang="de-DE" dirty="0"/>
+          </a:p>
+          <a:p>
+            <a:endParaRPr lang="de-DE" dirty="0"/>
+          </a:p>
+          <a:p>
+            <a:endParaRPr lang="de-DE" dirty="0"/>
+          </a:p>
+          <a:p>
+            <a:endParaRPr lang="de-DE" dirty="0"/>
+          </a:p>
+          <a:p>
+            <a:endParaRPr lang="de-DE" dirty="0"/>
+          </a:p>
+          <a:p>
+            <a:endParaRPr lang="de-DE" dirty="0"/>
+          </a:p>
+          <a:p>
+            <a:endParaRPr lang="de-DE" dirty="0"/>
+          </a:p>
+          <a:p>
+            <a:endParaRPr lang="de-DE" dirty="0"/>
+          </a:p>
+          <a:p>
+            <a:endParaRPr lang="de-DE" dirty="0"/>
+          </a:p>
+          <a:p>
+            <a:endParaRPr lang="de-DE" dirty="0"/>
+          </a:p>
+          <a:p>
+            <a:endParaRPr lang="de-DE" dirty="0"/>
+          </a:p>
+          <a:p>
+            <a:endParaRPr lang="de-DE" dirty="0"/>
+          </a:p>
+          <a:p>
+            <a:endParaRPr lang="de-DE" dirty="0"/>
+          </a:p>
+          <a:p>
+            <a:endParaRPr lang="de-DE" dirty="0"/>
+          </a:p>
+          <a:p>
+            <a:endParaRPr lang="de-DE" dirty="0"/>
+          </a:p>
+          <a:p>
+            <a:endParaRPr lang="de-DE" dirty="0"/>
+          </a:p>
+          <a:p>
+            <a:endParaRPr lang="de-DE" dirty="0"/>
+          </a:p>
+          <a:p>
+            <a:endParaRPr lang="de-DE" dirty="0"/>
+          </a:p>
+          <a:p>
+            <a:endParaRPr lang="de-DE" dirty="0"/>
+          </a:p>
+          <a:p>
+            <a:endParaRPr lang="de-DE" dirty="0"/>
+          </a:p>
+          <a:p>
+            <a:endParaRPr lang="de-DE" dirty="0"/>
+          </a:p>
+          <a:p>
+            <a:r>
+              <a:rPr lang="de-DE" b="1" dirty="0" err="1"/>
               <a:t>Zwischenhead</a:t>
             </a:r>
-            <a:endParaRPr lang="de-DE" b="1" dirty="0" smtClean="0"/>
-          </a:p>
-          <a:p>
-            <a:r>
-              <a:rPr lang="de-DE" dirty="0" smtClean="0"/>
-              <a:t>Temperaturbereich, Anforderungen und Randbedingungen zu beachten, die sich bei dem Einbau in ein manntragendes Luftfahrzeug ergeben.</a:t>
-            </a:r>
-          </a:p>
-          <a:p>
-            <a:endParaRPr lang="de-DE" dirty="0" smtClean="0"/>
-          </a:p>
-          <a:p>
-            <a:endParaRPr lang="de-DE" dirty="0" smtClean="0"/>
-          </a:p>
-          <a:p>
-            <a:endParaRPr lang="de-DE" dirty="0" smtClean="0"/>
-          </a:p>
-          <a:p>
-            <a:endParaRPr lang="de-DE" dirty="0" smtClean="0"/>
-          </a:p>
-          <a:p>
-            <a:endParaRPr lang="de-DE" dirty="0" smtClean="0"/>
-          </a:p>
-          <a:p>
-            <a:endParaRPr lang="de-DE" dirty="0" smtClean="0"/>
-          </a:p>
-          <a:p>
-            <a:endParaRPr lang="de-DE" dirty="0" smtClean="0"/>
-          </a:p>
-          <a:p>
-            <a:endParaRPr lang="de-DE" dirty="0" smtClean="0"/>
-          </a:p>
-          <a:p>
-            <a:endParaRPr lang="de-DE" dirty="0" smtClean="0"/>
-          </a:p>
-          <a:p>
-            <a:endParaRPr lang="de-DE" dirty="0" smtClean="0"/>
-          </a:p>
-          <a:p>
-            <a:endParaRPr lang="de-DE" dirty="0" smtClean="0"/>
-          </a:p>
-          <a:p>
-            <a:endParaRPr lang="de-DE" dirty="0" smtClean="0"/>
-          </a:p>
-          <a:p>
-            <a:endParaRPr lang="de-DE" dirty="0" smtClean="0"/>
-          </a:p>
-          <a:p>
-            <a:endParaRPr lang="de-DE" dirty="0" smtClean="0"/>
-          </a:p>
-          <a:p>
-            <a:endParaRPr lang="de-DE" dirty="0" smtClean="0"/>
-          </a:p>
-          <a:p>
-            <a:endParaRPr lang="de-DE" dirty="0" smtClean="0"/>
-          </a:p>
-          <a:p>
-            <a:endParaRPr lang="de-DE" dirty="0" smtClean="0"/>
-          </a:p>
-          <a:p>
-            <a:endParaRPr lang="de-DE" dirty="0" smtClean="0"/>
-          </a:p>
-          <a:p>
-            <a:endParaRPr lang="de-DE" dirty="0" smtClean="0"/>
-          </a:p>
-          <a:p>
-            <a:endParaRPr lang="de-DE" dirty="0" smtClean="0"/>
-          </a:p>
-          <a:p>
-            <a:endParaRPr lang="de-DE" dirty="0" smtClean="0"/>
-          </a:p>
-          <a:p>
-            <a:r>
-              <a:rPr lang="de-DE" b="1" dirty="0" err="1" smtClean="0"/>
-              <a:t>Zwischenhead</a:t>
-            </a:r>
-            <a:endParaRPr lang="de-DE" b="1" dirty="0" smtClean="0"/>
-          </a:p>
-          <a:p>
-            <a:r>
-              <a:rPr lang="de-DE" dirty="0" smtClean="0"/>
+            <a:endParaRPr lang="de-DE" b="1" dirty="0"/>
+          </a:p>
+          <a:p>
+            <a:r>
+              <a:rPr lang="de-DE" dirty="0"/>
               <a:t>zu beachten, die sich bei dem Einbau in ein manntragendes Luftfahrzeug ergeben (Sicherheitsanforderungen, großer Temperaturbereich, ...)</a:t>
             </a:r>
           </a:p>
           <a:p>
             <a:pPr lvl="1"/>
             <a:r>
-              <a:rPr lang="de-DE" dirty="0" smtClean="0"/>
+              <a:rPr lang="de-DE" dirty="0"/>
               <a:t>Zweite Textebene: Aufzählungszeichen und Einzug ab der zweiten Zeile:</a:t>
             </a:r>
             <a:br>
-              <a:rPr lang="de-DE" dirty="0" smtClean="0"/>
+              <a:rPr lang="de-DE" dirty="0"/>
             </a:br>
             <a:r>
-              <a:rPr lang="de-DE" dirty="0" smtClean="0"/>
+              <a:rPr lang="de-DE" dirty="0"/>
               <a:t>zur zweiten Textebene gelangt man durch Klick auf „Einzug vergrößern“. </a:t>
             </a:r>
           </a:p>
           <a:p>
             <a:pPr lvl="1"/>
             <a:r>
-              <a:rPr lang="de-DE" dirty="0" smtClean="0"/>
-              <a:t>Nur </a:t>
-            </a:r>
-            <a:r>
               <a:rPr lang="de-DE" dirty="0"/>
-              <a:t>über diese Funktion ist das richtige Aufzählungszeichen + Abstand gewährleistet </a:t>
+              <a:t>Nur über diese Funktion ist das richtige Aufzählungszeichen + Abstand gewährleistet </a:t>
             </a:r>
           </a:p>
           <a:p>
@@ -19440,7 +19323,7 @@
             </a:r>
           </a:p>
           <a:p>
-            <a:endParaRPr lang="de-DE" dirty="0" smtClean="0"/>
+            <a:endParaRPr lang="de-DE" dirty="0"/>
           </a:p>
         </p:txBody>
       </p:sp>
@@ -19460,7 +19343,7 @@
           <a:lstStyle/>
           <a:p>
             <a:r>
-              <a:rPr lang="de-DE" smtClean="0"/>
+              <a:rPr lang="de-DE"/>
               <a:t>Name, Studiengang</a:t>
             </a:r>
             <a:endParaRPr lang="de-DE" dirty="0"/>
@@ -19794,7 +19677,7 @@
           <a:lstStyle/>
           <a:p>
             <a:r>
-              <a:rPr lang="de-DE" smtClean="0"/>
+              <a:rPr lang="de-DE"/>
               <a:t>Bildunterschrift</a:t>
             </a:r>
             <a:endParaRPr lang="de-DE" dirty="0"/>
@@ -20010,7 +19893,7 @@
               </a:lnSpc>
             </a:pPr>
             <a:r>
-              <a:rPr lang="de-DE" sz="2600" b="0" dirty="0" smtClean="0">
+              <a:rPr lang="de-DE" sz="2600" b="0" dirty="0">
                 <a:solidFill>
                   <a:srgbClr val="FFFFFF"/>
                 </a:solidFill>
@@ -20027,7 +19910,7 @@
               </a:lnSpc>
             </a:pPr>
             <a:r>
-              <a:rPr lang="de-DE" sz="2600" b="0" dirty="0" smtClean="0">
+              <a:rPr lang="de-DE" sz="2600" b="0" dirty="0">
                 <a:solidFill>
                   <a:srgbClr val="FFFFFF"/>
                 </a:solidFill>
@@ -20037,7 +19920,7 @@
               <a:t>+49 711</a:t>
             </a:r>
             <a:r>
-              <a:rPr lang="de-DE" sz="2600" b="0" baseline="0" dirty="0" smtClean="0">
+              <a:rPr lang="de-DE" sz="2600" b="0" baseline="0" dirty="0">
                 <a:solidFill>
                   <a:srgbClr val="FFFFFF"/>
                 </a:solidFill>
@@ -20054,7 +19937,7 @@
               </a:lnSpc>
             </a:pPr>
             <a:r>
-              <a:rPr lang="de-DE" sz="2600" b="0" baseline="0" dirty="0" smtClean="0">
+              <a:rPr lang="de-DE" sz="2600" b="0" baseline="0" dirty="0">
                 <a:solidFill>
                   <a:srgbClr val="FFFFFF"/>
                 </a:solidFill>
@@ -20500,7 +20383,7 @@
             <a:lstStyle/>
             <a:p>
               <a:r>
-                <a:rPr lang="de-DE" sz="4100" dirty="0" smtClean="0">
+                <a:rPr lang="de-DE" sz="4100" dirty="0">
                   <a:solidFill>
                     <a:schemeClr val="bg1"/>
                   </a:solidFill>
@@ -20508,12 +20391,6 @@
                 </a:rPr>
                 <a:t>Kooperative Partner</a:t>
               </a:r>
-              <a:endParaRPr lang="de-DE" sz="4100" dirty="0">
-                <a:solidFill>
-                  <a:schemeClr val="bg1"/>
-                </a:solidFill>
-                <a:latin typeface="Georgia" panose="02040502050405020303" pitchFamily="18" charset="0"/>
-              </a:endParaRPr>
             </a:p>
           </p:txBody>
         </p:sp>
@@ -20594,13 +20471,6 @@
   <p:clrMapOvr>
     <a:masterClrMapping/>
   </p:clrMapOvr>
-  <p:timing>
-    <p:tnLst>
-      <p:par>
-        <p:cTn id="1" dur="indefinite" restart="never" nodeType="tmRoot"/>
-      </p:par>
-    </p:tnLst>
-  </p:timing>
 </p:sld>
 </file>
 
@@ -20865,6 +20735,21 @@
 </file>
 
 <file path=customXml/item1.xml><?xml version="1.0" encoding="utf-8"?>
+<?mso-contentType ?>
+<FormTemplates xmlns="http://schemas.microsoft.com/sharepoint/v3/contenttype/forms">
+  <Display>DocumentLibraryForm</Display>
+  <Edit>DocumentLibraryForm</Edit>
+  <New>DocumentLibraryForm</New>
+</FormTemplates>
+</file>
+
+<file path=customXml/item2.xml><?xml version="1.0" encoding="utf-8"?>
+<p:properties xmlns:p="http://schemas.microsoft.com/office/2006/metadata/properties" xmlns:xsi="http://www.w3.org/2001/XMLSchema-instance" xmlns:pc="http://schemas.microsoft.com/office/infopath/2007/PartnerControls">
+  <documentManagement/>
+</p:properties>
+</file>
+
+<file path=customXml/item3.xml><?xml version="1.0" encoding="utf-8"?>
 <ct:contentTypeSchema xmlns:ct="http://schemas.microsoft.com/office/2006/metadata/contentType" xmlns:ma="http://schemas.microsoft.com/office/2006/metadata/properties/metaAttributes" ct:_="" ma:_="" ma:contentTypeName="Dokument" ma:contentTypeID="0x010100FDDE6A6E4B2C1D4694A375EE7BD2A10A" ma:contentTypeVersion="0" ma:contentTypeDescription="Ein neues Dokument erstellen." ma:contentTypeScope="" ma:versionID="68625de2cda4353510d2e397034744d9">
   <xsd:schema xmlns:xsd="http://www.w3.org/2001/XMLSchema" xmlns:xs="http://www.w3.org/2001/XMLSchema" xmlns:p="http://schemas.microsoft.com/office/2006/metadata/properties" targetNamespace="http://schemas.microsoft.com/office/2006/metadata/properties" ma:root="true" ma:fieldsID="b4f5dc90cf06628c3b90945c8266c24d">
     <xsd:element name="properties">
@@ -20978,29 +20863,35 @@
 </ct:contentTypeSchema>
 </file>
 
-<file path=customXml/item2.xml><?xml version="1.0" encoding="utf-8"?>
-<p:properties xmlns:p="http://schemas.microsoft.com/office/2006/metadata/properties" xmlns:xsi="http://www.w3.org/2001/XMLSchema-instance" xmlns:pc="http://schemas.microsoft.com/office/infopath/2007/PartnerControls">
-  <documentManagement/>
-</p:properties>
-</file>
-
-<file path=customXml/item3.xml><?xml version="1.0" encoding="utf-8"?>
-<?mso-contentType ?>
-<FormTemplates xmlns="http://schemas.microsoft.com/sharepoint/v3/contenttype/forms">
-  <Display>DocumentLibraryForm</Display>
-  <Edit>DocumentLibraryForm</Edit>
-  <New>DocumentLibraryForm</New>
-</FormTemplates>
-</file>
-
 <file path=customXml/itemProps1.xml><?xml version="1.0" encoding="utf-8"?>
-<ds:datastoreItem xmlns:ds="http://schemas.openxmlformats.org/officeDocument/2006/customXml" ds:itemID="{9EE857F8-A2A5-4E23-846A-E89572633C7B}"/>
+<ds:datastoreItem xmlns:ds="http://schemas.openxmlformats.org/officeDocument/2006/customXml" ds:itemID="{740B5E05-B7E9-46F8-8822-6FC0E40CE427}">
+  <ds:schemaRefs>
+    <ds:schemaRef ds:uri="http://schemas.microsoft.com/sharepoint/v3/contenttype/forms"/>
+  </ds:schemaRefs>
+</ds:datastoreItem>
 </file>
 
 <file path=customXml/itemProps2.xml><?xml version="1.0" encoding="utf-8"?>
-<ds:datastoreItem xmlns:ds="http://schemas.openxmlformats.org/officeDocument/2006/customXml" ds:itemID="{6E70B1F3-6B62-4ED8-8311-419B894E5C31}"/>
+<ds:datastoreItem xmlns:ds="http://schemas.openxmlformats.org/officeDocument/2006/customXml" ds:itemID="{6E70B1F3-6B62-4ED8-8311-419B894E5C31}">
+  <ds:schemaRefs>
+    <ds:schemaRef ds:uri="http://schemas.microsoft.com/office/2006/metadata/properties"/>
+    <ds:schemaRef ds:uri="http://schemas.microsoft.com/office/infopath/2007/PartnerControls"/>
+  </ds:schemaRefs>
+</ds:datastoreItem>
 </file>
 
 <file path=customXml/itemProps3.xml><?xml version="1.0" encoding="utf-8"?>
-<ds:datastoreItem xmlns:ds="http://schemas.openxmlformats.org/officeDocument/2006/customXml" ds:itemID="{740B5E05-B7E9-46F8-8822-6FC0E40CE427}"/>
+<ds:datastoreItem xmlns:ds="http://schemas.openxmlformats.org/officeDocument/2006/customXml" ds:itemID="{9EE857F8-A2A5-4E23-846A-E89572633C7B}">
+  <ds:schemaRefs>
+    <ds:schemaRef ds:uri="http://schemas.microsoft.com/office/2006/metadata/contentType"/>
+    <ds:schemaRef ds:uri="http://schemas.microsoft.com/office/2006/metadata/properties/metaAttributes"/>
+    <ds:schemaRef ds:uri="http://www.w3.org/2001/XMLSchema"/>
+    <ds:schemaRef ds:uri="http://schemas.microsoft.com/office/2006/metadata/properties"/>
+    <ds:schemaRef ds:uri="http://schemas.openxmlformats.org/package/2006/metadata/core-properties"/>
+    <ds:schemaRef ds:uri="http://purl.org/dc/elements/1.1/"/>
+    <ds:schemaRef ds:uri="http://purl.org/dc/terms/"/>
+    <ds:schemaRef ds:uri="http://schemas.microsoft.com/internal/obd"/>
+    <ds:schemaRef ds:uri="http://schemas.microsoft.com/office/infopath/2007/PartnerControls"/>
+  </ds:schemaRefs>
+</ds:datastoreItem>
 </file>